--- a/submission/기술설명서_KB_Payee_Guard.pptx
+++ b/submission/기술설명서_KB_Payee_Guard.pptx
@@ -2378,7 +2378,28 @@
                 <a:ea typeface="Calibri" pitchFamily="34" charset="-122"/>
                 <a:cs typeface="Calibri" pitchFamily="34" charset="-120"/>
               </a:rPr>
-              <a:t>L4 규칙 테이블 R0~R11 + 도달성 검사</a:t>
+              <a:t>L4 규칙 테이블 11개 + 도달성 검사</a:t>
+            </a:r>
+            <a:endParaRPr lang="en-US" sz="1150" dirty="0"/>
+          </a:p>
+          <a:p>
+            <a:pPr marL="342900" indent="-342900">
+              <a:lnSpc>
+                <a:spcPts val="1900"/>
+              </a:lnSpc>
+              <a:buSzPct val="100000"/>
+              <a:buChar char="•"/>
+            </a:pPr>
+            <a:r>
+              <a:rPr lang="en-US" sz="1150" dirty="0">
+                <a:solidFill>
+                  <a:srgbClr val="FFFFFF"/>
+                </a:solidFill>
+                <a:latin typeface="Calibri" pitchFamily="34" charset="0"/>
+                <a:ea typeface="Calibri" pitchFamily="34" charset="-122"/>
+                <a:cs typeface="Calibri" pitchFamily="34" charset="-120"/>
+              </a:rPr>
+              <a:t>승인 게이트 + 원장 — 1회용·건·계좌 결박·TTL</a:t>
             </a:r>
             <a:endParaRPr lang="en-US" sz="1150" dirty="0"/>
           </a:p>
@@ -2529,7 +2550,7 @@
                 <a:ea typeface="Calibri" pitchFamily="34" charset="-122"/>
                 <a:cs typeface="Calibri" pitchFamily="34" charset="-120"/>
               </a:rPr>
-              <a:t>송금 신청 화면 시뮬레이터</a:t>
+              <a:t>L5 근거 서술 (현재는 결정론 문장)</a:t>
             </a:r>
             <a:endParaRPr lang="en-US" sz="1150" dirty="0"/>
           </a:p>
@@ -2550,7 +2571,7 @@
                 <a:ea typeface="Calibri" pitchFamily="34" charset="-122"/>
                 <a:cs typeface="Calibri" pitchFamily="34" charset="-120"/>
               </a:rPr>
-              <a:t>승인 원장 + 감사 로그 배선</a:t>
+              <a:t>송금 신청 화면 시뮬레이터</a:t>
             </a:r>
             <a:endParaRPr lang="en-US" sz="1150" dirty="0"/>
           </a:p>
@@ -2661,7 +2682,7 @@
                 <a:ea typeface="Calibri" pitchFamily="34" charset="-122"/>
                 <a:cs typeface="Calibri" pitchFamily="34" charset="-120"/>
               </a:rPr>
-              <a:t>법정 제출 서류만 사용해 은행 내부 API 의존 0 · 코어는 표준 라이브러리만 · 테스트 94건이 API 키 없이 완주합니다.</a:t>
+              <a:t>법정 제출 서류만 사용해 은행 내부 API 의존 0 · 코어는 표준 라이브러리만 · 테스트 122건이 API 키 없이 완주합니다.</a:t>
             </a:r>
             <a:endParaRPr lang="en-US" sz="1200" dirty="0"/>
           </a:p>
@@ -7785,12 +7806,12 @@
         </p:nvSpPr>
         <p:spPr>
           <a:xfrm>
-            <a:off x="502920" y="4160520"/>
-            <a:ext cx="8138160" cy="457200"/>
+            <a:off x="502920" y="4114800"/>
+            <a:ext cx="8138160" cy="658368"/>
           </a:xfrm>
           <a:prstGeom prst="roundRect">
             <a:avLst>
-              <a:gd name="adj" fmla="val 16000"/>
+              <a:gd name="adj" fmla="val 11111"/>
             </a:avLst>
           </a:prstGeom>
           <a:solidFill>
@@ -7812,24 +7833,48 @@
         </p:nvSpPr>
         <p:spPr>
           <a:xfrm>
-            <a:off x="758952" y="4261104"/>
-            <a:ext cx="7772400" cy="274320"/>
-          </a:xfrm>
-          <a:prstGeom prst="rect">
-            <a:avLst/>
-          </a:prstGeom>
-          <a:noFill/>
-          <a:ln/>
-        </p:spPr>
-        <p:txBody>
-          <a:bodyPr wrap="square" lIns="0" tIns="0" rIns="0" bIns="0" rtlCol="0" anchor="ctr"/>
-          <a:lstStyle/>
-          <a:p>
-            <a:pPr indent="0" marL="0">
-              <a:buNone/>
-            </a:pPr>
-            <a:r>
-              <a:rPr lang="en-US" sz="1200" dirty="0">
+            <a:off x="758952" y="4224528"/>
+            <a:ext cx="7772400" cy="502920"/>
+          </a:xfrm>
+          <a:prstGeom prst="rect">
+            <a:avLst/>
+          </a:prstGeom>
+          <a:noFill/>
+          <a:ln/>
+        </p:spPr>
+        <p:txBody>
+          <a:bodyPr wrap="square" lIns="0" tIns="0" rIns="0" bIns="0" rtlCol="0" anchor="ctr"/>
+          <a:lstStyle/>
+          <a:p>
+            <a:pPr indent="0" marL="0">
+              <a:lnSpc>
+                <a:spcPts val="1600"/>
+              </a:lnSpc>
+              <a:buNone/>
+            </a:pPr>
+            <a:r>
+              <a:rPr lang="en-US" sz="1150" b="1" dirty="0">
+                <a:solidFill>
+                  <a:srgbClr val="E8A33D"/>
+                </a:solidFill>
+                <a:latin typeface="Calibri" pitchFamily="34" charset="0"/>
+                <a:ea typeface="Calibri" pitchFamily="34" charset="-122"/>
+                <a:cs typeface="Calibri" pitchFamily="34" charset="-120"/>
+              </a:rPr>
+              <a:t>그리고 위험 판정이 나오면 사람 승인 없이는 못 지나갑니다.
+</a:t>
+            </a:r>
+            <a:endParaRPr lang="en-US" sz="1150" dirty="0"/>
+          </a:p>
+          <a:p>
+            <a:pPr indent="0" marL="0">
+              <a:lnSpc>
+                <a:spcPts val="1600"/>
+              </a:lnSpc>
+              <a:buNone/>
+            </a:pPr>
+            <a:r>
+              <a:rPr lang="en-US" sz="1150" dirty="0">
                 <a:solidFill>
                   <a:srgbClr val="FFFFFF"/>
                 </a:solidFill>
@@ -7837,9 +7882,77 @@
                 <a:ea typeface="Calibri" pitchFamily="34" charset="-122"/>
                 <a:cs typeface="Calibri" pitchFamily="34" charset="-120"/>
               </a:rPr>
-              <a:t>판정에 튜닝할 가중치도 임계값도 없습니다. 규칙의 조건이 곧 사용자에게 보이는 문장입니다.</a:t>
-            </a:r>
-            <a:endParaRPr lang="en-US" sz="1200" dirty="0"/>
+              <a:t>게이트는 승인 </a:t>
+            </a:r>
+            <a:pPr indent="0" marL="0">
+              <a:lnSpc>
+                <a:spcPts val="1600"/>
+              </a:lnSpc>
+              <a:buNone/>
+            </a:pPr>
+            <a:r>
+              <a:rPr lang="en-US" sz="1150" b="1" dirty="0">
+                <a:solidFill>
+                  <a:srgbClr val="FFFFFF"/>
+                </a:solidFill>
+                <a:latin typeface="Calibri" pitchFamily="34" charset="0"/>
+                <a:ea typeface="Calibri" pitchFamily="34" charset="-122"/>
+                <a:cs typeface="Calibri" pitchFamily="34" charset="-120"/>
+              </a:rPr>
+              <a:t>객체</a:t>
+            </a:r>
+            <a:pPr indent="0" marL="0">
+              <a:lnSpc>
+                <a:spcPts val="1600"/>
+              </a:lnSpc>
+              <a:buNone/>
+            </a:pPr>
+            <a:r>
+              <a:rPr lang="en-US" sz="1150" dirty="0">
+                <a:solidFill>
+                  <a:srgbClr val="FFFFFF"/>
+                </a:solidFill>
+                <a:latin typeface="Calibri" pitchFamily="34" charset="0"/>
+                <a:ea typeface="Calibri" pitchFamily="34" charset="-122"/>
+                <a:cs typeface="Calibri" pitchFamily="34" charset="-120"/>
+              </a:rPr>
+              <a:t>를 받지 않고 </a:t>
+            </a:r>
+            <a:pPr indent="0" marL="0">
+              <a:lnSpc>
+                <a:spcPts val="1600"/>
+              </a:lnSpc>
+              <a:buNone/>
+            </a:pPr>
+            <a:r>
+              <a:rPr lang="en-US" sz="1150" b="1" dirty="0">
+                <a:solidFill>
+                  <a:srgbClr val="FFFFFF"/>
+                </a:solidFill>
+                <a:latin typeface="Calibri" pitchFamily="34" charset="0"/>
+                <a:ea typeface="Calibri" pitchFamily="34" charset="-122"/>
+                <a:cs typeface="Calibri" pitchFamily="34" charset="-120"/>
+              </a:rPr>
+              <a:t>id 문자열만</a:t>
+            </a:r>
+            <a:pPr indent="0" marL="0">
+              <a:lnSpc>
+                <a:spcPts val="1600"/>
+              </a:lnSpc>
+              <a:buNone/>
+            </a:pPr>
+            <a:r>
+              <a:rPr lang="en-US" sz="1150" dirty="0">
+                <a:solidFill>
+                  <a:srgbClr val="FFFFFF"/>
+                </a:solidFill>
+                <a:latin typeface="Calibri" pitchFamily="34" charset="0"/>
+                <a:ea typeface="Calibri" pitchFamily="34" charset="-122"/>
+                <a:cs typeface="Calibri" pitchFamily="34" charset="-120"/>
+              </a:rPr>
+              <a:t> 받아 원장에서 조회합니다 — 모델이 승인을 지어낼 경로가 타입 수준에 없습니다.</a:t>
+            </a:r>
+            <a:endParaRPr lang="en-US" sz="1150" dirty="0"/>
           </a:p>
         </p:txBody>
       </p:sp>
@@ -8160,7 +8273,7 @@
                 <a:ea typeface="Calibri" pitchFamily="34" charset="-122"/>
                 <a:cs typeface="Calibri" pitchFamily="34" charset="-120"/>
               </a:rPr>
-              <a:t>테스트 94건, 외부 API 없이 0.14초</a:t>
+              <a:t>테스트 122건, 외부 API 없이 1초 미만</a:t>
             </a:r>
             <a:endParaRPr lang="en-US" sz="1150" dirty="0"/>
           </a:p>

--- a/submission/기술설명서_KB_Payee_Guard.pptx
+++ b/submission/기술설명서_KB_Payee_Guard.pptx
@@ -18874,7 +18874,7 @@
                 <a:ea typeface="맑은 고딕" pitchFamily="34" charset="-122"/>
                 <a:cs typeface="맑은 고딕" pitchFamily="34" charset="-120"/>
               </a:rPr>
-              <a:t>승인 없이 통과 불가 · 1회용 + 건·계좌 결박 · 모델 자가 승인 차단</a:t>
+              <a:t>승인 없이 통과 불가 · 1회용 · 건·계좌 결박</a:t>
             </a:r>
             <a:endParaRPr lang="en-US" sz="900" dirty="0"/>
           </a:p>
@@ -18913,7 +18913,7 @@
                 <a:ea typeface="맑은 고딕" pitchFamily="34" charset="-122"/>
                 <a:cs typeface="맑은 고딕" pitchFamily="34" charset="-120"/>
               </a:rPr>
-              <a:t>게이트가 승인 객체가 아니라 id 만 받아 원장 조회 — T1~T5·T10 통과 · INV-1(AST 검사) 미구현</a:t>
+              <a:t>id 만 받아 원장 조회 — T1~T5·T10 통과</a:t>
             </a:r>
             <a:endParaRPr lang="en-US" sz="800" dirty="0"/>
           </a:p>
@@ -19300,7 +19300,7 @@
                 <a:ea typeface="맑은 고딕" pitchFamily="34" charset="-122"/>
                 <a:cs typeface="맑은 고딕" pitchFamily="34" charset="-120"/>
               </a:rPr>
-              <a:t>출처 — workflows/kb-payee-guard.workflow.yaml (12 nodes) · docs/02_기술명세서.md §2·§10 · L5가 설계 단계인 것은 현재로선 이점이다 — 판정도 근거 문장도 전부 결정론이라 삽입된 지시가 사용자 설명까지 오염시킬 경로가 없다</a:t>
+              <a:t>출처 — workflows/kb-payee-guard.workflow.yaml (12 nodes) · docs/02_기술명세서.md §2·§10 · INV-1(판정 엔진 외부 호출 금지)은 순수 함수라 사실상 만족하나 AST 검사기는 미구현이다 · L5가 설계 단계인 것은 현재로선 이점이다 — 판정도 근거 문장도 전부 결정론이라 삽입된 지시가 사용자 설명까지 오염시킬 경로가 없다</a:t>
             </a:r>
             <a:endParaRPr lang="en-US" sz="850" dirty="0"/>
           </a:p>

--- a/submission/기술설명서_KB_Payee_Guard.pptx
+++ b/submission/기술설명서_KB_Payee_Guard.pptx
@@ -7715,7 +7715,7 @@
                 <a:ea typeface="Consolas" pitchFamily="34" charset="-122"/>
                 <a:cs typeface="Consolas" pitchFamily="34" charset="-120"/>
               </a:rPr>
-              <a:t>  Ran 122 tests — OK   (macOS 실측 0.23~0.39초)
+              <a:t>  Ran 122 tests — OK   (macOS 8회 실측 0.28~0.47초)
 </a:t>
             </a:r>
             <a:endParaRPr lang="en-US" sz="950" dirty="0"/>

--- a/submission/기술설명서_KB_Payee_Guard.pptx
+++ b/submission/기술설명서_KB_Payee_Guard.pptx
@@ -1773,8 +1773,8 @@
         </p:nvSpPr>
         <p:spPr>
           <a:xfrm>
-            <a:off x="658368" y="566928"/>
-            <a:ext cx="10872216" cy="274320"/>
+            <a:off x="658368" y="1847088"/>
+            <a:ext cx="10872216" cy="292608"/>
           </a:xfrm>
           <a:prstGeom prst="rect">
             <a:avLst/>
@@ -1790,17 +1790,17 @@
               <a:buNone/>
             </a:pPr>
             <a:r>
-              <a:rPr lang="en-US" sz="1150" b="1" spc="120" kern="0" dirty="0">
+              <a:rPr lang="en-US" sz="1200" b="1" spc="120" kern="0" dirty="0">
                 <a:solidFill>
-                  <a:srgbClr val="B45309"/>
+                  <a:srgbClr val="6B6A66"/>
                 </a:solidFill>
                 <a:latin typeface="맑은 고딕" pitchFamily="34" charset="0"/>
                 <a:ea typeface="맑은 고딕" pitchFamily="34" charset="-122"/>
                 <a:cs typeface="맑은 고딕" pitchFamily="34" charset="-120"/>
               </a:rPr>
-              <a:t>제8회 Future Finance AI Challenge · 예선 기술설명서 · 금융 자유주제</a:t>
+              <a:t>제8회 Future Finance AI Challenge · 예선 기술설명서</a:t>
             </a:r>
-            <a:endParaRPr lang="en-US" sz="1150" dirty="0"/>
+            <a:endParaRPr lang="en-US" sz="1200" dirty="0"/>
           </a:p>
         </p:txBody>
       </p:sp>
@@ -1812,8 +1812,8 @@
         </p:nvSpPr>
         <p:spPr>
           <a:xfrm>
-            <a:off x="658368" y="932688"/>
-            <a:ext cx="10872216" cy="777240"/>
+            <a:off x="658368" y="2249424"/>
+            <a:ext cx="10872216" cy="868680"/>
           </a:xfrm>
           <a:prstGeom prst="rect">
             <a:avLst/>
@@ -1829,7 +1829,7 @@
               <a:buNone/>
             </a:pPr>
             <a:r>
-              <a:rPr lang="en-US" sz="4200" b="1" dirty="0">
+              <a:rPr lang="en-US" sz="4600" b="1" dirty="0">
                 <a:solidFill>
                   <a:srgbClr val="37352F"/>
                 </a:solidFill>
@@ -1839,7 +1839,7 @@
               </a:rPr>
               <a:t>KB Payee Guard</a:t>
             </a:r>
-            <a:endParaRPr lang="en-US" sz="4200" dirty="0"/>
+            <a:endParaRPr lang="en-US" sz="4600" dirty="0"/>
           </a:p>
         </p:txBody>
       </p:sp>
@@ -1851,8 +1851,8 @@
         </p:nvSpPr>
         <p:spPr>
           <a:xfrm>
-            <a:off x="658368" y="1719072"/>
-            <a:ext cx="10872216" cy="384048"/>
+            <a:off x="658368" y="3145536"/>
+            <a:ext cx="10872216" cy="438912"/>
           </a:xfrm>
           <a:prstGeom prst="rect">
             <a:avLst/>
@@ -1868,7 +1868,7 @@
               <a:buNone/>
             </a:pPr>
             <a:r>
-              <a:rPr lang="en-US" sz="1800" dirty="0">
+              <a:rPr lang="en-US" sz="1900" dirty="0">
                 <a:solidFill>
                   <a:srgbClr val="5C5B57"/>
                 </a:solidFill>
@@ -1876,9 +1876,9 @@
                 <a:ea typeface="맑은 고딕" pitchFamily="34" charset="-122"/>
                 <a:cs typeface="맑은 고딕" pitchFamily="34" charset="-120"/>
               </a:rPr>
-              <a:t>계약서 기반 해외송금 무결성 게이트</a:t>
+              <a:t>계약서 절차 조항 대조로 무역대금 송금 사기를 차단하는 AI 에이전트</a:t>
             </a:r>
-            <a:endParaRPr lang="en-US" sz="1800" dirty="0"/>
+            <a:endParaRPr lang="en-US" sz="1900" dirty="0"/>
           </a:p>
         </p:txBody>
       </p:sp>
@@ -1890,16 +1890,14 @@
         </p:nvSpPr>
         <p:spPr>
           <a:xfrm>
-            <a:off x="658368" y="2249424"/>
-            <a:ext cx="10872216" cy="841248"/>
+            <a:off x="658368" y="3803904"/>
+            <a:ext cx="2011680" cy="27432"/>
           </a:xfrm>
-          <a:prstGeom prst="roundRect">
-            <a:avLst>
-              <a:gd name="adj" fmla="val 2174"/>
-            </a:avLst>
+          <a:prstGeom prst="rect">
+            <a:avLst/>
           </a:prstGeom>
           <a:solidFill>
-            <a:srgbClr val="F1F1EF"/>
+            <a:srgbClr val="E9E9E7"/>
           </a:solidFill>
           <a:ln/>
         </p:spPr>
@@ -1912,136 +1910,8 @@
         </p:nvSpPr>
         <p:spPr>
           <a:xfrm>
-            <a:off x="932688" y="2249424"/>
-            <a:ext cx="10323576" cy="841248"/>
-          </a:xfrm>
-          <a:prstGeom prst="rect">
-            <a:avLst/>
-          </a:prstGeom>
-          <a:noFill/>
-          <a:ln/>
-        </p:spPr>
-        <p:txBody>
-          <a:bodyPr wrap="square" lIns="0" tIns="0" rIns="0" bIns="0" rtlCol="0" anchor="ctr"/>
-          <a:lstStyle/>
-          <a:p>
-            <a:pPr indent="0" marL="0">
-              <a:lnSpc>
-                <a:spcPts val="1900"/>
-              </a:lnSpc>
-              <a:buNone/>
-            </a:pPr>
-            <a:r>
-              <a:rPr lang="en-US" sz="1150" dirty="0">
-                <a:solidFill>
-                  <a:srgbClr val="37352F"/>
-                </a:solidFill>
-                <a:latin typeface="맑은 고딕" pitchFamily="34" charset="0"/>
-                <a:ea typeface="맑은 고딕" pitchFamily="34" charset="-122"/>
-                <a:cs typeface="맑은 고딕" pitchFamily="34" charset="-120"/>
-              </a:rPr>
-              <a:t>해외송금 신청 시 외국환거래법상 이미 법정 제출되는 계약서를 읽어, 계좌 변경 지시가 계약이 정한 절차를 따랐는지 대조하고 어긋나면 송금을 보류한다.
-</a:t>
-            </a:r>
-            <a:pPr indent="0" marL="0">
-              <a:lnSpc>
-                <a:spcPts val="1900"/>
-              </a:lnSpc>
-              <a:buNone/>
-            </a:pPr>
-            <a:r>
-              <a:rPr lang="en-US" sz="1150" dirty="0">
-                <a:solidFill>
-                  <a:srgbClr val="37352F"/>
-                </a:solidFill>
-                <a:latin typeface="맑은 고딕" pitchFamily="34" charset="0"/>
-                <a:ea typeface="맑은 고딕" pitchFamily="34" charset="-122"/>
-                <a:cs typeface="맑은 고딕" pitchFamily="34" charset="-120"/>
-              </a:rPr>
-              <a:t>경쟁 제품은 계좌라는 </a:t>
-            </a:r>
-            <a:pPr indent="0" marL="0">
-              <a:lnSpc>
-                <a:spcPts val="1900"/>
-              </a:lnSpc>
-              <a:buNone/>
-            </a:pPr>
-            <a:r>
-              <a:rPr lang="en-US" sz="1150" b="1" dirty="0">
-                <a:solidFill>
-                  <a:srgbClr val="C4302F"/>
-                </a:solidFill>
-                <a:latin typeface="맑은 고딕" pitchFamily="34" charset="0"/>
-                <a:ea typeface="맑은 고딕" pitchFamily="34" charset="-122"/>
-                <a:cs typeface="맑은 고딕" pitchFamily="34" charset="-120"/>
-              </a:rPr>
-              <a:t>값</a:t>
-            </a:r>
-            <a:pPr indent="0" marL="0">
-              <a:lnSpc>
-                <a:spcPts val="1900"/>
-              </a:lnSpc>
-              <a:buNone/>
-            </a:pPr>
-            <a:r>
-              <a:rPr lang="en-US" sz="1150" dirty="0">
-                <a:solidFill>
-                  <a:srgbClr val="37352F"/>
-                </a:solidFill>
-                <a:latin typeface="맑은 고딕" pitchFamily="34" charset="0"/>
-                <a:ea typeface="맑은 고딕" pitchFamily="34" charset="-122"/>
-                <a:cs typeface="맑은 고딕" pitchFamily="34" charset="-120"/>
-              </a:rPr>
-              <a:t>을 검증한다. 값은 사기범이 통제할 수 있다. 본 과제는 그 값이 온 </a:t>
-            </a:r>
-            <a:pPr indent="0" marL="0">
-              <a:lnSpc>
-                <a:spcPts val="1900"/>
-              </a:lnSpc>
-              <a:buNone/>
-            </a:pPr>
-            <a:r>
-              <a:rPr lang="en-US" sz="1150" b="1" dirty="0">
-                <a:solidFill>
-                  <a:srgbClr val="3B7355"/>
-                </a:solidFill>
-                <a:latin typeface="맑은 고딕" pitchFamily="34" charset="0"/>
-                <a:ea typeface="맑은 고딕" pitchFamily="34" charset="-122"/>
-                <a:cs typeface="맑은 고딕" pitchFamily="34" charset="-120"/>
-              </a:rPr>
-              <a:t>경로</a:t>
-            </a:r>
-            <a:pPr indent="0" marL="0">
-              <a:lnSpc>
-                <a:spcPts val="1900"/>
-              </a:lnSpc>
-              <a:buNone/>
-            </a:pPr>
-            <a:r>
-              <a:rPr lang="en-US" sz="1150" dirty="0">
-                <a:solidFill>
-                  <a:srgbClr val="37352F"/>
-                </a:solidFill>
-                <a:latin typeface="맑은 고딕" pitchFamily="34" charset="0"/>
-                <a:ea typeface="맑은 고딕" pitchFamily="34" charset="-122"/>
-                <a:cs typeface="맑은 고딕" pitchFamily="34" charset="-120"/>
-              </a:rPr>
-              <a:t>를 검증한다 — 경로 규칙은 계약 체결 시점에 잠긴다.</a:t>
-            </a:r>
-            <a:endParaRPr lang="en-US" sz="1150" dirty="0"/>
-          </a:p>
-        </p:txBody>
-      </p:sp>
-      <p:sp>
-        <p:nvSpPr>
-          <p:cNvPr id="7" name="Text 5"/>
-          <p:cNvSpPr/>
-          <p:nvPr/>
-        </p:nvSpPr>
-        <p:spPr>
-          <a:xfrm>
-            <a:off x="658368" y="3255264"/>
-            <a:ext cx="10872216" cy="219456"/>
+            <a:off x="658368" y="4078224"/>
+            <a:ext cx="9692640" cy="384048"/>
           </a:xfrm>
           <a:prstGeom prst="rect">
             <a:avLst/>
@@ -2057,3102 +1927,45 @@
               <a:buNone/>
             </a:pPr>
             <a:r>
-              <a:rPr lang="en-US" sz="950" b="1" dirty="0">
+              <a:rPr lang="en-US" sz="1500" dirty="0">
                 <a:solidFill>
-                  <a:srgbClr val="6B6A66"/>
+                  <a:srgbClr val="37352F"/>
                 </a:solidFill>
                 <a:latin typeface="맑은 고딕" pitchFamily="34" charset="0"/>
                 <a:ea typeface="맑은 고딕" pitchFamily="34" charset="-122"/>
                 <a:cs typeface="맑은 고딕" pitchFamily="34" charset="-120"/>
               </a:rPr>
-              <a:t>표 1. 문서 구성과 심사배점 대응</a:t>
+              <a:t>계좌번호는 바꿀 수 있어도, 수년 전 계약서에 적힌 </a:t>
             </a:r>
-            <a:endParaRPr lang="en-US" sz="950" dirty="0"/>
-          </a:p>
-        </p:txBody>
-      </p:sp>
-      <p:graphicFrame>
-        <p:nvGraphicFramePr>
-          <p:cNvPr id="2" name="Table 0"/>
-          <p:cNvGraphicFramePr>
-            <a:graphicFrameLocks noGrp="1"/>
-          </p:cNvGraphicFramePr>
-          <p:nvPr>
-            <p:extLst>
-              <p:ext uri="{D42A27DB-BD31-4B8C-83A1-F6EECF244321}">
-                <p14:modId xmlns:p14="http://schemas.microsoft.com/office/powerpoint/2010/main" val="1579011935"/>
-              </p:ext>
-            </p:extLst>
-          </p:nvPr>
-        </p:nvGraphicFramePr>
-        <p:xfrm>
-          <a:off x="658368" y="3511296"/>
-          <a:ext cx="10872216" cy="914400"/>
-        </p:xfrm>
-        <a:graphic>
-          <a:graphicData uri="http://schemas.openxmlformats.org/drawingml/2006/table">
-            <a:tbl>
-              <a:tblPr/>
-              <a:tblGrid>
-                <a:gridCol w="566928"/>
-                <a:gridCol w="5349240"/>
-                <a:gridCol w="3310128"/>
-                <a:gridCol w="1645920"/>
-              </a:tblGrid>
-              <a:tr h="246888">
-                <a:tc>
-                  <a:txBody>
-                    <a:bodyPr/>
-                    <a:lstStyle/>
-                    <a:p>
-                      <a:pPr indent="0" marL="0">
-                        <a:buNone/>
-                      </a:pPr>
-                      <a:r>
-                        <a:rPr lang="en-US" sz="950" b="1" dirty="0">
-                          <a:solidFill>
-                            <a:srgbClr val="5C5B57"/>
-                          </a:solidFill>
-                          <a:latin typeface="맑은 고딕" pitchFamily="34" charset="0"/>
-                          <a:ea typeface="맑은 고딕" pitchFamily="34" charset="-122"/>
-                          <a:cs typeface="맑은 고딕" pitchFamily="34" charset="-120"/>
-                        </a:rPr>
-                        <a:t>장</a:t>
-                      </a:r>
-                      <a:endParaRPr lang="en-US" sz="950" dirty="0">
-                        <a:latin typeface="맑은 고딕" charset="0"/>
-                        <a:ea typeface="맑은 고딕" charset="0"/>
-                        <a:cs typeface="맑은 고딕" charset="0"/>
-                      </a:endParaRPr>
-                    </a:p>
-                  </a:txBody>
-                  <a:tcPr marL="76200" marR="76200" marT="25400" marB="25400" anchor="ctr">
-                    <a:lnL w="12700" cap="flat" cmpd="sng" algn="ctr">
-                      <a:solidFill>
-                        <a:srgbClr val="E9E9E7"/>
-                      </a:solidFill>
-                      <a:prstDash val="solid"/>
-                      <a:round/>
-                      <a:headEnd type="none" w="med" len="med"/>
-                      <a:tailEnd type="none" w="med" len="med"/>
-                    </a:lnL>
-                    <a:lnR w="12700" cap="flat" cmpd="sng" algn="ctr">
-                      <a:solidFill>
-                        <a:srgbClr val="E9E9E7"/>
-                      </a:solidFill>
-                      <a:prstDash val="solid"/>
-                      <a:round/>
-                      <a:headEnd type="none" w="med" len="med"/>
-                      <a:tailEnd type="none" w="med" len="med"/>
-                    </a:lnR>
-                    <a:lnT w="12700" cap="flat" cmpd="sng" algn="ctr">
-                      <a:solidFill>
-                        <a:srgbClr val="E9E9E7"/>
-                      </a:solidFill>
-                      <a:prstDash val="solid"/>
-                      <a:round/>
-                      <a:headEnd type="none" w="med" len="med"/>
-                      <a:tailEnd type="none" w="med" len="med"/>
-                    </a:lnT>
-                    <a:lnB w="12700" cap="flat" cmpd="sng" algn="ctr">
-                      <a:solidFill>
-                        <a:srgbClr val="E9E9E7"/>
-                      </a:solidFill>
-                      <a:prstDash val="solid"/>
-                      <a:round/>
-                      <a:headEnd type="none" w="med" len="med"/>
-                      <a:tailEnd type="none" w="med" len="med"/>
-                    </a:lnB>
-                    <a:solidFill>
-                      <a:srgbClr val="F7F6F3"/>
-                    </a:solidFill>
-                  </a:tcPr>
-                </a:tc>
-                <a:tc>
-                  <a:txBody>
-                    <a:bodyPr/>
-                    <a:lstStyle/>
-                    <a:p>
-                      <a:pPr indent="0" marL="0">
-                        <a:buNone/>
-                      </a:pPr>
-                      <a:r>
-                        <a:rPr lang="en-US" sz="950" b="1" dirty="0">
-                          <a:solidFill>
-                            <a:srgbClr val="5C5B57"/>
-                          </a:solidFill>
-                          <a:latin typeface="맑은 고딕" pitchFamily="34" charset="0"/>
-                          <a:ea typeface="맑은 고딕" pitchFamily="34" charset="-122"/>
-                          <a:cs typeface="맑은 고딕" pitchFamily="34" charset="-120"/>
-                        </a:rPr>
-                        <a:t>내용</a:t>
-                      </a:r>
-                      <a:endParaRPr lang="en-US" sz="950" dirty="0">
-                        <a:latin typeface="맑은 고딕" charset="0"/>
-                        <a:ea typeface="맑은 고딕" charset="0"/>
-                        <a:cs typeface="맑은 고딕" charset="0"/>
-                      </a:endParaRPr>
-                    </a:p>
-                  </a:txBody>
-                  <a:tcPr marL="76200" marR="76200" marT="25400" marB="25400" anchor="ctr">
-                    <a:lnL w="12700" cap="flat" cmpd="sng" algn="ctr">
-                      <a:solidFill>
-                        <a:srgbClr val="E9E9E7"/>
-                      </a:solidFill>
-                      <a:prstDash val="solid"/>
-                      <a:round/>
-                      <a:headEnd type="none" w="med" len="med"/>
-                      <a:tailEnd type="none" w="med" len="med"/>
-                    </a:lnL>
-                    <a:lnR w="12700" cap="flat" cmpd="sng" algn="ctr">
-                      <a:solidFill>
-                        <a:srgbClr val="E9E9E7"/>
-                      </a:solidFill>
-                      <a:prstDash val="solid"/>
-                      <a:round/>
-                      <a:headEnd type="none" w="med" len="med"/>
-                      <a:tailEnd type="none" w="med" len="med"/>
-                    </a:lnR>
-                    <a:lnT w="12700" cap="flat" cmpd="sng" algn="ctr">
-                      <a:solidFill>
-                        <a:srgbClr val="E9E9E7"/>
-                      </a:solidFill>
-                      <a:prstDash val="solid"/>
-                      <a:round/>
-                      <a:headEnd type="none" w="med" len="med"/>
-                      <a:tailEnd type="none" w="med" len="med"/>
-                    </a:lnT>
-                    <a:lnB w="12700" cap="flat" cmpd="sng" algn="ctr">
-                      <a:solidFill>
-                        <a:srgbClr val="E9E9E7"/>
-                      </a:solidFill>
-                      <a:prstDash val="solid"/>
-                      <a:round/>
-                      <a:headEnd type="none" w="med" len="med"/>
-                      <a:tailEnd type="none" w="med" len="med"/>
-                    </a:lnB>
-                    <a:solidFill>
-                      <a:srgbClr val="F7F6F3"/>
-                    </a:solidFill>
-                  </a:tcPr>
-                </a:tc>
-                <a:tc>
-                  <a:txBody>
-                    <a:bodyPr/>
-                    <a:lstStyle/>
-                    <a:p>
-                      <a:pPr indent="0" marL="0">
-                        <a:buNone/>
-                      </a:pPr>
-                      <a:r>
-                        <a:rPr lang="en-US" sz="950" b="1" dirty="0">
-                          <a:solidFill>
-                            <a:srgbClr val="5C5B57"/>
-                          </a:solidFill>
-                          <a:latin typeface="맑은 고딕" pitchFamily="34" charset="0"/>
-                          <a:ea typeface="맑은 고딕" pitchFamily="34" charset="-122"/>
-                          <a:cs typeface="맑은 고딕" pitchFamily="34" charset="-120"/>
-                        </a:rPr>
-                        <a:t>배점 항목</a:t>
-                      </a:r>
-                      <a:endParaRPr lang="en-US" sz="950" dirty="0">
-                        <a:latin typeface="맑은 고딕" charset="0"/>
-                        <a:ea typeface="맑은 고딕" charset="0"/>
-                        <a:cs typeface="맑은 고딕" charset="0"/>
-                      </a:endParaRPr>
-                    </a:p>
-                  </a:txBody>
-                  <a:tcPr marL="76200" marR="76200" marT="25400" marB="25400" anchor="ctr">
-                    <a:lnL w="12700" cap="flat" cmpd="sng" algn="ctr">
-                      <a:solidFill>
-                        <a:srgbClr val="E9E9E7"/>
-                      </a:solidFill>
-                      <a:prstDash val="solid"/>
-                      <a:round/>
-                      <a:headEnd type="none" w="med" len="med"/>
-                      <a:tailEnd type="none" w="med" len="med"/>
-                    </a:lnL>
-                    <a:lnR w="12700" cap="flat" cmpd="sng" algn="ctr">
-                      <a:solidFill>
-                        <a:srgbClr val="E9E9E7"/>
-                      </a:solidFill>
-                      <a:prstDash val="solid"/>
-                      <a:round/>
-                      <a:headEnd type="none" w="med" len="med"/>
-                      <a:tailEnd type="none" w="med" len="med"/>
-                    </a:lnR>
-                    <a:lnT w="12700" cap="flat" cmpd="sng" algn="ctr">
-                      <a:solidFill>
-                        <a:srgbClr val="E9E9E7"/>
-                      </a:solidFill>
-                      <a:prstDash val="solid"/>
-                      <a:round/>
-                      <a:headEnd type="none" w="med" len="med"/>
-                      <a:tailEnd type="none" w="med" len="med"/>
-                    </a:lnT>
-                    <a:lnB w="12700" cap="flat" cmpd="sng" algn="ctr">
-                      <a:solidFill>
-                        <a:srgbClr val="E9E9E7"/>
-                      </a:solidFill>
-                      <a:prstDash val="solid"/>
-                      <a:round/>
-                      <a:headEnd type="none" w="med" len="med"/>
-                      <a:tailEnd type="none" w="med" len="med"/>
-                    </a:lnB>
-                    <a:solidFill>
-                      <a:srgbClr val="F7F6F3"/>
-                    </a:solidFill>
-                  </a:tcPr>
-                </a:tc>
-                <a:tc>
-                  <a:txBody>
-                    <a:bodyPr/>
-                    <a:lstStyle/>
-                    <a:p>
-                      <a:pPr indent="0" marL="0">
-                        <a:buNone/>
-                      </a:pPr>
-                      <a:r>
-                        <a:rPr lang="en-US" sz="950" b="1" dirty="0">
-                          <a:solidFill>
-                            <a:srgbClr val="5C5B57"/>
-                          </a:solidFill>
-                          <a:latin typeface="맑은 고딕" pitchFamily="34" charset="0"/>
-                          <a:ea typeface="맑은 고딕" pitchFamily="34" charset="-122"/>
-                          <a:cs typeface="맑은 고딕" pitchFamily="34" charset="-120"/>
-                        </a:rPr>
-                        <a:t>배점</a:t>
-                      </a:r>
-                      <a:endParaRPr lang="en-US" sz="950" dirty="0">
-                        <a:latin typeface="맑은 고딕" charset="0"/>
-                        <a:ea typeface="맑은 고딕" charset="0"/>
-                        <a:cs typeface="맑은 고딕" charset="0"/>
-                      </a:endParaRPr>
-                    </a:p>
-                  </a:txBody>
-                  <a:tcPr marL="76200" marR="76200" marT="25400" marB="25400" anchor="ctr">
-                    <a:lnL w="12700" cap="flat" cmpd="sng" algn="ctr">
-                      <a:solidFill>
-                        <a:srgbClr val="E9E9E7"/>
-                      </a:solidFill>
-                      <a:prstDash val="solid"/>
-                      <a:round/>
-                      <a:headEnd type="none" w="med" len="med"/>
-                      <a:tailEnd type="none" w="med" len="med"/>
-                    </a:lnL>
-                    <a:lnR w="12700" cap="flat" cmpd="sng" algn="ctr">
-                      <a:solidFill>
-                        <a:srgbClr val="E9E9E7"/>
-                      </a:solidFill>
-                      <a:prstDash val="solid"/>
-                      <a:round/>
-                      <a:headEnd type="none" w="med" len="med"/>
-                      <a:tailEnd type="none" w="med" len="med"/>
-                    </a:lnR>
-                    <a:lnT w="12700" cap="flat" cmpd="sng" algn="ctr">
-                      <a:solidFill>
-                        <a:srgbClr val="E9E9E7"/>
-                      </a:solidFill>
-                      <a:prstDash val="solid"/>
-                      <a:round/>
-                      <a:headEnd type="none" w="med" len="med"/>
-                      <a:tailEnd type="none" w="med" len="med"/>
-                    </a:lnT>
-                    <a:lnB w="12700" cap="flat" cmpd="sng" algn="ctr">
-                      <a:solidFill>
-                        <a:srgbClr val="E9E9E7"/>
-                      </a:solidFill>
-                      <a:prstDash val="solid"/>
-                      <a:round/>
-                      <a:headEnd type="none" w="med" len="med"/>
-                      <a:tailEnd type="none" w="med" len="med"/>
-                    </a:lnB>
-                    <a:solidFill>
-                      <a:srgbClr val="F7F6F3"/>
-                    </a:solidFill>
-                  </a:tcPr>
-                </a:tc>
-              </a:tr>
-              <a:tr h="246888">
-                <a:tc>
-                  <a:txBody>
-                    <a:bodyPr/>
-                    <a:lstStyle/>
-                    <a:p>
-                      <a:pPr indent="0" marL="0">
-                        <a:buNone/>
-                      </a:pPr>
-                      <a:r>
-                        <a:rPr lang="en-US" sz="950" dirty="0">
-                          <a:solidFill>
-                            <a:srgbClr val="37352F"/>
-                          </a:solidFill>
-                          <a:latin typeface="맑은 고딕" pitchFamily="34" charset="0"/>
-                          <a:ea typeface="맑은 고딕" pitchFamily="34" charset="-122"/>
-                          <a:cs typeface="맑은 고딕" pitchFamily="34" charset="-120"/>
-                        </a:rPr>
-                        <a:t>2</a:t>
-                      </a:r>
-                      <a:endParaRPr lang="en-US" sz="950" dirty="0">
-                        <a:latin typeface="맑은 고딕" charset="0"/>
-                        <a:ea typeface="맑은 고딕" charset="0"/>
-                        <a:cs typeface="맑은 고딕" charset="0"/>
-                      </a:endParaRPr>
-                    </a:p>
-                  </a:txBody>
-                  <a:tcPr marL="76200" marR="76200" marT="25400" marB="25400" anchor="ctr">
-                    <a:lnL w="12700" cap="flat" cmpd="sng" algn="ctr">
-                      <a:solidFill>
-                        <a:srgbClr val="E9E9E7"/>
-                      </a:solidFill>
-                      <a:prstDash val="solid"/>
-                      <a:round/>
-                      <a:headEnd type="none" w="med" len="med"/>
-                      <a:tailEnd type="none" w="med" len="med"/>
-                    </a:lnL>
-                    <a:lnR w="12700" cap="flat" cmpd="sng" algn="ctr">
-                      <a:solidFill>
-                        <a:srgbClr val="E9E9E7"/>
-                      </a:solidFill>
-                      <a:prstDash val="solid"/>
-                      <a:round/>
-                      <a:headEnd type="none" w="med" len="med"/>
-                      <a:tailEnd type="none" w="med" len="med"/>
-                    </a:lnR>
-                    <a:lnT w="12700" cap="flat" cmpd="sng" algn="ctr">
-                      <a:solidFill>
-                        <a:srgbClr val="E9E9E7"/>
-                      </a:solidFill>
-                      <a:prstDash val="solid"/>
-                      <a:round/>
-                      <a:headEnd type="none" w="med" len="med"/>
-                      <a:tailEnd type="none" w="med" len="med"/>
-                    </a:lnT>
-                    <a:lnB w="12700" cap="flat" cmpd="sng" algn="ctr">
-                      <a:solidFill>
-                        <a:srgbClr val="E9E9E7"/>
-                      </a:solidFill>
-                      <a:prstDash val="solid"/>
-                      <a:round/>
-                      <a:headEnd type="none" w="med" len="med"/>
-                      <a:tailEnd type="none" w="med" len="med"/>
-                    </a:lnB>
-                    <a:solidFill>
-                      <a:srgbClr val="FFFFFF"/>
-                    </a:solidFill>
-                  </a:tcPr>
-                </a:tc>
-                <a:tc>
-                  <a:txBody>
-                    <a:bodyPr/>
-                    <a:lstStyle/>
-                    <a:p>
-                      <a:pPr indent="0" marL="0">
-                        <a:buNone/>
-                      </a:pPr>
-                      <a:r>
-                        <a:rPr lang="en-US" sz="950" dirty="0">
-                          <a:solidFill>
-                            <a:srgbClr val="37352F"/>
-                          </a:solidFill>
-                          <a:latin typeface="맑은 고딕" pitchFamily="34" charset="0"/>
-                          <a:ea typeface="맑은 고딕" pitchFamily="34" charset="-122"/>
-                          <a:cs typeface="맑은 고딕" pitchFamily="34" charset="-120"/>
-                        </a:rPr>
-                        <a:t>문제 정의 — BEC 무역송금 사기</a:t>
-                      </a:r>
-                      <a:endParaRPr lang="en-US" sz="950" dirty="0">
-                        <a:latin typeface="맑은 고딕" charset="0"/>
-                        <a:ea typeface="맑은 고딕" charset="0"/>
-                        <a:cs typeface="맑은 고딕" charset="0"/>
-                      </a:endParaRPr>
-                    </a:p>
-                  </a:txBody>
-                  <a:tcPr marL="76200" marR="76200" marT="25400" marB="25400" anchor="ctr">
-                    <a:lnL w="12700" cap="flat" cmpd="sng" algn="ctr">
-                      <a:solidFill>
-                        <a:srgbClr val="E9E9E7"/>
-                      </a:solidFill>
-                      <a:prstDash val="solid"/>
-                      <a:round/>
-                      <a:headEnd type="none" w="med" len="med"/>
-                      <a:tailEnd type="none" w="med" len="med"/>
-                    </a:lnL>
-                    <a:lnR w="12700" cap="flat" cmpd="sng" algn="ctr">
-                      <a:solidFill>
-                        <a:srgbClr val="E9E9E7"/>
-                      </a:solidFill>
-                      <a:prstDash val="solid"/>
-                      <a:round/>
-                      <a:headEnd type="none" w="med" len="med"/>
-                      <a:tailEnd type="none" w="med" len="med"/>
-                    </a:lnR>
-                    <a:lnT w="12700" cap="flat" cmpd="sng" algn="ctr">
-                      <a:solidFill>
-                        <a:srgbClr val="E9E9E7"/>
-                      </a:solidFill>
-                      <a:prstDash val="solid"/>
-                      <a:round/>
-                      <a:headEnd type="none" w="med" len="med"/>
-                      <a:tailEnd type="none" w="med" len="med"/>
-                    </a:lnT>
-                    <a:lnB w="12700" cap="flat" cmpd="sng" algn="ctr">
-                      <a:solidFill>
-                        <a:srgbClr val="E9E9E7"/>
-                      </a:solidFill>
-                      <a:prstDash val="solid"/>
-                      <a:round/>
-                      <a:headEnd type="none" w="med" len="med"/>
-                      <a:tailEnd type="none" w="med" len="med"/>
-                    </a:lnB>
-                    <a:solidFill>
-                      <a:srgbClr val="FFFFFF"/>
-                    </a:solidFill>
-                  </a:tcPr>
-                </a:tc>
-                <a:tc>
-                  <a:txBody>
-                    <a:bodyPr/>
-                    <a:lstStyle/>
-                    <a:p>
-                      <a:pPr indent="0" marL="0">
-                        <a:buNone/>
-                      </a:pPr>
-                      <a:r>
-                        <a:rPr lang="en-US" sz="950" dirty="0">
-                          <a:solidFill>
-                            <a:srgbClr val="37352F"/>
-                          </a:solidFill>
-                          <a:latin typeface="맑은 고딕" pitchFamily="34" charset="0"/>
-                          <a:ea typeface="맑은 고딕" pitchFamily="34" charset="-122"/>
-                          <a:cs typeface="맑은 고딕" pitchFamily="34" charset="-120"/>
-                        </a:rPr>
-                        <a:t>문제 정의 · 필요성</a:t>
-                      </a:r>
-                      <a:endParaRPr lang="en-US" sz="950" dirty="0">
-                        <a:latin typeface="맑은 고딕" charset="0"/>
-                        <a:ea typeface="맑은 고딕" charset="0"/>
-                        <a:cs typeface="맑은 고딕" charset="0"/>
-                      </a:endParaRPr>
-                    </a:p>
-                  </a:txBody>
-                  <a:tcPr marL="76200" marR="76200" marT="25400" marB="25400" anchor="ctr">
-                    <a:lnL w="12700" cap="flat" cmpd="sng" algn="ctr">
-                      <a:solidFill>
-                        <a:srgbClr val="E9E9E7"/>
-                      </a:solidFill>
-                      <a:prstDash val="solid"/>
-                      <a:round/>
-                      <a:headEnd type="none" w="med" len="med"/>
-                      <a:tailEnd type="none" w="med" len="med"/>
-                    </a:lnL>
-                    <a:lnR w="12700" cap="flat" cmpd="sng" algn="ctr">
-                      <a:solidFill>
-                        <a:srgbClr val="E9E9E7"/>
-                      </a:solidFill>
-                      <a:prstDash val="solid"/>
-                      <a:round/>
-                      <a:headEnd type="none" w="med" len="med"/>
-                      <a:tailEnd type="none" w="med" len="med"/>
-                    </a:lnR>
-                    <a:lnT w="12700" cap="flat" cmpd="sng" algn="ctr">
-                      <a:solidFill>
-                        <a:srgbClr val="E9E9E7"/>
-                      </a:solidFill>
-                      <a:prstDash val="solid"/>
-                      <a:round/>
-                      <a:headEnd type="none" w="med" len="med"/>
-                      <a:tailEnd type="none" w="med" len="med"/>
-                    </a:lnT>
-                    <a:lnB w="12700" cap="flat" cmpd="sng" algn="ctr">
-                      <a:solidFill>
-                        <a:srgbClr val="E9E9E7"/>
-                      </a:solidFill>
-                      <a:prstDash val="solid"/>
-                      <a:round/>
-                      <a:headEnd type="none" w="med" len="med"/>
-                      <a:tailEnd type="none" w="med" len="med"/>
-                    </a:lnB>
-                    <a:solidFill>
-                      <a:srgbClr val="FFFFFF"/>
-                    </a:solidFill>
-                  </a:tcPr>
-                </a:tc>
-                <a:tc>
-                  <a:txBody>
-                    <a:bodyPr/>
-                    <a:lstStyle/>
-                    <a:p>
-                      <a:pPr indent="0" marL="0">
-                        <a:buNone/>
-                      </a:pPr>
-                      <a:r>
-                        <a:rPr lang="en-US" sz="950" dirty="0">
-                          <a:solidFill>
-                            <a:srgbClr val="37352F"/>
-                          </a:solidFill>
-                          <a:latin typeface="맑은 고딕" pitchFamily="34" charset="0"/>
-                          <a:ea typeface="맑은 고딕" pitchFamily="34" charset="-122"/>
-                          <a:cs typeface="맑은 고딕" pitchFamily="34" charset="-120"/>
-                        </a:rPr>
-                        <a:t>15</a:t>
-                      </a:r>
-                      <a:endParaRPr lang="en-US" sz="950" dirty="0">
-                        <a:latin typeface="맑은 고딕" charset="0"/>
-                        <a:ea typeface="맑은 고딕" charset="0"/>
-                        <a:cs typeface="맑은 고딕" charset="0"/>
-                      </a:endParaRPr>
-                    </a:p>
-                  </a:txBody>
-                  <a:tcPr marL="76200" marR="76200" marT="25400" marB="25400" anchor="ctr">
-                    <a:lnL w="12700" cap="flat" cmpd="sng" algn="ctr">
-                      <a:solidFill>
-                        <a:srgbClr val="E9E9E7"/>
-                      </a:solidFill>
-                      <a:prstDash val="solid"/>
-                      <a:round/>
-                      <a:headEnd type="none" w="med" len="med"/>
-                      <a:tailEnd type="none" w="med" len="med"/>
-                    </a:lnL>
-                    <a:lnR w="12700" cap="flat" cmpd="sng" algn="ctr">
-                      <a:solidFill>
-                        <a:srgbClr val="E9E9E7"/>
-                      </a:solidFill>
-                      <a:prstDash val="solid"/>
-                      <a:round/>
-                      <a:headEnd type="none" w="med" len="med"/>
-                      <a:tailEnd type="none" w="med" len="med"/>
-                    </a:lnR>
-                    <a:lnT w="12700" cap="flat" cmpd="sng" algn="ctr">
-                      <a:solidFill>
-                        <a:srgbClr val="E9E9E7"/>
-                      </a:solidFill>
-                      <a:prstDash val="solid"/>
-                      <a:round/>
-                      <a:headEnd type="none" w="med" len="med"/>
-                      <a:tailEnd type="none" w="med" len="med"/>
-                    </a:lnT>
-                    <a:lnB w="12700" cap="flat" cmpd="sng" algn="ctr">
-                      <a:solidFill>
-                        <a:srgbClr val="E9E9E7"/>
-                      </a:solidFill>
-                      <a:prstDash val="solid"/>
-                      <a:round/>
-                      <a:headEnd type="none" w="med" len="med"/>
-                      <a:tailEnd type="none" w="med" len="med"/>
-                    </a:lnB>
-                    <a:solidFill>
-                      <a:srgbClr val="FFFFFF"/>
-                    </a:solidFill>
-                  </a:tcPr>
-                </a:tc>
-              </a:tr>
-              <a:tr h="246888">
-                <a:tc>
-                  <a:txBody>
-                    <a:bodyPr/>
-                    <a:lstStyle/>
-                    <a:p>
-                      <a:pPr indent="0" marL="0">
-                        <a:buNone/>
-                      </a:pPr>
-                      <a:r>
-                        <a:rPr lang="en-US" sz="950" dirty="0">
-                          <a:solidFill>
-                            <a:srgbClr val="37352F"/>
-                          </a:solidFill>
-                          <a:latin typeface="맑은 고딕" pitchFamily="34" charset="0"/>
-                          <a:ea typeface="맑은 고딕" pitchFamily="34" charset="-122"/>
-                          <a:cs typeface="맑은 고딕" pitchFamily="34" charset="-120"/>
-                        </a:rPr>
-                        <a:t>3</a:t>
-                      </a:r>
-                      <a:endParaRPr lang="en-US" sz="950" dirty="0">
-                        <a:latin typeface="맑은 고딕" charset="0"/>
-                        <a:ea typeface="맑은 고딕" charset="0"/>
-                        <a:cs typeface="맑은 고딕" charset="0"/>
-                      </a:endParaRPr>
-                    </a:p>
-                  </a:txBody>
-                  <a:tcPr marL="76200" marR="76200" marT="25400" marB="25400" anchor="ctr">
-                    <a:lnL w="12700" cap="flat" cmpd="sng" algn="ctr">
-                      <a:solidFill>
-                        <a:srgbClr val="E9E9E7"/>
-                      </a:solidFill>
-                      <a:prstDash val="solid"/>
-                      <a:round/>
-                      <a:headEnd type="none" w="med" len="med"/>
-                      <a:tailEnd type="none" w="med" len="med"/>
-                    </a:lnL>
-                    <a:lnR w="12700" cap="flat" cmpd="sng" algn="ctr">
-                      <a:solidFill>
-                        <a:srgbClr val="E9E9E7"/>
-                      </a:solidFill>
-                      <a:prstDash val="solid"/>
-                      <a:round/>
-                      <a:headEnd type="none" w="med" len="med"/>
-                      <a:tailEnd type="none" w="med" len="med"/>
-                    </a:lnR>
-                    <a:lnT w="12700" cap="flat" cmpd="sng" algn="ctr">
-                      <a:solidFill>
-                        <a:srgbClr val="E9E9E7"/>
-                      </a:solidFill>
-                      <a:prstDash val="solid"/>
-                      <a:round/>
-                      <a:headEnd type="none" w="med" len="med"/>
-                      <a:tailEnd type="none" w="med" len="med"/>
-                    </a:lnT>
-                    <a:lnB w="12700" cap="flat" cmpd="sng" algn="ctr">
-                      <a:solidFill>
-                        <a:srgbClr val="E9E9E7"/>
-                      </a:solidFill>
-                      <a:prstDash val="solid"/>
-                      <a:round/>
-                      <a:headEnd type="none" w="med" len="med"/>
-                      <a:tailEnd type="none" w="med" len="med"/>
-                    </a:lnB>
-                    <a:solidFill>
-                      <a:srgbClr val="FFFFFF"/>
-                    </a:solidFill>
-                  </a:tcPr>
-                </a:tc>
-                <a:tc>
-                  <a:txBody>
-                    <a:bodyPr/>
-                    <a:lstStyle/>
-                    <a:p>
-                      <a:pPr indent="0" marL="0">
-                        <a:buNone/>
-                      </a:pPr>
-                      <a:r>
-                        <a:rPr lang="en-US" sz="950" dirty="0">
-                          <a:solidFill>
-                            <a:srgbClr val="37352F"/>
-                          </a:solidFill>
-                          <a:latin typeface="맑은 고딕" pitchFamily="34" charset="0"/>
-                          <a:ea typeface="맑은 고딕" pitchFamily="34" charset="-122"/>
-                          <a:cs typeface="맑은 고딕" pitchFamily="34" charset="-120"/>
-                        </a:rPr>
-                        <a:t>경쟁 지형 — 기존 방어선이 비껴가는 지점</a:t>
-                      </a:r>
-                      <a:endParaRPr lang="en-US" sz="950" dirty="0">
-                        <a:latin typeface="맑은 고딕" charset="0"/>
-                        <a:ea typeface="맑은 고딕" charset="0"/>
-                        <a:cs typeface="맑은 고딕" charset="0"/>
-                      </a:endParaRPr>
-                    </a:p>
-                  </a:txBody>
-                  <a:tcPr marL="76200" marR="76200" marT="25400" marB="25400" anchor="ctr">
-                    <a:lnL w="12700" cap="flat" cmpd="sng" algn="ctr">
-                      <a:solidFill>
-                        <a:srgbClr val="E9E9E7"/>
-                      </a:solidFill>
-                      <a:prstDash val="solid"/>
-                      <a:round/>
-                      <a:headEnd type="none" w="med" len="med"/>
-                      <a:tailEnd type="none" w="med" len="med"/>
-                    </a:lnL>
-                    <a:lnR w="12700" cap="flat" cmpd="sng" algn="ctr">
-                      <a:solidFill>
-                        <a:srgbClr val="E9E9E7"/>
-                      </a:solidFill>
-                      <a:prstDash val="solid"/>
-                      <a:round/>
-                      <a:headEnd type="none" w="med" len="med"/>
-                      <a:tailEnd type="none" w="med" len="med"/>
-                    </a:lnR>
-                    <a:lnT w="12700" cap="flat" cmpd="sng" algn="ctr">
-                      <a:solidFill>
-                        <a:srgbClr val="E9E9E7"/>
-                      </a:solidFill>
-                      <a:prstDash val="solid"/>
-                      <a:round/>
-                      <a:headEnd type="none" w="med" len="med"/>
-                      <a:tailEnd type="none" w="med" len="med"/>
-                    </a:lnT>
-                    <a:lnB w="12700" cap="flat" cmpd="sng" algn="ctr">
-                      <a:solidFill>
-                        <a:srgbClr val="E9E9E7"/>
-                      </a:solidFill>
-                      <a:prstDash val="solid"/>
-                      <a:round/>
-                      <a:headEnd type="none" w="med" len="med"/>
-                      <a:tailEnd type="none" w="med" len="med"/>
-                    </a:lnB>
-                    <a:solidFill>
-                      <a:srgbClr val="FFFFFF"/>
-                    </a:solidFill>
-                  </a:tcPr>
-                </a:tc>
-                <a:tc>
-                  <a:txBody>
-                    <a:bodyPr/>
-                    <a:lstStyle/>
-                    <a:p>
-                      <a:pPr indent="0" marL="0">
-                        <a:buNone/>
-                      </a:pPr>
-                      <a:r>
-                        <a:rPr lang="en-US" sz="950" dirty="0">
-                          <a:solidFill>
-                            <a:srgbClr val="37352F"/>
-                          </a:solidFill>
-                          <a:latin typeface="맑은 고딕" pitchFamily="34" charset="0"/>
-                          <a:ea typeface="맑은 고딕" pitchFamily="34" charset="-122"/>
-                          <a:cs typeface="맑은 고딕" pitchFamily="34" charset="-120"/>
-                        </a:rPr>
-                        <a:t>문제 정의 · 필요성</a:t>
-                      </a:r>
-                      <a:endParaRPr lang="en-US" sz="950" dirty="0">
-                        <a:latin typeface="맑은 고딕" charset="0"/>
-                        <a:ea typeface="맑은 고딕" charset="0"/>
-                        <a:cs typeface="맑은 고딕" charset="0"/>
-                      </a:endParaRPr>
-                    </a:p>
-                  </a:txBody>
-                  <a:tcPr marL="76200" marR="76200" marT="25400" marB="25400" anchor="ctr">
-                    <a:lnL w="12700" cap="flat" cmpd="sng" algn="ctr">
-                      <a:solidFill>
-                        <a:srgbClr val="E9E9E7"/>
-                      </a:solidFill>
-                      <a:prstDash val="solid"/>
-                      <a:round/>
-                      <a:headEnd type="none" w="med" len="med"/>
-                      <a:tailEnd type="none" w="med" len="med"/>
-                    </a:lnL>
-                    <a:lnR w="12700" cap="flat" cmpd="sng" algn="ctr">
-                      <a:solidFill>
-                        <a:srgbClr val="E9E9E7"/>
-                      </a:solidFill>
-                      <a:prstDash val="solid"/>
-                      <a:round/>
-                      <a:headEnd type="none" w="med" len="med"/>
-                      <a:tailEnd type="none" w="med" len="med"/>
-                    </a:lnR>
-                    <a:lnT w="12700" cap="flat" cmpd="sng" algn="ctr">
-                      <a:solidFill>
-                        <a:srgbClr val="E9E9E7"/>
-                      </a:solidFill>
-                      <a:prstDash val="solid"/>
-                      <a:round/>
-                      <a:headEnd type="none" w="med" len="med"/>
-                      <a:tailEnd type="none" w="med" len="med"/>
-                    </a:lnT>
-                    <a:lnB w="12700" cap="flat" cmpd="sng" algn="ctr">
-                      <a:solidFill>
-                        <a:srgbClr val="E9E9E7"/>
-                      </a:solidFill>
-                      <a:prstDash val="solid"/>
-                      <a:round/>
-                      <a:headEnd type="none" w="med" len="med"/>
-                      <a:tailEnd type="none" w="med" len="med"/>
-                    </a:lnB>
-                    <a:solidFill>
-                      <a:srgbClr val="FFFFFF"/>
-                    </a:solidFill>
-                  </a:tcPr>
-                </a:tc>
-                <a:tc>
-                  <a:txBody>
-                    <a:bodyPr/>
-                    <a:lstStyle/>
-                    <a:p>
-                      <a:pPr indent="0" marL="0">
-                        <a:buNone/>
-                      </a:pPr>
-                      <a:r>
-                        <a:rPr lang="en-US" sz="950" dirty="0">
-                          <a:solidFill>
-                            <a:srgbClr val="37352F"/>
-                          </a:solidFill>
-                          <a:latin typeface="맑은 고딕" pitchFamily="34" charset="0"/>
-                          <a:ea typeface="맑은 고딕" pitchFamily="34" charset="-122"/>
-                          <a:cs typeface="맑은 고딕" pitchFamily="34" charset="-120"/>
-                        </a:rPr>
-                        <a:t>15</a:t>
-                      </a:r>
-                      <a:endParaRPr lang="en-US" sz="950" dirty="0">
-                        <a:latin typeface="맑은 고딕" charset="0"/>
-                        <a:ea typeface="맑은 고딕" charset="0"/>
-                        <a:cs typeface="맑은 고딕" charset="0"/>
-                      </a:endParaRPr>
-                    </a:p>
-                  </a:txBody>
-                  <a:tcPr marL="76200" marR="76200" marT="25400" marB="25400" anchor="ctr">
-                    <a:lnL w="12700" cap="flat" cmpd="sng" algn="ctr">
-                      <a:solidFill>
-                        <a:srgbClr val="E9E9E7"/>
-                      </a:solidFill>
-                      <a:prstDash val="solid"/>
-                      <a:round/>
-                      <a:headEnd type="none" w="med" len="med"/>
-                      <a:tailEnd type="none" w="med" len="med"/>
-                    </a:lnL>
-                    <a:lnR w="12700" cap="flat" cmpd="sng" algn="ctr">
-                      <a:solidFill>
-                        <a:srgbClr val="E9E9E7"/>
-                      </a:solidFill>
-                      <a:prstDash val="solid"/>
-                      <a:round/>
-                      <a:headEnd type="none" w="med" len="med"/>
-                      <a:tailEnd type="none" w="med" len="med"/>
-                    </a:lnR>
-                    <a:lnT w="12700" cap="flat" cmpd="sng" algn="ctr">
-                      <a:solidFill>
-                        <a:srgbClr val="E9E9E7"/>
-                      </a:solidFill>
-                      <a:prstDash val="solid"/>
-                      <a:round/>
-                      <a:headEnd type="none" w="med" len="med"/>
-                      <a:tailEnd type="none" w="med" len="med"/>
-                    </a:lnT>
-                    <a:lnB w="12700" cap="flat" cmpd="sng" algn="ctr">
-                      <a:solidFill>
-                        <a:srgbClr val="E9E9E7"/>
-                      </a:solidFill>
-                      <a:prstDash val="solid"/>
-                      <a:round/>
-                      <a:headEnd type="none" w="med" len="med"/>
-                      <a:tailEnd type="none" w="med" len="med"/>
-                    </a:lnB>
-                    <a:solidFill>
-                      <a:srgbClr val="FFFFFF"/>
-                    </a:solidFill>
-                  </a:tcPr>
-                </a:tc>
-              </a:tr>
-              <a:tr h="246888">
-                <a:tc>
-                  <a:txBody>
-                    <a:bodyPr/>
-                    <a:lstStyle/>
-                    <a:p>
-                      <a:pPr indent="0" marL="0">
-                        <a:buNone/>
-                      </a:pPr>
-                      <a:r>
-                        <a:rPr lang="en-US" sz="950" dirty="0">
-                          <a:solidFill>
-                            <a:srgbClr val="37352F"/>
-                          </a:solidFill>
-                          <a:latin typeface="맑은 고딕" pitchFamily="34" charset="0"/>
-                          <a:ea typeface="맑은 고딕" pitchFamily="34" charset="-122"/>
-                          <a:cs typeface="맑은 고딕" pitchFamily="34" charset="-120"/>
-                        </a:rPr>
-                        <a:t>4</a:t>
-                      </a:r>
-                      <a:endParaRPr lang="en-US" sz="950" dirty="0">
-                        <a:latin typeface="맑은 고딕" charset="0"/>
-                        <a:ea typeface="맑은 고딕" charset="0"/>
-                        <a:cs typeface="맑은 고딕" charset="0"/>
-                      </a:endParaRPr>
-                    </a:p>
-                  </a:txBody>
-                  <a:tcPr marL="76200" marR="76200" marT="25400" marB="25400" anchor="ctr">
-                    <a:lnL w="12700" cap="flat" cmpd="sng" algn="ctr">
-                      <a:solidFill>
-                        <a:srgbClr val="E9E9E7"/>
-                      </a:solidFill>
-                      <a:prstDash val="solid"/>
-                      <a:round/>
-                      <a:headEnd type="none" w="med" len="med"/>
-                      <a:tailEnd type="none" w="med" len="med"/>
-                    </a:lnL>
-                    <a:lnR w="12700" cap="flat" cmpd="sng" algn="ctr">
-                      <a:solidFill>
-                        <a:srgbClr val="E9E9E7"/>
-                      </a:solidFill>
-                      <a:prstDash val="solid"/>
-                      <a:round/>
-                      <a:headEnd type="none" w="med" len="med"/>
-                      <a:tailEnd type="none" w="med" len="med"/>
-                    </a:lnR>
-                    <a:lnT w="12700" cap="flat" cmpd="sng" algn="ctr">
-                      <a:solidFill>
-                        <a:srgbClr val="E9E9E7"/>
-                      </a:solidFill>
-                      <a:prstDash val="solid"/>
-                      <a:round/>
-                      <a:headEnd type="none" w="med" len="med"/>
-                      <a:tailEnd type="none" w="med" len="med"/>
-                    </a:lnT>
-                    <a:lnB w="12700" cap="flat" cmpd="sng" algn="ctr">
-                      <a:solidFill>
-                        <a:srgbClr val="E9E9E7"/>
-                      </a:solidFill>
-                      <a:prstDash val="solid"/>
-                      <a:round/>
-                      <a:headEnd type="none" w="med" len="med"/>
-                      <a:tailEnd type="none" w="med" len="med"/>
-                    </a:lnB>
-                    <a:solidFill>
-                      <a:srgbClr val="FFFFFF"/>
-                    </a:solidFill>
-                  </a:tcPr>
-                </a:tc>
-                <a:tc>
-                  <a:txBody>
-                    <a:bodyPr/>
-                    <a:lstStyle/>
-                    <a:p>
-                      <a:pPr indent="0" marL="0">
-                        <a:buNone/>
-                      </a:pPr>
-                      <a:r>
-                        <a:rPr lang="en-US" sz="950" dirty="0">
-                          <a:solidFill>
-                            <a:srgbClr val="37352F"/>
-                          </a:solidFill>
-                          <a:latin typeface="맑은 고딕" pitchFamily="34" charset="0"/>
-                          <a:ea typeface="맑은 고딕" pitchFamily="34" charset="-122"/>
-                          <a:cs typeface="맑은 고딕" pitchFamily="34" charset="-120"/>
-                        </a:rPr>
-                        <a:t>규제 빈 구간과 도입 조건</a:t>
-                      </a:r>
-                      <a:endParaRPr lang="en-US" sz="950" dirty="0">
-                        <a:latin typeface="맑은 고딕" charset="0"/>
-                        <a:ea typeface="맑은 고딕" charset="0"/>
-                        <a:cs typeface="맑은 고딕" charset="0"/>
-                      </a:endParaRPr>
-                    </a:p>
-                  </a:txBody>
-                  <a:tcPr marL="76200" marR="76200" marT="25400" marB="25400" anchor="ctr">
-                    <a:lnL w="12700" cap="flat" cmpd="sng" algn="ctr">
-                      <a:solidFill>
-                        <a:srgbClr val="E9E9E7"/>
-                      </a:solidFill>
-                      <a:prstDash val="solid"/>
-                      <a:round/>
-                      <a:headEnd type="none" w="med" len="med"/>
-                      <a:tailEnd type="none" w="med" len="med"/>
-                    </a:lnL>
-                    <a:lnR w="12700" cap="flat" cmpd="sng" algn="ctr">
-                      <a:solidFill>
-                        <a:srgbClr val="E9E9E7"/>
-                      </a:solidFill>
-                      <a:prstDash val="solid"/>
-                      <a:round/>
-                      <a:headEnd type="none" w="med" len="med"/>
-                      <a:tailEnd type="none" w="med" len="med"/>
-                    </a:lnR>
-                    <a:lnT w="12700" cap="flat" cmpd="sng" algn="ctr">
-                      <a:solidFill>
-                        <a:srgbClr val="E9E9E7"/>
-                      </a:solidFill>
-                      <a:prstDash val="solid"/>
-                      <a:round/>
-                      <a:headEnd type="none" w="med" len="med"/>
-                      <a:tailEnd type="none" w="med" len="med"/>
-                    </a:lnT>
-                    <a:lnB w="12700" cap="flat" cmpd="sng" algn="ctr">
-                      <a:solidFill>
-                        <a:srgbClr val="E9E9E7"/>
-                      </a:solidFill>
-                      <a:prstDash val="solid"/>
-                      <a:round/>
-                      <a:headEnd type="none" w="med" len="med"/>
-                      <a:tailEnd type="none" w="med" len="med"/>
-                    </a:lnB>
-                    <a:solidFill>
-                      <a:srgbClr val="FFFFFF"/>
-                    </a:solidFill>
-                  </a:tcPr>
-                </a:tc>
-                <a:tc>
-                  <a:txBody>
-                    <a:bodyPr/>
-                    <a:lstStyle/>
-                    <a:p>
-                      <a:pPr indent="0" marL="0">
-                        <a:buNone/>
-                      </a:pPr>
-                      <a:r>
-                        <a:rPr lang="en-US" sz="950" dirty="0">
-                          <a:solidFill>
-                            <a:srgbClr val="37352F"/>
-                          </a:solidFill>
-                          <a:latin typeface="맑은 고딕" pitchFamily="34" charset="0"/>
-                          <a:ea typeface="맑은 고딕" pitchFamily="34" charset="-122"/>
-                          <a:cs typeface="맑은 고딕" pitchFamily="34" charset="-120"/>
-                        </a:rPr>
-                        <a:t>활용 가능성</a:t>
-                      </a:r>
-                      <a:endParaRPr lang="en-US" sz="950" dirty="0">
-                        <a:latin typeface="맑은 고딕" charset="0"/>
-                        <a:ea typeface="맑은 고딕" charset="0"/>
-                        <a:cs typeface="맑은 고딕" charset="0"/>
-                      </a:endParaRPr>
-                    </a:p>
-                  </a:txBody>
-                  <a:tcPr marL="76200" marR="76200" marT="25400" marB="25400" anchor="ctr">
-                    <a:lnL w="12700" cap="flat" cmpd="sng" algn="ctr">
-                      <a:solidFill>
-                        <a:srgbClr val="E9E9E7"/>
-                      </a:solidFill>
-                      <a:prstDash val="solid"/>
-                      <a:round/>
-                      <a:headEnd type="none" w="med" len="med"/>
-                      <a:tailEnd type="none" w="med" len="med"/>
-                    </a:lnL>
-                    <a:lnR w="12700" cap="flat" cmpd="sng" algn="ctr">
-                      <a:solidFill>
-                        <a:srgbClr val="E9E9E7"/>
-                      </a:solidFill>
-                      <a:prstDash val="solid"/>
-                      <a:round/>
-                      <a:headEnd type="none" w="med" len="med"/>
-                      <a:tailEnd type="none" w="med" len="med"/>
-                    </a:lnR>
-                    <a:lnT w="12700" cap="flat" cmpd="sng" algn="ctr">
-                      <a:solidFill>
-                        <a:srgbClr val="E9E9E7"/>
-                      </a:solidFill>
-                      <a:prstDash val="solid"/>
-                      <a:round/>
-                      <a:headEnd type="none" w="med" len="med"/>
-                      <a:tailEnd type="none" w="med" len="med"/>
-                    </a:lnT>
-                    <a:lnB w="12700" cap="flat" cmpd="sng" algn="ctr">
-                      <a:solidFill>
-                        <a:srgbClr val="E9E9E7"/>
-                      </a:solidFill>
-                      <a:prstDash val="solid"/>
-                      <a:round/>
-                      <a:headEnd type="none" w="med" len="med"/>
-                      <a:tailEnd type="none" w="med" len="med"/>
-                    </a:lnB>
-                    <a:solidFill>
-                      <a:srgbClr val="FFFFFF"/>
-                    </a:solidFill>
-                  </a:tcPr>
-                </a:tc>
-                <a:tc>
-                  <a:txBody>
-                    <a:bodyPr/>
-                    <a:lstStyle/>
-                    <a:p>
-                      <a:pPr indent="0" marL="0">
-                        <a:buNone/>
-                      </a:pPr>
-                      <a:r>
-                        <a:rPr lang="en-US" sz="950" dirty="0">
-                          <a:solidFill>
-                            <a:srgbClr val="37352F"/>
-                          </a:solidFill>
-                          <a:latin typeface="맑은 고딕" pitchFamily="34" charset="0"/>
-                          <a:ea typeface="맑은 고딕" pitchFamily="34" charset="-122"/>
-                          <a:cs typeface="맑은 고딕" pitchFamily="34" charset="-120"/>
-                        </a:rPr>
-                        <a:t>15</a:t>
-                      </a:r>
-                      <a:endParaRPr lang="en-US" sz="950" dirty="0">
-                        <a:latin typeface="맑은 고딕" charset="0"/>
-                        <a:ea typeface="맑은 고딕" charset="0"/>
-                        <a:cs typeface="맑은 고딕" charset="0"/>
-                      </a:endParaRPr>
-                    </a:p>
-                  </a:txBody>
-                  <a:tcPr marL="76200" marR="76200" marT="25400" marB="25400" anchor="ctr">
-                    <a:lnL w="12700" cap="flat" cmpd="sng" algn="ctr">
-                      <a:solidFill>
-                        <a:srgbClr val="E9E9E7"/>
-                      </a:solidFill>
-                      <a:prstDash val="solid"/>
-                      <a:round/>
-                      <a:headEnd type="none" w="med" len="med"/>
-                      <a:tailEnd type="none" w="med" len="med"/>
-                    </a:lnL>
-                    <a:lnR w="12700" cap="flat" cmpd="sng" algn="ctr">
-                      <a:solidFill>
-                        <a:srgbClr val="E9E9E7"/>
-                      </a:solidFill>
-                      <a:prstDash val="solid"/>
-                      <a:round/>
-                      <a:headEnd type="none" w="med" len="med"/>
-                      <a:tailEnd type="none" w="med" len="med"/>
-                    </a:lnR>
-                    <a:lnT w="12700" cap="flat" cmpd="sng" algn="ctr">
-                      <a:solidFill>
-                        <a:srgbClr val="E9E9E7"/>
-                      </a:solidFill>
-                      <a:prstDash val="solid"/>
-                      <a:round/>
-                      <a:headEnd type="none" w="med" len="med"/>
-                      <a:tailEnd type="none" w="med" len="med"/>
-                    </a:lnT>
-                    <a:lnB w="12700" cap="flat" cmpd="sng" algn="ctr">
-                      <a:solidFill>
-                        <a:srgbClr val="E9E9E7"/>
-                      </a:solidFill>
-                      <a:prstDash val="solid"/>
-                      <a:round/>
-                      <a:headEnd type="none" w="med" len="med"/>
-                      <a:tailEnd type="none" w="med" len="med"/>
-                    </a:lnB>
-                    <a:solidFill>
-                      <a:srgbClr val="FFFFFF"/>
-                    </a:solidFill>
-                  </a:tcPr>
-                </a:tc>
-              </a:tr>
-              <a:tr h="246888">
-                <a:tc>
-                  <a:txBody>
-                    <a:bodyPr/>
-                    <a:lstStyle/>
-                    <a:p>
-                      <a:pPr indent="0" marL="0">
-                        <a:buNone/>
-                      </a:pPr>
-                      <a:r>
-                        <a:rPr lang="en-US" sz="950" dirty="0">
-                          <a:solidFill>
-                            <a:srgbClr val="37352F"/>
-                          </a:solidFill>
-                          <a:latin typeface="맑은 고딕" pitchFamily="34" charset="0"/>
-                          <a:ea typeface="맑은 고딕" pitchFamily="34" charset="-122"/>
-                          <a:cs typeface="맑은 고딕" pitchFamily="34" charset="-120"/>
-                        </a:rPr>
-                        <a:t>5</a:t>
-                      </a:r>
-                      <a:endParaRPr lang="en-US" sz="950" dirty="0">
-                        <a:latin typeface="맑은 고딕" charset="0"/>
-                        <a:ea typeface="맑은 고딕" charset="0"/>
-                        <a:cs typeface="맑은 고딕" charset="0"/>
-                      </a:endParaRPr>
-                    </a:p>
-                  </a:txBody>
-                  <a:tcPr marL="76200" marR="76200" marT="25400" marB="25400" anchor="ctr">
-                    <a:lnL w="12700" cap="flat" cmpd="sng" algn="ctr">
-                      <a:solidFill>
-                        <a:srgbClr val="E9E9E7"/>
-                      </a:solidFill>
-                      <a:prstDash val="solid"/>
-                      <a:round/>
-                      <a:headEnd type="none" w="med" len="med"/>
-                      <a:tailEnd type="none" w="med" len="med"/>
-                    </a:lnL>
-                    <a:lnR w="12700" cap="flat" cmpd="sng" algn="ctr">
-                      <a:solidFill>
-                        <a:srgbClr val="E9E9E7"/>
-                      </a:solidFill>
-                      <a:prstDash val="solid"/>
-                      <a:round/>
-                      <a:headEnd type="none" w="med" len="med"/>
-                      <a:tailEnd type="none" w="med" len="med"/>
-                    </a:lnR>
-                    <a:lnT w="12700" cap="flat" cmpd="sng" algn="ctr">
-                      <a:solidFill>
-                        <a:srgbClr val="E9E9E7"/>
-                      </a:solidFill>
-                      <a:prstDash val="solid"/>
-                      <a:round/>
-                      <a:headEnd type="none" w="med" len="med"/>
-                      <a:tailEnd type="none" w="med" len="med"/>
-                    </a:lnT>
-                    <a:lnB w="12700" cap="flat" cmpd="sng" algn="ctr">
-                      <a:solidFill>
-                        <a:srgbClr val="E9E9E7"/>
-                      </a:solidFill>
-                      <a:prstDash val="solid"/>
-                      <a:round/>
-                      <a:headEnd type="none" w="med" len="med"/>
-                      <a:tailEnd type="none" w="med" len="med"/>
-                    </a:lnB>
-                    <a:solidFill>
-                      <a:srgbClr val="FFFFFF"/>
-                    </a:solidFill>
-                  </a:tcPr>
-                </a:tc>
-                <a:tc>
-                  <a:txBody>
-                    <a:bodyPr/>
-                    <a:lstStyle/>
-                    <a:p>
-                      <a:pPr indent="0" marL="0">
-                        <a:buNone/>
-                      </a:pPr>
-                      <a:r>
-                        <a:rPr lang="en-US" sz="950" dirty="0">
-                          <a:solidFill>
-                            <a:srgbClr val="37352F"/>
-                          </a:solidFill>
-                          <a:latin typeface="맑은 고딕" pitchFamily="34" charset="0"/>
-                          <a:ea typeface="맑은 고딕" pitchFamily="34" charset="-122"/>
-                          <a:cs typeface="맑은 고딕" pitchFamily="34" charset="-120"/>
-                        </a:rPr>
-                        <a:t>무엇을 하는가 — 계약서 ↔ 송금 대조</a:t>
-                      </a:r>
-                      <a:endParaRPr lang="en-US" sz="950" dirty="0">
-                        <a:latin typeface="맑은 고딕" charset="0"/>
-                        <a:ea typeface="맑은 고딕" charset="0"/>
-                        <a:cs typeface="맑은 고딕" charset="0"/>
-                      </a:endParaRPr>
-                    </a:p>
-                  </a:txBody>
-                  <a:tcPr marL="76200" marR="76200" marT="25400" marB="25400" anchor="ctr">
-                    <a:lnL w="12700" cap="flat" cmpd="sng" algn="ctr">
-                      <a:solidFill>
-                        <a:srgbClr val="E9E9E7"/>
-                      </a:solidFill>
-                      <a:prstDash val="solid"/>
-                      <a:round/>
-                      <a:headEnd type="none" w="med" len="med"/>
-                      <a:tailEnd type="none" w="med" len="med"/>
-                    </a:lnL>
-                    <a:lnR w="12700" cap="flat" cmpd="sng" algn="ctr">
-                      <a:solidFill>
-                        <a:srgbClr val="E9E9E7"/>
-                      </a:solidFill>
-                      <a:prstDash val="solid"/>
-                      <a:round/>
-                      <a:headEnd type="none" w="med" len="med"/>
-                      <a:tailEnd type="none" w="med" len="med"/>
-                    </a:lnR>
-                    <a:lnT w="12700" cap="flat" cmpd="sng" algn="ctr">
-                      <a:solidFill>
-                        <a:srgbClr val="E9E9E7"/>
-                      </a:solidFill>
-                      <a:prstDash val="solid"/>
-                      <a:round/>
-                      <a:headEnd type="none" w="med" len="med"/>
-                      <a:tailEnd type="none" w="med" len="med"/>
-                    </a:lnT>
-                    <a:lnB w="12700" cap="flat" cmpd="sng" algn="ctr">
-                      <a:solidFill>
-                        <a:srgbClr val="E9E9E7"/>
-                      </a:solidFill>
-                      <a:prstDash val="solid"/>
-                      <a:round/>
-                      <a:headEnd type="none" w="med" len="med"/>
-                      <a:tailEnd type="none" w="med" len="med"/>
-                    </a:lnB>
-                    <a:solidFill>
-                      <a:srgbClr val="FFFFFF"/>
-                    </a:solidFill>
-                  </a:tcPr>
-                </a:tc>
-                <a:tc>
-                  <a:txBody>
-                    <a:bodyPr/>
-                    <a:lstStyle/>
-                    <a:p>
-                      <a:pPr indent="0" marL="0">
-                        <a:buNone/>
-                      </a:pPr>
-                      <a:r>
-                        <a:rPr lang="en-US" sz="950" dirty="0">
-                          <a:solidFill>
-                            <a:srgbClr val="37352F"/>
-                          </a:solidFill>
-                          <a:latin typeface="맑은 고딕" pitchFamily="34" charset="0"/>
-                          <a:ea typeface="맑은 고딕" pitchFamily="34" charset="-122"/>
-                          <a:cs typeface="맑은 고딕" pitchFamily="34" charset="-120"/>
-                        </a:rPr>
-                        <a:t>창의성 · 효과</a:t>
-                      </a:r>
-                      <a:endParaRPr lang="en-US" sz="950" dirty="0">
-                        <a:latin typeface="맑은 고딕" charset="0"/>
-                        <a:ea typeface="맑은 고딕" charset="0"/>
-                        <a:cs typeface="맑은 고딕" charset="0"/>
-                      </a:endParaRPr>
-                    </a:p>
-                  </a:txBody>
-                  <a:tcPr marL="76200" marR="76200" marT="25400" marB="25400" anchor="ctr">
-                    <a:lnL w="12700" cap="flat" cmpd="sng" algn="ctr">
-                      <a:solidFill>
-                        <a:srgbClr val="E9E9E7"/>
-                      </a:solidFill>
-                      <a:prstDash val="solid"/>
-                      <a:round/>
-                      <a:headEnd type="none" w="med" len="med"/>
-                      <a:tailEnd type="none" w="med" len="med"/>
-                    </a:lnL>
-                    <a:lnR w="12700" cap="flat" cmpd="sng" algn="ctr">
-                      <a:solidFill>
-                        <a:srgbClr val="E9E9E7"/>
-                      </a:solidFill>
-                      <a:prstDash val="solid"/>
-                      <a:round/>
-                      <a:headEnd type="none" w="med" len="med"/>
-                      <a:tailEnd type="none" w="med" len="med"/>
-                    </a:lnR>
-                    <a:lnT w="12700" cap="flat" cmpd="sng" algn="ctr">
-                      <a:solidFill>
-                        <a:srgbClr val="E9E9E7"/>
-                      </a:solidFill>
-                      <a:prstDash val="solid"/>
-                      <a:round/>
-                      <a:headEnd type="none" w="med" len="med"/>
-                      <a:tailEnd type="none" w="med" len="med"/>
-                    </a:lnT>
-                    <a:lnB w="12700" cap="flat" cmpd="sng" algn="ctr">
-                      <a:solidFill>
-                        <a:srgbClr val="E9E9E7"/>
-                      </a:solidFill>
-                      <a:prstDash val="solid"/>
-                      <a:round/>
-                      <a:headEnd type="none" w="med" len="med"/>
-                      <a:tailEnd type="none" w="med" len="med"/>
-                    </a:lnB>
-                    <a:solidFill>
-                      <a:srgbClr val="FFFFFF"/>
-                    </a:solidFill>
-                  </a:tcPr>
-                </a:tc>
-                <a:tc>
-                  <a:txBody>
-                    <a:bodyPr/>
-                    <a:lstStyle/>
-                    <a:p>
-                      <a:pPr indent="0" marL="0">
-                        <a:buNone/>
-                      </a:pPr>
-                      <a:r>
-                        <a:rPr lang="en-US" sz="950" dirty="0">
-                          <a:solidFill>
-                            <a:srgbClr val="37352F"/>
-                          </a:solidFill>
-                          <a:latin typeface="맑은 고딕" pitchFamily="34" charset="0"/>
-                          <a:ea typeface="맑은 고딕" pitchFamily="34" charset="-122"/>
-                          <a:cs typeface="맑은 고딕" pitchFamily="34" charset="-120"/>
-                        </a:rPr>
-                        <a:t>20</a:t>
-                      </a:r>
-                      <a:endParaRPr lang="en-US" sz="950" dirty="0">
-                        <a:latin typeface="맑은 고딕" charset="0"/>
-                        <a:ea typeface="맑은 고딕" charset="0"/>
-                        <a:cs typeface="맑은 고딕" charset="0"/>
-                      </a:endParaRPr>
-                    </a:p>
-                  </a:txBody>
-                  <a:tcPr marL="76200" marR="76200" marT="25400" marB="25400" anchor="ctr">
-                    <a:lnL w="12700" cap="flat" cmpd="sng" algn="ctr">
-                      <a:solidFill>
-                        <a:srgbClr val="E9E9E7"/>
-                      </a:solidFill>
-                      <a:prstDash val="solid"/>
-                      <a:round/>
-                      <a:headEnd type="none" w="med" len="med"/>
-                      <a:tailEnd type="none" w="med" len="med"/>
-                    </a:lnL>
-                    <a:lnR w="12700" cap="flat" cmpd="sng" algn="ctr">
-                      <a:solidFill>
-                        <a:srgbClr val="E9E9E7"/>
-                      </a:solidFill>
-                      <a:prstDash val="solid"/>
-                      <a:round/>
-                      <a:headEnd type="none" w="med" len="med"/>
-                      <a:tailEnd type="none" w="med" len="med"/>
-                    </a:lnR>
-                    <a:lnT w="12700" cap="flat" cmpd="sng" algn="ctr">
-                      <a:solidFill>
-                        <a:srgbClr val="E9E9E7"/>
-                      </a:solidFill>
-                      <a:prstDash val="solid"/>
-                      <a:round/>
-                      <a:headEnd type="none" w="med" len="med"/>
-                      <a:tailEnd type="none" w="med" len="med"/>
-                    </a:lnT>
-                    <a:lnB w="12700" cap="flat" cmpd="sng" algn="ctr">
-                      <a:solidFill>
-                        <a:srgbClr val="E9E9E7"/>
-                      </a:solidFill>
-                      <a:prstDash val="solid"/>
-                      <a:round/>
-                      <a:headEnd type="none" w="med" len="med"/>
-                      <a:tailEnd type="none" w="med" len="med"/>
-                    </a:lnB>
-                    <a:solidFill>
-                      <a:srgbClr val="FFFFFF"/>
-                    </a:solidFill>
-                  </a:tcPr>
-                </a:tc>
-              </a:tr>
-              <a:tr h="246888">
-                <a:tc>
-                  <a:txBody>
-                    <a:bodyPr/>
-                    <a:lstStyle/>
-                    <a:p>
-                      <a:pPr indent="0" marL="0">
-                        <a:buNone/>
-                      </a:pPr>
-                      <a:r>
-                        <a:rPr lang="en-US" sz="950" dirty="0">
-                          <a:solidFill>
-                            <a:srgbClr val="37352F"/>
-                          </a:solidFill>
-                          <a:latin typeface="맑은 고딕" pitchFamily="34" charset="0"/>
-                          <a:ea typeface="맑은 고딕" pitchFamily="34" charset="-122"/>
-                          <a:cs typeface="맑은 고딕" pitchFamily="34" charset="-120"/>
-                        </a:rPr>
-                        <a:t>6</a:t>
-                      </a:r>
-                      <a:endParaRPr lang="en-US" sz="950" dirty="0">
-                        <a:latin typeface="맑은 고딕" charset="0"/>
-                        <a:ea typeface="맑은 고딕" charset="0"/>
-                        <a:cs typeface="맑은 고딕" charset="0"/>
-                      </a:endParaRPr>
-                    </a:p>
-                  </a:txBody>
-                  <a:tcPr marL="76200" marR="76200" marT="25400" marB="25400" anchor="ctr">
-                    <a:lnL w="12700" cap="flat" cmpd="sng" algn="ctr">
-                      <a:solidFill>
-                        <a:srgbClr val="E9E9E7"/>
-                      </a:solidFill>
-                      <a:prstDash val="solid"/>
-                      <a:round/>
-                      <a:headEnd type="none" w="med" len="med"/>
-                      <a:tailEnd type="none" w="med" len="med"/>
-                    </a:lnL>
-                    <a:lnR w="12700" cap="flat" cmpd="sng" algn="ctr">
-                      <a:solidFill>
-                        <a:srgbClr val="E9E9E7"/>
-                      </a:solidFill>
-                      <a:prstDash val="solid"/>
-                      <a:round/>
-                      <a:headEnd type="none" w="med" len="med"/>
-                      <a:tailEnd type="none" w="med" len="med"/>
-                    </a:lnR>
-                    <a:lnT w="12700" cap="flat" cmpd="sng" algn="ctr">
-                      <a:solidFill>
-                        <a:srgbClr val="E9E9E7"/>
-                      </a:solidFill>
-                      <a:prstDash val="solid"/>
-                      <a:round/>
-                      <a:headEnd type="none" w="med" len="med"/>
-                      <a:tailEnd type="none" w="med" len="med"/>
-                    </a:lnT>
-                    <a:lnB w="12700" cap="flat" cmpd="sng" algn="ctr">
-                      <a:solidFill>
-                        <a:srgbClr val="E9E9E7"/>
-                      </a:solidFill>
-                      <a:prstDash val="solid"/>
-                      <a:round/>
-                      <a:headEnd type="none" w="med" len="med"/>
-                      <a:tailEnd type="none" w="med" len="med"/>
-                    </a:lnB>
-                    <a:solidFill>
-                      <a:srgbClr val="FFFFFF"/>
-                    </a:solidFill>
-                  </a:tcPr>
-                </a:tc>
-                <a:tc>
-                  <a:txBody>
-                    <a:bodyPr/>
-                    <a:lstStyle/>
-                    <a:p>
-                      <a:pPr indent="0" marL="0">
-                        <a:buNone/>
-                      </a:pPr>
-                      <a:r>
-                        <a:rPr lang="en-US" sz="950" dirty="0">
-                          <a:solidFill>
-                            <a:srgbClr val="37352F"/>
-                          </a:solidFill>
-                          <a:latin typeface="맑은 고딕" pitchFamily="34" charset="0"/>
-                          <a:ea typeface="맑은 고딕" pitchFamily="34" charset="-122"/>
-                          <a:cs typeface="맑은 고딕" pitchFamily="34" charset="-120"/>
-                        </a:rPr>
-                        <a:t>시스템 아키텍처 — 층 구조와 처리 흐름</a:t>
-                      </a:r>
-                      <a:endParaRPr lang="en-US" sz="950" dirty="0">
-                        <a:latin typeface="맑은 고딕" charset="0"/>
-                        <a:ea typeface="맑은 고딕" charset="0"/>
-                        <a:cs typeface="맑은 고딕" charset="0"/>
-                      </a:endParaRPr>
-                    </a:p>
-                  </a:txBody>
-                  <a:tcPr marL="76200" marR="76200" marT="25400" marB="25400" anchor="ctr">
-                    <a:lnL w="12700" cap="flat" cmpd="sng" algn="ctr">
-                      <a:solidFill>
-                        <a:srgbClr val="E9E9E7"/>
-                      </a:solidFill>
-                      <a:prstDash val="solid"/>
-                      <a:round/>
-                      <a:headEnd type="none" w="med" len="med"/>
-                      <a:tailEnd type="none" w="med" len="med"/>
-                    </a:lnL>
-                    <a:lnR w="12700" cap="flat" cmpd="sng" algn="ctr">
-                      <a:solidFill>
-                        <a:srgbClr val="E9E9E7"/>
-                      </a:solidFill>
-                      <a:prstDash val="solid"/>
-                      <a:round/>
-                      <a:headEnd type="none" w="med" len="med"/>
-                      <a:tailEnd type="none" w="med" len="med"/>
-                    </a:lnR>
-                    <a:lnT w="12700" cap="flat" cmpd="sng" algn="ctr">
-                      <a:solidFill>
-                        <a:srgbClr val="E9E9E7"/>
-                      </a:solidFill>
-                      <a:prstDash val="solid"/>
-                      <a:round/>
-                      <a:headEnd type="none" w="med" len="med"/>
-                      <a:tailEnd type="none" w="med" len="med"/>
-                    </a:lnT>
-                    <a:lnB w="12700" cap="flat" cmpd="sng" algn="ctr">
-                      <a:solidFill>
-                        <a:srgbClr val="E9E9E7"/>
-                      </a:solidFill>
-                      <a:prstDash val="solid"/>
-                      <a:round/>
-                      <a:headEnd type="none" w="med" len="med"/>
-                      <a:tailEnd type="none" w="med" len="med"/>
-                    </a:lnB>
-                    <a:solidFill>
-                      <a:srgbClr val="FFFFFF"/>
-                    </a:solidFill>
-                  </a:tcPr>
-                </a:tc>
-                <a:tc>
-                  <a:txBody>
-                    <a:bodyPr/>
-                    <a:lstStyle/>
-                    <a:p>
-                      <a:pPr indent="0" marL="0">
-                        <a:buNone/>
-                      </a:pPr>
-                      <a:r>
-                        <a:rPr lang="en-US" sz="950" dirty="0">
-                          <a:solidFill>
-                            <a:srgbClr val="37352F"/>
-                          </a:solidFill>
-                          <a:latin typeface="맑은 고딕" pitchFamily="34" charset="0"/>
-                          <a:ea typeface="맑은 고딕" pitchFamily="34" charset="-122"/>
-                          <a:cs typeface="맑은 고딕" pitchFamily="34" charset="-120"/>
-                        </a:rPr>
-                        <a:t>기술 적정성</a:t>
-                      </a:r>
-                      <a:endParaRPr lang="en-US" sz="950" dirty="0">
-                        <a:latin typeface="맑은 고딕" charset="0"/>
-                        <a:ea typeface="맑은 고딕" charset="0"/>
-                        <a:cs typeface="맑은 고딕" charset="0"/>
-                      </a:endParaRPr>
-                    </a:p>
-                  </a:txBody>
-                  <a:tcPr marL="76200" marR="76200" marT="25400" marB="25400" anchor="ctr">
-                    <a:lnL w="12700" cap="flat" cmpd="sng" algn="ctr">
-                      <a:solidFill>
-                        <a:srgbClr val="E9E9E7"/>
-                      </a:solidFill>
-                      <a:prstDash val="solid"/>
-                      <a:round/>
-                      <a:headEnd type="none" w="med" len="med"/>
-                      <a:tailEnd type="none" w="med" len="med"/>
-                    </a:lnL>
-                    <a:lnR w="12700" cap="flat" cmpd="sng" algn="ctr">
-                      <a:solidFill>
-                        <a:srgbClr val="E9E9E7"/>
-                      </a:solidFill>
-                      <a:prstDash val="solid"/>
-                      <a:round/>
-                      <a:headEnd type="none" w="med" len="med"/>
-                      <a:tailEnd type="none" w="med" len="med"/>
-                    </a:lnR>
-                    <a:lnT w="12700" cap="flat" cmpd="sng" algn="ctr">
-                      <a:solidFill>
-                        <a:srgbClr val="E9E9E7"/>
-                      </a:solidFill>
-                      <a:prstDash val="solid"/>
-                      <a:round/>
-                      <a:headEnd type="none" w="med" len="med"/>
-                      <a:tailEnd type="none" w="med" len="med"/>
-                    </a:lnT>
-                    <a:lnB w="12700" cap="flat" cmpd="sng" algn="ctr">
-                      <a:solidFill>
-                        <a:srgbClr val="E9E9E7"/>
-                      </a:solidFill>
-                      <a:prstDash val="solid"/>
-                      <a:round/>
-                      <a:headEnd type="none" w="med" len="med"/>
-                      <a:tailEnd type="none" w="med" len="med"/>
-                    </a:lnB>
-                    <a:solidFill>
-                      <a:srgbClr val="FFFFFF"/>
-                    </a:solidFill>
-                  </a:tcPr>
-                </a:tc>
-                <a:tc>
-                  <a:txBody>
-                    <a:bodyPr/>
-                    <a:lstStyle/>
-                    <a:p>
-                      <a:pPr indent="0" marL="0">
-                        <a:buNone/>
-                      </a:pPr>
-                      <a:r>
-                        <a:rPr lang="en-US" sz="950" dirty="0">
-                          <a:solidFill>
-                            <a:srgbClr val="37352F"/>
-                          </a:solidFill>
-                          <a:latin typeface="맑은 고딕" pitchFamily="34" charset="0"/>
-                          <a:ea typeface="맑은 고딕" pitchFamily="34" charset="-122"/>
-                          <a:cs typeface="맑은 고딕" pitchFamily="34" charset="-120"/>
-                        </a:rPr>
-                        <a:t>20</a:t>
-                      </a:r>
-                      <a:endParaRPr lang="en-US" sz="950" dirty="0">
-                        <a:latin typeface="맑은 고딕" charset="0"/>
-                        <a:ea typeface="맑은 고딕" charset="0"/>
-                        <a:cs typeface="맑은 고딕" charset="0"/>
-                      </a:endParaRPr>
-                    </a:p>
-                  </a:txBody>
-                  <a:tcPr marL="76200" marR="76200" marT="25400" marB="25400" anchor="ctr">
-                    <a:lnL w="12700" cap="flat" cmpd="sng" algn="ctr">
-                      <a:solidFill>
-                        <a:srgbClr val="E9E9E7"/>
-                      </a:solidFill>
-                      <a:prstDash val="solid"/>
-                      <a:round/>
-                      <a:headEnd type="none" w="med" len="med"/>
-                      <a:tailEnd type="none" w="med" len="med"/>
-                    </a:lnL>
-                    <a:lnR w="12700" cap="flat" cmpd="sng" algn="ctr">
-                      <a:solidFill>
-                        <a:srgbClr val="E9E9E7"/>
-                      </a:solidFill>
-                      <a:prstDash val="solid"/>
-                      <a:round/>
-                      <a:headEnd type="none" w="med" len="med"/>
-                      <a:tailEnd type="none" w="med" len="med"/>
-                    </a:lnR>
-                    <a:lnT w="12700" cap="flat" cmpd="sng" algn="ctr">
-                      <a:solidFill>
-                        <a:srgbClr val="E9E9E7"/>
-                      </a:solidFill>
-                      <a:prstDash val="solid"/>
-                      <a:round/>
-                      <a:headEnd type="none" w="med" len="med"/>
-                      <a:tailEnd type="none" w="med" len="med"/>
-                    </a:lnT>
-                    <a:lnB w="12700" cap="flat" cmpd="sng" algn="ctr">
-                      <a:solidFill>
-                        <a:srgbClr val="E9E9E7"/>
-                      </a:solidFill>
-                      <a:prstDash val="solid"/>
-                      <a:round/>
-                      <a:headEnd type="none" w="med" len="med"/>
-                      <a:tailEnd type="none" w="med" len="med"/>
-                    </a:lnB>
-                    <a:solidFill>
-                      <a:srgbClr val="FFFFFF"/>
-                    </a:solidFill>
-                  </a:tcPr>
-                </a:tc>
-              </a:tr>
-              <a:tr h="246888">
-                <a:tc>
-                  <a:txBody>
-                    <a:bodyPr/>
-                    <a:lstStyle/>
-                    <a:p>
-                      <a:pPr indent="0" marL="0">
-                        <a:buNone/>
-                      </a:pPr>
-                      <a:r>
-                        <a:rPr lang="en-US" sz="950" dirty="0">
-                          <a:solidFill>
-                            <a:srgbClr val="37352F"/>
-                          </a:solidFill>
-                          <a:latin typeface="맑은 고딕" pitchFamily="34" charset="0"/>
-                          <a:ea typeface="맑은 고딕" pitchFamily="34" charset="-122"/>
-                          <a:cs typeface="맑은 고딕" pitchFamily="34" charset="-120"/>
-                        </a:rPr>
-                        <a:t>7</a:t>
-                      </a:r>
-                      <a:endParaRPr lang="en-US" sz="950" dirty="0">
-                        <a:latin typeface="맑은 고딕" charset="0"/>
-                        <a:ea typeface="맑은 고딕" charset="0"/>
-                        <a:cs typeface="맑은 고딕" charset="0"/>
-                      </a:endParaRPr>
-                    </a:p>
-                  </a:txBody>
-                  <a:tcPr marL="76200" marR="76200" marT="25400" marB="25400" anchor="ctr">
-                    <a:lnL w="12700" cap="flat" cmpd="sng" algn="ctr">
-                      <a:solidFill>
-                        <a:srgbClr val="E9E9E7"/>
-                      </a:solidFill>
-                      <a:prstDash val="solid"/>
-                      <a:round/>
-                      <a:headEnd type="none" w="med" len="med"/>
-                      <a:tailEnd type="none" w="med" len="med"/>
-                    </a:lnL>
-                    <a:lnR w="12700" cap="flat" cmpd="sng" algn="ctr">
-                      <a:solidFill>
-                        <a:srgbClr val="E9E9E7"/>
-                      </a:solidFill>
-                      <a:prstDash val="solid"/>
-                      <a:round/>
-                      <a:headEnd type="none" w="med" len="med"/>
-                      <a:tailEnd type="none" w="med" len="med"/>
-                    </a:lnR>
-                    <a:lnT w="12700" cap="flat" cmpd="sng" algn="ctr">
-                      <a:solidFill>
-                        <a:srgbClr val="E9E9E7"/>
-                      </a:solidFill>
-                      <a:prstDash val="solid"/>
-                      <a:round/>
-                      <a:headEnd type="none" w="med" len="med"/>
-                      <a:tailEnd type="none" w="med" len="med"/>
-                    </a:lnT>
-                    <a:lnB w="12700" cap="flat" cmpd="sng" algn="ctr">
-                      <a:solidFill>
-                        <a:srgbClr val="E9E9E7"/>
-                      </a:solidFill>
-                      <a:prstDash val="solid"/>
-                      <a:round/>
-                      <a:headEnd type="none" w="med" len="med"/>
-                      <a:tailEnd type="none" w="med" len="med"/>
-                    </a:lnB>
-                    <a:solidFill>
-                      <a:srgbClr val="FFFFFF"/>
-                    </a:solidFill>
-                  </a:tcPr>
-                </a:tc>
-                <a:tc>
-                  <a:txBody>
-                    <a:bodyPr/>
-                    <a:lstStyle/>
-                    <a:p>
-                      <a:pPr indent="0" marL="0">
-                        <a:buNone/>
-                      </a:pPr>
-                      <a:r>
-                        <a:rPr lang="en-US" sz="950" dirty="0">
-                          <a:solidFill>
-                            <a:srgbClr val="37352F"/>
-                          </a:solidFill>
-                          <a:latin typeface="맑은 고딕" pitchFamily="34" charset="0"/>
-                          <a:ea typeface="맑은 고딕" pitchFamily="34" charset="-122"/>
-                          <a:cs typeface="맑은 고딕" pitchFamily="34" charset="-120"/>
-                        </a:rPr>
-                        <a:t>규칙 테이블과 판정 축 신호</a:t>
-                      </a:r>
-                      <a:endParaRPr lang="en-US" sz="950" dirty="0">
-                        <a:latin typeface="맑은 고딕" charset="0"/>
-                        <a:ea typeface="맑은 고딕" charset="0"/>
-                        <a:cs typeface="맑은 고딕" charset="0"/>
-                      </a:endParaRPr>
-                    </a:p>
-                  </a:txBody>
-                  <a:tcPr marL="76200" marR="76200" marT="25400" marB="25400" anchor="ctr">
-                    <a:lnL w="12700" cap="flat" cmpd="sng" algn="ctr">
-                      <a:solidFill>
-                        <a:srgbClr val="E9E9E7"/>
-                      </a:solidFill>
-                      <a:prstDash val="solid"/>
-                      <a:round/>
-                      <a:headEnd type="none" w="med" len="med"/>
-                      <a:tailEnd type="none" w="med" len="med"/>
-                    </a:lnL>
-                    <a:lnR w="12700" cap="flat" cmpd="sng" algn="ctr">
-                      <a:solidFill>
-                        <a:srgbClr val="E9E9E7"/>
-                      </a:solidFill>
-                      <a:prstDash val="solid"/>
-                      <a:round/>
-                      <a:headEnd type="none" w="med" len="med"/>
-                      <a:tailEnd type="none" w="med" len="med"/>
-                    </a:lnR>
-                    <a:lnT w="12700" cap="flat" cmpd="sng" algn="ctr">
-                      <a:solidFill>
-                        <a:srgbClr val="E9E9E7"/>
-                      </a:solidFill>
-                      <a:prstDash val="solid"/>
-                      <a:round/>
-                      <a:headEnd type="none" w="med" len="med"/>
-                      <a:tailEnd type="none" w="med" len="med"/>
-                    </a:lnT>
-                    <a:lnB w="12700" cap="flat" cmpd="sng" algn="ctr">
-                      <a:solidFill>
-                        <a:srgbClr val="E9E9E7"/>
-                      </a:solidFill>
-                      <a:prstDash val="solid"/>
-                      <a:round/>
-                      <a:headEnd type="none" w="med" len="med"/>
-                      <a:tailEnd type="none" w="med" len="med"/>
-                    </a:lnB>
-                    <a:solidFill>
-                      <a:srgbClr val="FFFFFF"/>
-                    </a:solidFill>
-                  </a:tcPr>
-                </a:tc>
-                <a:tc>
-                  <a:txBody>
-                    <a:bodyPr/>
-                    <a:lstStyle/>
-                    <a:p>
-                      <a:pPr indent="0" marL="0">
-                        <a:buNone/>
-                      </a:pPr>
-                      <a:r>
-                        <a:rPr lang="en-US" sz="950" dirty="0">
-                          <a:solidFill>
-                            <a:srgbClr val="37352F"/>
-                          </a:solidFill>
-                          <a:latin typeface="맑은 고딕" pitchFamily="34" charset="0"/>
-                          <a:ea typeface="맑은 고딕" pitchFamily="34" charset="-122"/>
-                          <a:cs typeface="맑은 고딕" pitchFamily="34" charset="-120"/>
-                        </a:rPr>
-                        <a:t>기술 적정성</a:t>
-                      </a:r>
-                      <a:endParaRPr lang="en-US" sz="950" dirty="0">
-                        <a:latin typeface="맑은 고딕" charset="0"/>
-                        <a:ea typeface="맑은 고딕" charset="0"/>
-                        <a:cs typeface="맑은 고딕" charset="0"/>
-                      </a:endParaRPr>
-                    </a:p>
-                  </a:txBody>
-                  <a:tcPr marL="76200" marR="76200" marT="25400" marB="25400" anchor="ctr">
-                    <a:lnL w="12700" cap="flat" cmpd="sng" algn="ctr">
-                      <a:solidFill>
-                        <a:srgbClr val="E9E9E7"/>
-                      </a:solidFill>
-                      <a:prstDash val="solid"/>
-                      <a:round/>
-                      <a:headEnd type="none" w="med" len="med"/>
-                      <a:tailEnd type="none" w="med" len="med"/>
-                    </a:lnL>
-                    <a:lnR w="12700" cap="flat" cmpd="sng" algn="ctr">
-                      <a:solidFill>
-                        <a:srgbClr val="E9E9E7"/>
-                      </a:solidFill>
-                      <a:prstDash val="solid"/>
-                      <a:round/>
-                      <a:headEnd type="none" w="med" len="med"/>
-                      <a:tailEnd type="none" w="med" len="med"/>
-                    </a:lnR>
-                    <a:lnT w="12700" cap="flat" cmpd="sng" algn="ctr">
-                      <a:solidFill>
-                        <a:srgbClr val="E9E9E7"/>
-                      </a:solidFill>
-                      <a:prstDash val="solid"/>
-                      <a:round/>
-                      <a:headEnd type="none" w="med" len="med"/>
-                      <a:tailEnd type="none" w="med" len="med"/>
-                    </a:lnT>
-                    <a:lnB w="12700" cap="flat" cmpd="sng" algn="ctr">
-                      <a:solidFill>
-                        <a:srgbClr val="E9E9E7"/>
-                      </a:solidFill>
-                      <a:prstDash val="solid"/>
-                      <a:round/>
-                      <a:headEnd type="none" w="med" len="med"/>
-                      <a:tailEnd type="none" w="med" len="med"/>
-                    </a:lnB>
-                    <a:solidFill>
-                      <a:srgbClr val="FFFFFF"/>
-                    </a:solidFill>
-                  </a:tcPr>
-                </a:tc>
-                <a:tc>
-                  <a:txBody>
-                    <a:bodyPr/>
-                    <a:lstStyle/>
-                    <a:p>
-                      <a:pPr indent="0" marL="0">
-                        <a:buNone/>
-                      </a:pPr>
-                      <a:r>
-                        <a:rPr lang="en-US" sz="950" dirty="0">
-                          <a:solidFill>
-                            <a:srgbClr val="37352F"/>
-                          </a:solidFill>
-                          <a:latin typeface="맑은 고딕" pitchFamily="34" charset="0"/>
-                          <a:ea typeface="맑은 고딕" pitchFamily="34" charset="-122"/>
-                          <a:cs typeface="맑은 고딕" pitchFamily="34" charset="-120"/>
-                        </a:rPr>
-                        <a:t>20</a:t>
-                      </a:r>
-                      <a:endParaRPr lang="en-US" sz="950" dirty="0">
-                        <a:latin typeface="맑은 고딕" charset="0"/>
-                        <a:ea typeface="맑은 고딕" charset="0"/>
-                        <a:cs typeface="맑은 고딕" charset="0"/>
-                      </a:endParaRPr>
-                    </a:p>
-                  </a:txBody>
-                  <a:tcPr marL="76200" marR="76200" marT="25400" marB="25400" anchor="ctr">
-                    <a:lnL w="12700" cap="flat" cmpd="sng" algn="ctr">
-                      <a:solidFill>
-                        <a:srgbClr val="E9E9E7"/>
-                      </a:solidFill>
-                      <a:prstDash val="solid"/>
-                      <a:round/>
-                      <a:headEnd type="none" w="med" len="med"/>
-                      <a:tailEnd type="none" w="med" len="med"/>
-                    </a:lnL>
-                    <a:lnR w="12700" cap="flat" cmpd="sng" algn="ctr">
-                      <a:solidFill>
-                        <a:srgbClr val="E9E9E7"/>
-                      </a:solidFill>
-                      <a:prstDash val="solid"/>
-                      <a:round/>
-                      <a:headEnd type="none" w="med" len="med"/>
-                      <a:tailEnd type="none" w="med" len="med"/>
-                    </a:lnR>
-                    <a:lnT w="12700" cap="flat" cmpd="sng" algn="ctr">
-                      <a:solidFill>
-                        <a:srgbClr val="E9E9E7"/>
-                      </a:solidFill>
-                      <a:prstDash val="solid"/>
-                      <a:round/>
-                      <a:headEnd type="none" w="med" len="med"/>
-                      <a:tailEnd type="none" w="med" len="med"/>
-                    </a:lnT>
-                    <a:lnB w="12700" cap="flat" cmpd="sng" algn="ctr">
-                      <a:solidFill>
-                        <a:srgbClr val="E9E9E7"/>
-                      </a:solidFill>
-                      <a:prstDash val="solid"/>
-                      <a:round/>
-                      <a:headEnd type="none" w="med" len="med"/>
-                      <a:tailEnd type="none" w="med" len="med"/>
-                    </a:lnB>
-                    <a:solidFill>
-                      <a:srgbClr val="FFFFFF"/>
-                    </a:solidFill>
-                  </a:tcPr>
-                </a:tc>
-              </a:tr>
-              <a:tr h="246888">
-                <a:tc>
-                  <a:txBody>
-                    <a:bodyPr/>
-                    <a:lstStyle/>
-                    <a:p>
-                      <a:pPr indent="0" marL="0">
-                        <a:buNone/>
-                      </a:pPr>
-                      <a:r>
-                        <a:rPr lang="en-US" sz="950" dirty="0">
-                          <a:solidFill>
-                            <a:srgbClr val="37352F"/>
-                          </a:solidFill>
-                          <a:latin typeface="맑은 고딕" pitchFamily="34" charset="0"/>
-                          <a:ea typeface="맑은 고딕" pitchFamily="34" charset="-122"/>
-                          <a:cs typeface="맑은 고딕" pitchFamily="34" charset="-120"/>
-                        </a:rPr>
-                        <a:t>8</a:t>
-                      </a:r>
-                      <a:endParaRPr lang="en-US" sz="950" dirty="0">
-                        <a:latin typeface="맑은 고딕" charset="0"/>
-                        <a:ea typeface="맑은 고딕" charset="0"/>
-                        <a:cs typeface="맑은 고딕" charset="0"/>
-                      </a:endParaRPr>
-                    </a:p>
-                  </a:txBody>
-                  <a:tcPr marL="76200" marR="76200" marT="25400" marB="25400" anchor="ctr">
-                    <a:lnL w="12700" cap="flat" cmpd="sng" algn="ctr">
-                      <a:solidFill>
-                        <a:srgbClr val="E9E9E7"/>
-                      </a:solidFill>
-                      <a:prstDash val="solid"/>
-                      <a:round/>
-                      <a:headEnd type="none" w="med" len="med"/>
-                      <a:tailEnd type="none" w="med" len="med"/>
-                    </a:lnL>
-                    <a:lnR w="12700" cap="flat" cmpd="sng" algn="ctr">
-                      <a:solidFill>
-                        <a:srgbClr val="E9E9E7"/>
-                      </a:solidFill>
-                      <a:prstDash val="solid"/>
-                      <a:round/>
-                      <a:headEnd type="none" w="med" len="med"/>
-                      <a:tailEnd type="none" w="med" len="med"/>
-                    </a:lnR>
-                    <a:lnT w="12700" cap="flat" cmpd="sng" algn="ctr">
-                      <a:solidFill>
-                        <a:srgbClr val="E9E9E7"/>
-                      </a:solidFill>
-                      <a:prstDash val="solid"/>
-                      <a:round/>
-                      <a:headEnd type="none" w="med" len="med"/>
-                      <a:tailEnd type="none" w="med" len="med"/>
-                    </a:lnT>
-                    <a:lnB w="12700" cap="flat" cmpd="sng" algn="ctr">
-                      <a:solidFill>
-                        <a:srgbClr val="E9E9E7"/>
-                      </a:solidFill>
-                      <a:prstDash val="solid"/>
-                      <a:round/>
-                      <a:headEnd type="none" w="med" len="med"/>
-                      <a:tailEnd type="none" w="med" len="med"/>
-                    </a:lnB>
-                    <a:solidFill>
-                      <a:srgbClr val="FFFFFF"/>
-                    </a:solidFill>
-                  </a:tcPr>
-                </a:tc>
-                <a:tc>
-                  <a:txBody>
-                    <a:bodyPr/>
-                    <a:lstStyle/>
-                    <a:p>
-                      <a:pPr indent="0" marL="0">
-                        <a:buNone/>
-                      </a:pPr>
-                      <a:r>
-                        <a:rPr lang="en-US" sz="950" dirty="0">
-                          <a:solidFill>
-                            <a:srgbClr val="37352F"/>
-                          </a:solidFill>
-                          <a:latin typeface="맑은 고딕" pitchFamily="34" charset="0"/>
-                          <a:ea typeface="맑은 고딕" pitchFamily="34" charset="-122"/>
-                          <a:cs typeface="맑은 고딕" pitchFamily="34" charset="-120"/>
-                        </a:rPr>
-                        <a:t>구현 기술 스택</a:t>
-                      </a:r>
-                      <a:endParaRPr lang="en-US" sz="950" dirty="0">
-                        <a:latin typeface="맑은 고딕" charset="0"/>
-                        <a:ea typeface="맑은 고딕" charset="0"/>
-                        <a:cs typeface="맑은 고딕" charset="0"/>
-                      </a:endParaRPr>
-                    </a:p>
-                  </a:txBody>
-                  <a:tcPr marL="76200" marR="76200" marT="25400" marB="25400" anchor="ctr">
-                    <a:lnL w="12700" cap="flat" cmpd="sng" algn="ctr">
-                      <a:solidFill>
-                        <a:srgbClr val="E9E9E7"/>
-                      </a:solidFill>
-                      <a:prstDash val="solid"/>
-                      <a:round/>
-                      <a:headEnd type="none" w="med" len="med"/>
-                      <a:tailEnd type="none" w="med" len="med"/>
-                    </a:lnL>
-                    <a:lnR w="12700" cap="flat" cmpd="sng" algn="ctr">
-                      <a:solidFill>
-                        <a:srgbClr val="E9E9E7"/>
-                      </a:solidFill>
-                      <a:prstDash val="solid"/>
-                      <a:round/>
-                      <a:headEnd type="none" w="med" len="med"/>
-                      <a:tailEnd type="none" w="med" len="med"/>
-                    </a:lnR>
-                    <a:lnT w="12700" cap="flat" cmpd="sng" algn="ctr">
-                      <a:solidFill>
-                        <a:srgbClr val="E9E9E7"/>
-                      </a:solidFill>
-                      <a:prstDash val="solid"/>
-                      <a:round/>
-                      <a:headEnd type="none" w="med" len="med"/>
-                      <a:tailEnd type="none" w="med" len="med"/>
-                    </a:lnT>
-                    <a:lnB w="12700" cap="flat" cmpd="sng" algn="ctr">
-                      <a:solidFill>
-                        <a:srgbClr val="E9E9E7"/>
-                      </a:solidFill>
-                      <a:prstDash val="solid"/>
-                      <a:round/>
-                      <a:headEnd type="none" w="med" len="med"/>
-                      <a:tailEnd type="none" w="med" len="med"/>
-                    </a:lnB>
-                    <a:solidFill>
-                      <a:srgbClr val="FFFFFF"/>
-                    </a:solidFill>
-                  </a:tcPr>
-                </a:tc>
-                <a:tc>
-                  <a:txBody>
-                    <a:bodyPr/>
-                    <a:lstStyle/>
-                    <a:p>
-                      <a:pPr indent="0" marL="0">
-                        <a:buNone/>
-                      </a:pPr>
-                      <a:r>
-                        <a:rPr lang="en-US" sz="950" dirty="0">
-                          <a:solidFill>
-                            <a:srgbClr val="37352F"/>
-                          </a:solidFill>
-                          <a:latin typeface="맑은 고딕" pitchFamily="34" charset="0"/>
-                          <a:ea typeface="맑은 고딕" pitchFamily="34" charset="-122"/>
-                          <a:cs typeface="맑은 고딕" pitchFamily="34" charset="-120"/>
-                        </a:rPr>
-                        <a:t>기술 적정성</a:t>
-                      </a:r>
-                      <a:endParaRPr lang="en-US" sz="950" dirty="0">
-                        <a:latin typeface="맑은 고딕" charset="0"/>
-                        <a:ea typeface="맑은 고딕" charset="0"/>
-                        <a:cs typeface="맑은 고딕" charset="0"/>
-                      </a:endParaRPr>
-                    </a:p>
-                  </a:txBody>
-                  <a:tcPr marL="76200" marR="76200" marT="25400" marB="25400" anchor="ctr">
-                    <a:lnL w="12700" cap="flat" cmpd="sng" algn="ctr">
-                      <a:solidFill>
-                        <a:srgbClr val="E9E9E7"/>
-                      </a:solidFill>
-                      <a:prstDash val="solid"/>
-                      <a:round/>
-                      <a:headEnd type="none" w="med" len="med"/>
-                      <a:tailEnd type="none" w="med" len="med"/>
-                    </a:lnL>
-                    <a:lnR w="12700" cap="flat" cmpd="sng" algn="ctr">
-                      <a:solidFill>
-                        <a:srgbClr val="E9E9E7"/>
-                      </a:solidFill>
-                      <a:prstDash val="solid"/>
-                      <a:round/>
-                      <a:headEnd type="none" w="med" len="med"/>
-                      <a:tailEnd type="none" w="med" len="med"/>
-                    </a:lnR>
-                    <a:lnT w="12700" cap="flat" cmpd="sng" algn="ctr">
-                      <a:solidFill>
-                        <a:srgbClr val="E9E9E7"/>
-                      </a:solidFill>
-                      <a:prstDash val="solid"/>
-                      <a:round/>
-                      <a:headEnd type="none" w="med" len="med"/>
-                      <a:tailEnd type="none" w="med" len="med"/>
-                    </a:lnT>
-                    <a:lnB w="12700" cap="flat" cmpd="sng" algn="ctr">
-                      <a:solidFill>
-                        <a:srgbClr val="E9E9E7"/>
-                      </a:solidFill>
-                      <a:prstDash val="solid"/>
-                      <a:round/>
-                      <a:headEnd type="none" w="med" len="med"/>
-                      <a:tailEnd type="none" w="med" len="med"/>
-                    </a:lnB>
-                    <a:solidFill>
-                      <a:srgbClr val="FFFFFF"/>
-                    </a:solidFill>
-                  </a:tcPr>
-                </a:tc>
-                <a:tc>
-                  <a:txBody>
-                    <a:bodyPr/>
-                    <a:lstStyle/>
-                    <a:p>
-                      <a:pPr indent="0" marL="0">
-                        <a:buNone/>
-                      </a:pPr>
-                      <a:r>
-                        <a:rPr lang="en-US" sz="950" dirty="0">
-                          <a:solidFill>
-                            <a:srgbClr val="37352F"/>
-                          </a:solidFill>
-                          <a:latin typeface="맑은 고딕" pitchFamily="34" charset="0"/>
-                          <a:ea typeface="맑은 고딕" pitchFamily="34" charset="-122"/>
-                          <a:cs typeface="맑은 고딕" pitchFamily="34" charset="-120"/>
-                        </a:rPr>
-                        <a:t>20</a:t>
-                      </a:r>
-                      <a:endParaRPr lang="en-US" sz="950" dirty="0">
-                        <a:latin typeface="맑은 고딕" charset="0"/>
-                        <a:ea typeface="맑은 고딕" charset="0"/>
-                        <a:cs typeface="맑은 고딕" charset="0"/>
-                      </a:endParaRPr>
-                    </a:p>
-                  </a:txBody>
-                  <a:tcPr marL="76200" marR="76200" marT="25400" marB="25400" anchor="ctr">
-                    <a:lnL w="12700" cap="flat" cmpd="sng" algn="ctr">
-                      <a:solidFill>
-                        <a:srgbClr val="E9E9E7"/>
-                      </a:solidFill>
-                      <a:prstDash val="solid"/>
-                      <a:round/>
-                      <a:headEnd type="none" w="med" len="med"/>
-                      <a:tailEnd type="none" w="med" len="med"/>
-                    </a:lnL>
-                    <a:lnR w="12700" cap="flat" cmpd="sng" algn="ctr">
-                      <a:solidFill>
-                        <a:srgbClr val="E9E9E7"/>
-                      </a:solidFill>
-                      <a:prstDash val="solid"/>
-                      <a:round/>
-                      <a:headEnd type="none" w="med" len="med"/>
-                      <a:tailEnd type="none" w="med" len="med"/>
-                    </a:lnR>
-                    <a:lnT w="12700" cap="flat" cmpd="sng" algn="ctr">
-                      <a:solidFill>
-                        <a:srgbClr val="E9E9E7"/>
-                      </a:solidFill>
-                      <a:prstDash val="solid"/>
-                      <a:round/>
-                      <a:headEnd type="none" w="med" len="med"/>
-                      <a:tailEnd type="none" w="med" len="med"/>
-                    </a:lnT>
-                    <a:lnB w="12700" cap="flat" cmpd="sng" algn="ctr">
-                      <a:solidFill>
-                        <a:srgbClr val="E9E9E7"/>
-                      </a:solidFill>
-                      <a:prstDash val="solid"/>
-                      <a:round/>
-                      <a:headEnd type="none" w="med" len="med"/>
-                      <a:tailEnd type="none" w="med" len="med"/>
-                    </a:lnB>
-                    <a:solidFill>
-                      <a:srgbClr val="FFFFFF"/>
-                    </a:solidFill>
-                  </a:tcPr>
-                </a:tc>
-              </a:tr>
-              <a:tr h="246888">
-                <a:tc>
-                  <a:txBody>
-                    <a:bodyPr/>
-                    <a:lstStyle/>
-                    <a:p>
-                      <a:pPr indent="0" marL="0">
-                        <a:buNone/>
-                      </a:pPr>
-                      <a:r>
-                        <a:rPr lang="en-US" sz="950" dirty="0">
-                          <a:solidFill>
-                            <a:srgbClr val="37352F"/>
-                          </a:solidFill>
-                          <a:latin typeface="맑은 고딕" pitchFamily="34" charset="0"/>
-                          <a:ea typeface="맑은 고딕" pitchFamily="34" charset="-122"/>
-                          <a:cs typeface="맑은 고딕" pitchFamily="34" charset="-120"/>
-                        </a:rPr>
-                        <a:t>9</a:t>
-                      </a:r>
-                      <a:endParaRPr lang="en-US" sz="950" dirty="0">
-                        <a:latin typeface="맑은 고딕" charset="0"/>
-                        <a:ea typeface="맑은 고딕" charset="0"/>
-                        <a:cs typeface="맑은 고딕" charset="0"/>
-                      </a:endParaRPr>
-                    </a:p>
-                  </a:txBody>
-                  <a:tcPr marL="76200" marR="76200" marT="25400" marB="25400" anchor="ctr">
-                    <a:lnL w="12700" cap="flat" cmpd="sng" algn="ctr">
-                      <a:solidFill>
-                        <a:srgbClr val="E9E9E7"/>
-                      </a:solidFill>
-                      <a:prstDash val="solid"/>
-                      <a:round/>
-                      <a:headEnd type="none" w="med" len="med"/>
-                      <a:tailEnd type="none" w="med" len="med"/>
-                    </a:lnL>
-                    <a:lnR w="12700" cap="flat" cmpd="sng" algn="ctr">
-                      <a:solidFill>
-                        <a:srgbClr val="E9E9E7"/>
-                      </a:solidFill>
-                      <a:prstDash val="solid"/>
-                      <a:round/>
-                      <a:headEnd type="none" w="med" len="med"/>
-                      <a:tailEnd type="none" w="med" len="med"/>
-                    </a:lnR>
-                    <a:lnT w="12700" cap="flat" cmpd="sng" algn="ctr">
-                      <a:solidFill>
-                        <a:srgbClr val="E9E9E7"/>
-                      </a:solidFill>
-                      <a:prstDash val="solid"/>
-                      <a:round/>
-                      <a:headEnd type="none" w="med" len="med"/>
-                      <a:tailEnd type="none" w="med" len="med"/>
-                    </a:lnT>
-                    <a:lnB w="12700" cap="flat" cmpd="sng" algn="ctr">
-                      <a:solidFill>
-                        <a:srgbClr val="E9E9E7"/>
-                      </a:solidFill>
-                      <a:prstDash val="solid"/>
-                      <a:round/>
-                      <a:headEnd type="none" w="med" len="med"/>
-                      <a:tailEnd type="none" w="med" len="med"/>
-                    </a:lnB>
-                    <a:solidFill>
-                      <a:srgbClr val="FFFFFF"/>
-                    </a:solidFill>
-                  </a:tcPr>
-                </a:tc>
-                <a:tc>
-                  <a:txBody>
-                    <a:bodyPr/>
-                    <a:lstStyle/>
-                    <a:p>
-                      <a:pPr indent="0" marL="0">
-                        <a:buNone/>
-                      </a:pPr>
-                      <a:r>
-                        <a:rPr lang="en-US" sz="950" dirty="0">
-                          <a:solidFill>
-                            <a:srgbClr val="37352F"/>
-                          </a:solidFill>
-                          <a:latin typeface="맑은 고딕" pitchFamily="34" charset="0"/>
-                          <a:ea typeface="맑은 고딕" pitchFamily="34" charset="-122"/>
-                          <a:cs typeface="맑은 고딕" pitchFamily="34" charset="-120"/>
-                        </a:rPr>
-                        <a:t>실측 — 추출 정확도 · 탐지율 · 오탐률</a:t>
-                      </a:r>
-                      <a:endParaRPr lang="en-US" sz="950" dirty="0">
-                        <a:latin typeface="맑은 고딕" charset="0"/>
-                        <a:ea typeface="맑은 고딕" charset="0"/>
-                        <a:cs typeface="맑은 고딕" charset="0"/>
-                      </a:endParaRPr>
-                    </a:p>
-                  </a:txBody>
-                  <a:tcPr marL="76200" marR="76200" marT="25400" marB="25400" anchor="ctr">
-                    <a:lnL w="12700" cap="flat" cmpd="sng" algn="ctr">
-                      <a:solidFill>
-                        <a:srgbClr val="E9E9E7"/>
-                      </a:solidFill>
-                      <a:prstDash val="solid"/>
-                      <a:round/>
-                      <a:headEnd type="none" w="med" len="med"/>
-                      <a:tailEnd type="none" w="med" len="med"/>
-                    </a:lnL>
-                    <a:lnR w="12700" cap="flat" cmpd="sng" algn="ctr">
-                      <a:solidFill>
-                        <a:srgbClr val="E9E9E7"/>
-                      </a:solidFill>
-                      <a:prstDash val="solid"/>
-                      <a:round/>
-                      <a:headEnd type="none" w="med" len="med"/>
-                      <a:tailEnd type="none" w="med" len="med"/>
-                    </a:lnR>
-                    <a:lnT w="12700" cap="flat" cmpd="sng" algn="ctr">
-                      <a:solidFill>
-                        <a:srgbClr val="E9E9E7"/>
-                      </a:solidFill>
-                      <a:prstDash val="solid"/>
-                      <a:round/>
-                      <a:headEnd type="none" w="med" len="med"/>
-                      <a:tailEnd type="none" w="med" len="med"/>
-                    </a:lnT>
-                    <a:lnB w="12700" cap="flat" cmpd="sng" algn="ctr">
-                      <a:solidFill>
-                        <a:srgbClr val="E9E9E7"/>
-                      </a:solidFill>
-                      <a:prstDash val="solid"/>
-                      <a:round/>
-                      <a:headEnd type="none" w="med" len="med"/>
-                      <a:tailEnd type="none" w="med" len="med"/>
-                    </a:lnB>
-                    <a:solidFill>
-                      <a:srgbClr val="FFFFFF"/>
-                    </a:solidFill>
-                  </a:tcPr>
-                </a:tc>
-                <a:tc>
-                  <a:txBody>
-                    <a:bodyPr/>
-                    <a:lstStyle/>
-                    <a:p>
-                      <a:pPr indent="0" marL="0">
-                        <a:buNone/>
-                      </a:pPr>
-                      <a:r>
-                        <a:rPr lang="en-US" sz="950" dirty="0">
-                          <a:solidFill>
-                            <a:srgbClr val="37352F"/>
-                          </a:solidFill>
-                          <a:latin typeface="맑은 고딕" pitchFamily="34" charset="0"/>
-                          <a:ea typeface="맑은 고딕" pitchFamily="34" charset="-122"/>
-                          <a:cs typeface="맑은 고딕" pitchFamily="34" charset="-120"/>
-                        </a:rPr>
-                        <a:t>창의성 · 효과</a:t>
-                      </a:r>
-                      <a:endParaRPr lang="en-US" sz="950" dirty="0">
-                        <a:latin typeface="맑은 고딕" charset="0"/>
-                        <a:ea typeface="맑은 고딕" charset="0"/>
-                        <a:cs typeface="맑은 고딕" charset="0"/>
-                      </a:endParaRPr>
-                    </a:p>
-                  </a:txBody>
-                  <a:tcPr marL="76200" marR="76200" marT="25400" marB="25400" anchor="ctr">
-                    <a:lnL w="12700" cap="flat" cmpd="sng" algn="ctr">
-                      <a:solidFill>
-                        <a:srgbClr val="E9E9E7"/>
-                      </a:solidFill>
-                      <a:prstDash val="solid"/>
-                      <a:round/>
-                      <a:headEnd type="none" w="med" len="med"/>
-                      <a:tailEnd type="none" w="med" len="med"/>
-                    </a:lnL>
-                    <a:lnR w="12700" cap="flat" cmpd="sng" algn="ctr">
-                      <a:solidFill>
-                        <a:srgbClr val="E9E9E7"/>
-                      </a:solidFill>
-                      <a:prstDash val="solid"/>
-                      <a:round/>
-                      <a:headEnd type="none" w="med" len="med"/>
-                      <a:tailEnd type="none" w="med" len="med"/>
-                    </a:lnR>
-                    <a:lnT w="12700" cap="flat" cmpd="sng" algn="ctr">
-                      <a:solidFill>
-                        <a:srgbClr val="E9E9E7"/>
-                      </a:solidFill>
-                      <a:prstDash val="solid"/>
-                      <a:round/>
-                      <a:headEnd type="none" w="med" len="med"/>
-                      <a:tailEnd type="none" w="med" len="med"/>
-                    </a:lnT>
-                    <a:lnB w="12700" cap="flat" cmpd="sng" algn="ctr">
-                      <a:solidFill>
-                        <a:srgbClr val="E9E9E7"/>
-                      </a:solidFill>
-                      <a:prstDash val="solid"/>
-                      <a:round/>
-                      <a:headEnd type="none" w="med" len="med"/>
-                      <a:tailEnd type="none" w="med" len="med"/>
-                    </a:lnB>
-                    <a:solidFill>
-                      <a:srgbClr val="FFFFFF"/>
-                    </a:solidFill>
-                  </a:tcPr>
-                </a:tc>
-                <a:tc>
-                  <a:txBody>
-                    <a:bodyPr/>
-                    <a:lstStyle/>
-                    <a:p>
-                      <a:pPr indent="0" marL="0">
-                        <a:buNone/>
-                      </a:pPr>
-                      <a:r>
-                        <a:rPr lang="en-US" sz="950" dirty="0">
-                          <a:solidFill>
-                            <a:srgbClr val="37352F"/>
-                          </a:solidFill>
-                          <a:latin typeface="맑은 고딕" pitchFamily="34" charset="0"/>
-                          <a:ea typeface="맑은 고딕" pitchFamily="34" charset="-122"/>
-                          <a:cs typeface="맑은 고딕" pitchFamily="34" charset="-120"/>
-                        </a:rPr>
-                        <a:t>20</a:t>
-                      </a:r>
-                      <a:endParaRPr lang="en-US" sz="950" dirty="0">
-                        <a:latin typeface="맑은 고딕" charset="0"/>
-                        <a:ea typeface="맑은 고딕" charset="0"/>
-                        <a:cs typeface="맑은 고딕" charset="0"/>
-                      </a:endParaRPr>
-                    </a:p>
-                  </a:txBody>
-                  <a:tcPr marL="76200" marR="76200" marT="25400" marB="25400" anchor="ctr">
-                    <a:lnL w="12700" cap="flat" cmpd="sng" algn="ctr">
-                      <a:solidFill>
-                        <a:srgbClr val="E9E9E7"/>
-                      </a:solidFill>
-                      <a:prstDash val="solid"/>
-                      <a:round/>
-                      <a:headEnd type="none" w="med" len="med"/>
-                      <a:tailEnd type="none" w="med" len="med"/>
-                    </a:lnL>
-                    <a:lnR w="12700" cap="flat" cmpd="sng" algn="ctr">
-                      <a:solidFill>
-                        <a:srgbClr val="E9E9E7"/>
-                      </a:solidFill>
-                      <a:prstDash val="solid"/>
-                      <a:round/>
-                      <a:headEnd type="none" w="med" len="med"/>
-                      <a:tailEnd type="none" w="med" len="med"/>
-                    </a:lnR>
-                    <a:lnT w="12700" cap="flat" cmpd="sng" algn="ctr">
-                      <a:solidFill>
-                        <a:srgbClr val="E9E9E7"/>
-                      </a:solidFill>
-                      <a:prstDash val="solid"/>
-                      <a:round/>
-                      <a:headEnd type="none" w="med" len="med"/>
-                      <a:tailEnd type="none" w="med" len="med"/>
-                    </a:lnT>
-                    <a:lnB w="12700" cap="flat" cmpd="sng" algn="ctr">
-                      <a:solidFill>
-                        <a:srgbClr val="E9E9E7"/>
-                      </a:solidFill>
-                      <a:prstDash val="solid"/>
-                      <a:round/>
-                      <a:headEnd type="none" w="med" len="med"/>
-                      <a:tailEnd type="none" w="med" len="med"/>
-                    </a:lnB>
-                    <a:solidFill>
-                      <a:srgbClr val="FFFFFF"/>
-                    </a:solidFill>
-                  </a:tcPr>
-                </a:tc>
-              </a:tr>
-              <a:tr h="246888">
-                <a:tc>
-                  <a:txBody>
-                    <a:bodyPr/>
-                    <a:lstStyle/>
-                    <a:p>
-                      <a:pPr indent="0" marL="0">
-                        <a:buNone/>
-                      </a:pPr>
-                      <a:r>
-                        <a:rPr lang="en-US" sz="950" dirty="0">
-                          <a:solidFill>
-                            <a:srgbClr val="37352F"/>
-                          </a:solidFill>
-                          <a:latin typeface="맑은 고딕" pitchFamily="34" charset="0"/>
-                          <a:ea typeface="맑은 고딕" pitchFamily="34" charset="-122"/>
-                          <a:cs typeface="맑은 고딕" pitchFamily="34" charset="-120"/>
-                        </a:rPr>
-                        <a:t>10</a:t>
-                      </a:r>
-                      <a:endParaRPr lang="en-US" sz="950" dirty="0">
-                        <a:latin typeface="맑은 고딕" charset="0"/>
-                        <a:ea typeface="맑은 고딕" charset="0"/>
-                        <a:cs typeface="맑은 고딕" charset="0"/>
-                      </a:endParaRPr>
-                    </a:p>
-                  </a:txBody>
-                  <a:tcPr marL="76200" marR="76200" marT="25400" marB="25400" anchor="ctr">
-                    <a:lnL w="12700" cap="flat" cmpd="sng" algn="ctr">
-                      <a:solidFill>
-                        <a:srgbClr val="E9E9E7"/>
-                      </a:solidFill>
-                      <a:prstDash val="solid"/>
-                      <a:round/>
-                      <a:headEnd type="none" w="med" len="med"/>
-                      <a:tailEnd type="none" w="med" len="med"/>
-                    </a:lnL>
-                    <a:lnR w="12700" cap="flat" cmpd="sng" algn="ctr">
-                      <a:solidFill>
-                        <a:srgbClr val="E9E9E7"/>
-                      </a:solidFill>
-                      <a:prstDash val="solid"/>
-                      <a:round/>
-                      <a:headEnd type="none" w="med" len="med"/>
-                      <a:tailEnd type="none" w="med" len="med"/>
-                    </a:lnR>
-                    <a:lnT w="12700" cap="flat" cmpd="sng" algn="ctr">
-                      <a:solidFill>
-                        <a:srgbClr val="E9E9E7"/>
-                      </a:solidFill>
-                      <a:prstDash val="solid"/>
-                      <a:round/>
-                      <a:headEnd type="none" w="med" len="med"/>
-                      <a:tailEnd type="none" w="med" len="med"/>
-                    </a:lnT>
-                    <a:lnB w="12700" cap="flat" cmpd="sng" algn="ctr">
-                      <a:solidFill>
-                        <a:srgbClr val="E9E9E7"/>
-                      </a:solidFill>
-                      <a:prstDash val="solid"/>
-                      <a:round/>
-                      <a:headEnd type="none" w="med" len="med"/>
-                      <a:tailEnd type="none" w="med" len="med"/>
-                    </a:lnB>
-                    <a:solidFill>
-                      <a:srgbClr val="FFFFFF"/>
-                    </a:solidFill>
-                  </a:tcPr>
-                </a:tc>
-                <a:tc>
-                  <a:txBody>
-                    <a:bodyPr/>
-                    <a:lstStyle/>
-                    <a:p>
-                      <a:pPr indent="0" marL="0">
-                        <a:buNone/>
-                      </a:pPr>
-                      <a:r>
-                        <a:rPr lang="en-US" sz="950" dirty="0">
-                          <a:solidFill>
-                            <a:srgbClr val="37352F"/>
-                          </a:solidFill>
-                          <a:latin typeface="맑은 고딕" pitchFamily="34" charset="0"/>
-                          <a:ea typeface="맑은 고딕" pitchFamily="34" charset="-122"/>
-                          <a:cs typeface="맑은 고딕" pitchFamily="34" charset="-120"/>
-                        </a:rPr>
-                        <a:t>측정한 것과 모르는 것</a:t>
-                      </a:r>
-                      <a:endParaRPr lang="en-US" sz="950" dirty="0">
-                        <a:latin typeface="맑은 고딕" charset="0"/>
-                        <a:ea typeface="맑은 고딕" charset="0"/>
-                        <a:cs typeface="맑은 고딕" charset="0"/>
-                      </a:endParaRPr>
-                    </a:p>
-                  </a:txBody>
-                  <a:tcPr marL="76200" marR="76200" marT="25400" marB="25400" anchor="ctr">
-                    <a:lnL w="12700" cap="flat" cmpd="sng" algn="ctr">
-                      <a:solidFill>
-                        <a:srgbClr val="E9E9E7"/>
-                      </a:solidFill>
-                      <a:prstDash val="solid"/>
-                      <a:round/>
-                      <a:headEnd type="none" w="med" len="med"/>
-                      <a:tailEnd type="none" w="med" len="med"/>
-                    </a:lnL>
-                    <a:lnR w="12700" cap="flat" cmpd="sng" algn="ctr">
-                      <a:solidFill>
-                        <a:srgbClr val="E9E9E7"/>
-                      </a:solidFill>
-                      <a:prstDash val="solid"/>
-                      <a:round/>
-                      <a:headEnd type="none" w="med" len="med"/>
-                      <a:tailEnd type="none" w="med" len="med"/>
-                    </a:lnR>
-                    <a:lnT w="12700" cap="flat" cmpd="sng" algn="ctr">
-                      <a:solidFill>
-                        <a:srgbClr val="E9E9E7"/>
-                      </a:solidFill>
-                      <a:prstDash val="solid"/>
-                      <a:round/>
-                      <a:headEnd type="none" w="med" len="med"/>
-                      <a:tailEnd type="none" w="med" len="med"/>
-                    </a:lnT>
-                    <a:lnB w="12700" cap="flat" cmpd="sng" algn="ctr">
-                      <a:solidFill>
-                        <a:srgbClr val="E9E9E7"/>
-                      </a:solidFill>
-                      <a:prstDash val="solid"/>
-                      <a:round/>
-                      <a:headEnd type="none" w="med" len="med"/>
-                      <a:tailEnd type="none" w="med" len="med"/>
-                    </a:lnB>
-                    <a:solidFill>
-                      <a:srgbClr val="FFFFFF"/>
-                    </a:solidFill>
-                  </a:tcPr>
-                </a:tc>
-                <a:tc>
-                  <a:txBody>
-                    <a:bodyPr/>
-                    <a:lstStyle/>
-                    <a:p>
-                      <a:pPr indent="0" marL="0">
-                        <a:buNone/>
-                      </a:pPr>
-                      <a:r>
-                        <a:rPr lang="en-US" sz="950" dirty="0">
-                          <a:solidFill>
-                            <a:srgbClr val="37352F"/>
-                          </a:solidFill>
-                          <a:latin typeface="맑은 고딕" pitchFamily="34" charset="0"/>
-                          <a:ea typeface="맑은 고딕" pitchFamily="34" charset="-122"/>
-                          <a:cs typeface="맑은 고딕" pitchFamily="34" charset="-120"/>
-                        </a:rPr>
-                        <a:t>신뢰성</a:t>
-                      </a:r>
-                      <a:endParaRPr lang="en-US" sz="950" dirty="0">
-                        <a:latin typeface="맑은 고딕" charset="0"/>
-                        <a:ea typeface="맑은 고딕" charset="0"/>
-                        <a:cs typeface="맑은 고딕" charset="0"/>
-                      </a:endParaRPr>
-                    </a:p>
-                  </a:txBody>
-                  <a:tcPr marL="76200" marR="76200" marT="25400" marB="25400" anchor="ctr">
-                    <a:lnL w="12700" cap="flat" cmpd="sng" algn="ctr">
-                      <a:solidFill>
-                        <a:srgbClr val="E9E9E7"/>
-                      </a:solidFill>
-                      <a:prstDash val="solid"/>
-                      <a:round/>
-                      <a:headEnd type="none" w="med" len="med"/>
-                      <a:tailEnd type="none" w="med" len="med"/>
-                    </a:lnL>
-                    <a:lnR w="12700" cap="flat" cmpd="sng" algn="ctr">
-                      <a:solidFill>
-                        <a:srgbClr val="E9E9E7"/>
-                      </a:solidFill>
-                      <a:prstDash val="solid"/>
-                      <a:round/>
-                      <a:headEnd type="none" w="med" len="med"/>
-                      <a:tailEnd type="none" w="med" len="med"/>
-                    </a:lnR>
-                    <a:lnT w="12700" cap="flat" cmpd="sng" algn="ctr">
-                      <a:solidFill>
-                        <a:srgbClr val="E9E9E7"/>
-                      </a:solidFill>
-                      <a:prstDash val="solid"/>
-                      <a:round/>
-                      <a:headEnd type="none" w="med" len="med"/>
-                      <a:tailEnd type="none" w="med" len="med"/>
-                    </a:lnT>
-                    <a:lnB w="12700" cap="flat" cmpd="sng" algn="ctr">
-                      <a:solidFill>
-                        <a:srgbClr val="E9E9E7"/>
-                      </a:solidFill>
-                      <a:prstDash val="solid"/>
-                      <a:round/>
-                      <a:headEnd type="none" w="med" len="med"/>
-                      <a:tailEnd type="none" w="med" len="med"/>
-                    </a:lnB>
-                    <a:solidFill>
-                      <a:srgbClr val="FFFFFF"/>
-                    </a:solidFill>
-                  </a:tcPr>
-                </a:tc>
-                <a:tc>
-                  <a:txBody>
-                    <a:bodyPr/>
-                    <a:lstStyle/>
-                    <a:p>
-                      <a:pPr indent="0" marL="0">
-                        <a:buNone/>
-                      </a:pPr>
-                      <a:r>
-                        <a:rPr lang="en-US" sz="950" dirty="0">
-                          <a:solidFill>
-                            <a:srgbClr val="37352F"/>
-                          </a:solidFill>
-                          <a:latin typeface="맑은 고딕" pitchFamily="34" charset="0"/>
-                          <a:ea typeface="맑은 고딕" pitchFamily="34" charset="-122"/>
-                          <a:cs typeface="맑은 고딕" pitchFamily="34" charset="-120"/>
-                        </a:rPr>
-                        <a:t>—</a:t>
-                      </a:r>
-                      <a:endParaRPr lang="en-US" sz="950" dirty="0">
-                        <a:latin typeface="맑은 고딕" charset="0"/>
-                        <a:ea typeface="맑은 고딕" charset="0"/>
-                        <a:cs typeface="맑은 고딕" charset="0"/>
-                      </a:endParaRPr>
-                    </a:p>
-                  </a:txBody>
-                  <a:tcPr marL="76200" marR="76200" marT="25400" marB="25400" anchor="ctr">
-                    <a:lnL w="12700" cap="flat" cmpd="sng" algn="ctr">
-                      <a:solidFill>
-                        <a:srgbClr val="E9E9E7"/>
-                      </a:solidFill>
-                      <a:prstDash val="solid"/>
-                      <a:round/>
-                      <a:headEnd type="none" w="med" len="med"/>
-                      <a:tailEnd type="none" w="med" len="med"/>
-                    </a:lnL>
-                    <a:lnR w="12700" cap="flat" cmpd="sng" algn="ctr">
-                      <a:solidFill>
-                        <a:srgbClr val="E9E9E7"/>
-                      </a:solidFill>
-                      <a:prstDash val="solid"/>
-                      <a:round/>
-                      <a:headEnd type="none" w="med" len="med"/>
-                      <a:tailEnd type="none" w="med" len="med"/>
-                    </a:lnR>
-                    <a:lnT w="12700" cap="flat" cmpd="sng" algn="ctr">
-                      <a:solidFill>
-                        <a:srgbClr val="E9E9E7"/>
-                      </a:solidFill>
-                      <a:prstDash val="solid"/>
-                      <a:round/>
-                      <a:headEnd type="none" w="med" len="med"/>
-                      <a:tailEnd type="none" w="med" len="med"/>
-                    </a:lnT>
-                    <a:lnB w="12700" cap="flat" cmpd="sng" algn="ctr">
-                      <a:solidFill>
-                        <a:srgbClr val="E9E9E7"/>
-                      </a:solidFill>
-                      <a:prstDash val="solid"/>
-                      <a:round/>
-                      <a:headEnd type="none" w="med" len="med"/>
-                      <a:tailEnd type="none" w="med" len="med"/>
-                    </a:lnB>
-                    <a:solidFill>
-                      <a:srgbClr val="FFFFFF"/>
-                    </a:solidFill>
-                  </a:tcPr>
-                </a:tc>
-              </a:tr>
-              <a:tr h="246888">
-                <a:tc>
-                  <a:txBody>
-                    <a:bodyPr/>
-                    <a:lstStyle/>
-                    <a:p>
-                      <a:pPr indent="0" marL="0">
-                        <a:buNone/>
-                      </a:pPr>
-                      <a:r>
-                        <a:rPr lang="en-US" sz="950" dirty="0">
-                          <a:solidFill>
-                            <a:srgbClr val="37352F"/>
-                          </a:solidFill>
-                          <a:latin typeface="맑은 고딕" pitchFamily="34" charset="0"/>
-                          <a:ea typeface="맑은 고딕" pitchFamily="34" charset="-122"/>
-                          <a:cs typeface="맑은 고딕" pitchFamily="34" charset="-120"/>
-                        </a:rPr>
-                        <a:t>11</a:t>
-                      </a:r>
-                      <a:endParaRPr lang="en-US" sz="950" dirty="0">
-                        <a:latin typeface="맑은 고딕" charset="0"/>
-                        <a:ea typeface="맑은 고딕" charset="0"/>
-                        <a:cs typeface="맑은 고딕" charset="0"/>
-                      </a:endParaRPr>
-                    </a:p>
-                  </a:txBody>
-                  <a:tcPr marL="76200" marR="76200" marT="25400" marB="25400" anchor="ctr">
-                    <a:lnL w="12700" cap="flat" cmpd="sng" algn="ctr">
-                      <a:solidFill>
-                        <a:srgbClr val="E9E9E7"/>
-                      </a:solidFill>
-                      <a:prstDash val="solid"/>
-                      <a:round/>
-                      <a:headEnd type="none" w="med" len="med"/>
-                      <a:tailEnd type="none" w="med" len="med"/>
-                    </a:lnL>
-                    <a:lnR w="12700" cap="flat" cmpd="sng" algn="ctr">
-                      <a:solidFill>
-                        <a:srgbClr val="E9E9E7"/>
-                      </a:solidFill>
-                      <a:prstDash val="solid"/>
-                      <a:round/>
-                      <a:headEnd type="none" w="med" len="med"/>
-                      <a:tailEnd type="none" w="med" len="med"/>
-                    </a:lnR>
-                    <a:lnT w="12700" cap="flat" cmpd="sng" algn="ctr">
-                      <a:solidFill>
-                        <a:srgbClr val="E9E9E7"/>
-                      </a:solidFill>
-                      <a:prstDash val="solid"/>
-                      <a:round/>
-                      <a:headEnd type="none" w="med" len="med"/>
-                      <a:tailEnd type="none" w="med" len="med"/>
-                    </a:lnT>
-                    <a:lnB w="12700" cap="flat" cmpd="sng" algn="ctr">
-                      <a:solidFill>
-                        <a:srgbClr val="E9E9E7"/>
-                      </a:solidFill>
-                      <a:prstDash val="solid"/>
-                      <a:round/>
-                      <a:headEnd type="none" w="med" len="med"/>
-                      <a:tailEnd type="none" w="med" len="med"/>
-                    </a:lnB>
-                    <a:solidFill>
-                      <a:srgbClr val="FFFFFF"/>
-                    </a:solidFill>
-                  </a:tcPr>
-                </a:tc>
-                <a:tc>
-                  <a:txBody>
-                    <a:bodyPr/>
-                    <a:lstStyle/>
-                    <a:p>
-                      <a:pPr indent="0" marL="0">
-                        <a:buNone/>
-                      </a:pPr>
-                      <a:r>
-                        <a:rPr lang="en-US" sz="950" dirty="0">
-                          <a:solidFill>
-                            <a:srgbClr val="37352F"/>
-                          </a:solidFill>
-                          <a:latin typeface="맑은 고딕" pitchFamily="34" charset="0"/>
-                          <a:ea typeface="맑은 고딕" pitchFamily="34" charset="-122"/>
-                          <a:cs typeface="맑은 고딕" pitchFamily="34" charset="-120"/>
-                        </a:rPr>
-                        <a:t>개발 계획과 실현 가능성 — 단계 · 산출물 · 완료 판정 기준</a:t>
-                      </a:r>
-                      <a:endParaRPr lang="en-US" sz="950" dirty="0">
-                        <a:latin typeface="맑은 고딕" charset="0"/>
-                        <a:ea typeface="맑은 고딕" charset="0"/>
-                        <a:cs typeface="맑은 고딕" charset="0"/>
-                      </a:endParaRPr>
-                    </a:p>
-                  </a:txBody>
-                  <a:tcPr marL="76200" marR="76200" marT="25400" marB="25400" anchor="ctr">
-                    <a:lnL w="12700" cap="flat" cmpd="sng" algn="ctr">
-                      <a:solidFill>
-                        <a:srgbClr val="E9E9E7"/>
-                      </a:solidFill>
-                      <a:prstDash val="solid"/>
-                      <a:round/>
-                      <a:headEnd type="none" w="med" len="med"/>
-                      <a:tailEnd type="none" w="med" len="med"/>
-                    </a:lnL>
-                    <a:lnR w="12700" cap="flat" cmpd="sng" algn="ctr">
-                      <a:solidFill>
-                        <a:srgbClr val="E9E9E7"/>
-                      </a:solidFill>
-                      <a:prstDash val="solid"/>
-                      <a:round/>
-                      <a:headEnd type="none" w="med" len="med"/>
-                      <a:tailEnd type="none" w="med" len="med"/>
-                    </a:lnR>
-                    <a:lnT w="12700" cap="flat" cmpd="sng" algn="ctr">
-                      <a:solidFill>
-                        <a:srgbClr val="E9E9E7"/>
-                      </a:solidFill>
-                      <a:prstDash val="solid"/>
-                      <a:round/>
-                      <a:headEnd type="none" w="med" len="med"/>
-                      <a:tailEnd type="none" w="med" len="med"/>
-                    </a:lnT>
-                    <a:lnB w="12700" cap="flat" cmpd="sng" algn="ctr">
-                      <a:solidFill>
-                        <a:srgbClr val="E9E9E7"/>
-                      </a:solidFill>
-                      <a:prstDash val="solid"/>
-                      <a:round/>
-                      <a:headEnd type="none" w="med" len="med"/>
-                      <a:tailEnd type="none" w="med" len="med"/>
-                    </a:lnB>
-                    <a:solidFill>
-                      <a:srgbClr val="FFFFFF"/>
-                    </a:solidFill>
-                  </a:tcPr>
-                </a:tc>
-                <a:tc>
-                  <a:txBody>
-                    <a:bodyPr/>
-                    <a:lstStyle/>
-                    <a:p>
-                      <a:pPr indent="0" marL="0">
-                        <a:buNone/>
-                      </a:pPr>
-                      <a:r>
-                        <a:rPr lang="en-US" sz="950" dirty="0">
-                          <a:solidFill>
-                            <a:srgbClr val="37352F"/>
-                          </a:solidFill>
-                          <a:latin typeface="맑은 고딕" pitchFamily="34" charset="0"/>
-                          <a:ea typeface="맑은 고딕" pitchFamily="34" charset="-122"/>
-                          <a:cs typeface="맑은 고딕" pitchFamily="34" charset="-120"/>
-                        </a:rPr>
-                        <a:t>개발계획 · 실현 가능성</a:t>
-                      </a:r>
-                      <a:endParaRPr lang="en-US" sz="950" dirty="0">
-                        <a:latin typeface="맑은 고딕" charset="0"/>
-                        <a:ea typeface="맑은 고딕" charset="0"/>
-                        <a:cs typeface="맑은 고딕" charset="0"/>
-                      </a:endParaRPr>
-                    </a:p>
-                  </a:txBody>
-                  <a:tcPr marL="76200" marR="76200" marT="25400" marB="25400" anchor="ctr">
-                    <a:lnL w="12700" cap="flat" cmpd="sng" algn="ctr">
-                      <a:solidFill>
-                        <a:srgbClr val="E9E9E7"/>
-                      </a:solidFill>
-                      <a:prstDash val="solid"/>
-                      <a:round/>
-                      <a:headEnd type="none" w="med" len="med"/>
-                      <a:tailEnd type="none" w="med" len="med"/>
-                    </a:lnL>
-                    <a:lnR w="12700" cap="flat" cmpd="sng" algn="ctr">
-                      <a:solidFill>
-                        <a:srgbClr val="E9E9E7"/>
-                      </a:solidFill>
-                      <a:prstDash val="solid"/>
-                      <a:round/>
-                      <a:headEnd type="none" w="med" len="med"/>
-                      <a:tailEnd type="none" w="med" len="med"/>
-                    </a:lnR>
-                    <a:lnT w="12700" cap="flat" cmpd="sng" algn="ctr">
-                      <a:solidFill>
-                        <a:srgbClr val="E9E9E7"/>
-                      </a:solidFill>
-                      <a:prstDash val="solid"/>
-                      <a:round/>
-                      <a:headEnd type="none" w="med" len="med"/>
-                      <a:tailEnd type="none" w="med" len="med"/>
-                    </a:lnT>
-                    <a:lnB w="12700" cap="flat" cmpd="sng" algn="ctr">
-                      <a:solidFill>
-                        <a:srgbClr val="E9E9E7"/>
-                      </a:solidFill>
-                      <a:prstDash val="solid"/>
-                      <a:round/>
-                      <a:headEnd type="none" w="med" len="med"/>
-                      <a:tailEnd type="none" w="med" len="med"/>
-                    </a:lnB>
-                    <a:solidFill>
-                      <a:srgbClr val="FFFFFF"/>
-                    </a:solidFill>
-                  </a:tcPr>
-                </a:tc>
-                <a:tc>
-                  <a:txBody>
-                    <a:bodyPr/>
-                    <a:lstStyle/>
-                    <a:p>
-                      <a:pPr indent="0" marL="0">
-                        <a:buNone/>
-                      </a:pPr>
-                      <a:r>
-                        <a:rPr lang="en-US" sz="950" dirty="0">
-                          <a:solidFill>
-                            <a:srgbClr val="37352F"/>
-                          </a:solidFill>
-                          <a:latin typeface="맑은 고딕" pitchFamily="34" charset="0"/>
-                          <a:ea typeface="맑은 고딕" pitchFamily="34" charset="-122"/>
-                          <a:cs typeface="맑은 고딕" pitchFamily="34" charset="-120"/>
-                        </a:rPr>
-                        <a:t>30</a:t>
-                      </a:r>
-                      <a:endParaRPr lang="en-US" sz="950" dirty="0">
-                        <a:latin typeface="맑은 고딕" charset="0"/>
-                        <a:ea typeface="맑은 고딕" charset="0"/>
-                        <a:cs typeface="맑은 고딕" charset="0"/>
-                      </a:endParaRPr>
-                    </a:p>
-                  </a:txBody>
-                  <a:tcPr marL="76200" marR="76200" marT="25400" marB="25400" anchor="ctr">
-                    <a:lnL w="12700" cap="flat" cmpd="sng" algn="ctr">
-                      <a:solidFill>
-                        <a:srgbClr val="E9E9E7"/>
-                      </a:solidFill>
-                      <a:prstDash val="solid"/>
-                      <a:round/>
-                      <a:headEnd type="none" w="med" len="med"/>
-                      <a:tailEnd type="none" w="med" len="med"/>
-                    </a:lnL>
-                    <a:lnR w="12700" cap="flat" cmpd="sng" algn="ctr">
-                      <a:solidFill>
-                        <a:srgbClr val="E9E9E7"/>
-                      </a:solidFill>
-                      <a:prstDash val="solid"/>
-                      <a:round/>
-                      <a:headEnd type="none" w="med" len="med"/>
-                      <a:tailEnd type="none" w="med" len="med"/>
-                    </a:lnR>
-                    <a:lnT w="12700" cap="flat" cmpd="sng" algn="ctr">
-                      <a:solidFill>
-                        <a:srgbClr val="E9E9E7"/>
-                      </a:solidFill>
-                      <a:prstDash val="solid"/>
-                      <a:round/>
-                      <a:headEnd type="none" w="med" len="med"/>
-                      <a:tailEnd type="none" w="med" len="med"/>
-                    </a:lnT>
-                    <a:lnB w="12700" cap="flat" cmpd="sng" algn="ctr">
-                      <a:solidFill>
-                        <a:srgbClr val="E9E9E7"/>
-                      </a:solidFill>
-                      <a:prstDash val="solid"/>
-                      <a:round/>
-                      <a:headEnd type="none" w="med" len="med"/>
-                      <a:tailEnd type="none" w="med" len="med"/>
-                    </a:lnB>
-                    <a:solidFill>
-                      <a:srgbClr val="FFFFFF"/>
-                    </a:solidFill>
-                  </a:tcPr>
-                </a:tc>
-              </a:tr>
-            </a:tbl>
-          </a:graphicData>
-        </a:graphic>
-      </p:graphicFrame>
-      <p:sp>
-        <p:nvSpPr>
-          <p:cNvPr id="9" name="Text 6"/>
-          <p:cNvSpPr/>
-          <p:nvPr/>
-        </p:nvSpPr>
-        <p:spPr>
-          <a:xfrm>
-            <a:off x="658368" y="6419088"/>
-            <a:ext cx="10872216" cy="237744"/>
-          </a:xfrm>
-          <a:prstGeom prst="rect">
-            <a:avLst/>
-          </a:prstGeom>
-          <a:noFill/>
-          <a:ln/>
-        </p:spPr>
-        <p:txBody>
-          <a:bodyPr wrap="square" lIns="0" tIns="0" rIns="0" bIns="0" rtlCol="0" anchor="ctr"/>
-          <a:lstStyle/>
-          <a:p>
             <a:pPr indent="0" marL="0">
               <a:buNone/>
             </a:pPr>
             <a:r>
-              <a:rPr lang="en-US" sz="900" dirty="0">
+              <a:rPr lang="en-US" sz="1500" b="1" dirty="0">
                 <a:solidFill>
-                  <a:srgbClr val="6B6A66"/>
+                  <a:srgbClr val="B45309"/>
                 </a:solidFill>
                 <a:latin typeface="맑은 고딕" pitchFamily="34" charset="0"/>
                 <a:ea typeface="맑은 고딕" pitchFamily="34" charset="-122"/>
                 <a:cs typeface="맑은 고딕" pitchFamily="34" charset="-120"/>
               </a:rPr>
-              <a:t>2026-08-02 · 저장소 HEAD 9a4167b 기준 · 본 문서의 모든 수치는 저장소 실측 문서에서 인용했으며 이 문서에서 새로 만들지 않았다.</a:t>
+              <a:t>“변경은 양측 서면 합의로”</a:t>
             </a:r>
-            <a:endParaRPr lang="en-US" sz="900" dirty="0"/>
+            <a:pPr indent="0" marL="0">
+              <a:buNone/>
+            </a:pPr>
+            <a:r>
+              <a:rPr lang="en-US" sz="1500" dirty="0">
+                <a:solidFill>
+                  <a:srgbClr val="37352F"/>
+                </a:solidFill>
+                <a:latin typeface="맑은 고딕" pitchFamily="34" charset="0"/>
+                <a:ea typeface="맑은 고딕" pitchFamily="34" charset="-122"/>
+                <a:cs typeface="맑은 고딕" pitchFamily="34" charset="-120"/>
+              </a:rPr>
+              <a:t> 는 사후에 바꿀 수 없다 (보관 원본 기준).</a:t>
+            </a:r>
+            <a:endParaRPr lang="en-US" sz="1500" dirty="0"/>
           </a:p>
         </p:txBody>
       </p:sp>
@@ -5235,47 +2048,8 @@
         </p:nvSpPr>
         <p:spPr>
           <a:xfrm>
-            <a:off x="658368" y="329184"/>
-            <a:ext cx="10872216" cy="256032"/>
-          </a:xfrm>
-          <a:prstGeom prst="rect">
-            <a:avLst/>
-          </a:prstGeom>
-          <a:noFill/>
-          <a:ln/>
-        </p:spPr>
-        <p:txBody>
-          <a:bodyPr wrap="square" lIns="0" tIns="0" rIns="0" bIns="0" rtlCol="0" anchor="ctr"/>
-          <a:lstStyle/>
-          <a:p>
-            <a:pPr indent="0" marL="0">
-              <a:buNone/>
-            </a:pPr>
-            <a:r>
-              <a:rPr lang="en-US" sz="1000" b="1" spc="140" kern="0" dirty="0">
-                <a:solidFill>
-                  <a:srgbClr val="6B6A66"/>
-                </a:solidFill>
-                <a:latin typeface="맑은 고딕" pitchFamily="34" charset="0"/>
-                <a:ea typeface="맑은 고딕" pitchFamily="34" charset="-122"/>
-                <a:cs typeface="맑은 고딕" pitchFamily="34" charset="-120"/>
-              </a:rPr>
-              <a:t>신뢰성</a:t>
-            </a:r>
-            <a:endParaRPr lang="en-US" sz="1000" dirty="0"/>
-          </a:p>
-        </p:txBody>
-      </p:sp>
-      <p:sp>
-        <p:nvSpPr>
-          <p:cNvPr id="4" name="Text 2"/>
-          <p:cNvSpPr/>
-          <p:nvPr/>
-        </p:nvSpPr>
-        <p:spPr>
-          <a:xfrm>
-            <a:off x="658368" y="603504"/>
-            <a:ext cx="10872216" cy="530352"/>
+            <a:off x="658368" y="457200"/>
+            <a:ext cx="10872216" cy="548640"/>
           </a:xfrm>
           <a:prstGeom prst="rect">
             <a:avLst/>
@@ -5307,13 +2081,13 @@
       </p:sp>
       <p:sp>
         <p:nvSpPr>
-          <p:cNvPr id="5" name="Shape 3"/>
+          <p:cNvPr id="4" name="Shape 2"/>
           <p:cNvSpPr/>
           <p:nvPr/>
         </p:nvSpPr>
         <p:spPr>
           <a:xfrm>
-            <a:off x="658368" y="1188720"/>
+            <a:off x="658368" y="1078992"/>
             <a:ext cx="10872216" cy="10973"/>
           </a:xfrm>
           <a:prstGeom prst="rect">
@@ -5327,7 +2101,7 @@
       </p:sp>
       <p:sp>
         <p:nvSpPr>
-          <p:cNvPr id="6" name="Text 4"/>
+          <p:cNvPr id="5" name="Text 3"/>
           <p:cNvSpPr/>
           <p:nvPr/>
         </p:nvSpPr>
@@ -5366,7 +2140,7 @@
       </p:sp>
       <p:sp>
         <p:nvSpPr>
-          <p:cNvPr id="7" name="Shape 5"/>
+          <p:cNvPr id="6" name="Shape 4"/>
           <p:cNvSpPr/>
           <p:nvPr/>
         </p:nvSpPr>
@@ -5388,7 +2162,7 @@
       </p:sp>
       <p:sp>
         <p:nvSpPr>
-          <p:cNvPr id="8" name="Shape 6"/>
+          <p:cNvPr id="7" name="Shape 5"/>
           <p:cNvSpPr/>
           <p:nvPr/>
         </p:nvSpPr>
@@ -5408,7 +2182,7 @@
       </p:sp>
       <p:sp>
         <p:nvSpPr>
-          <p:cNvPr id="9" name="Text 7"/>
+          <p:cNvPr id="8" name="Text 6"/>
           <p:cNvSpPr/>
           <p:nvPr/>
         </p:nvSpPr>
@@ -5569,7 +2343,7 @@
                 <a:ea typeface="맑은 고딕" pitchFamily="34" charset="-122"/>
                 <a:cs typeface="맑은 고딕" pitchFamily="34" charset="-120"/>
               </a:rPr>
-              <a:t>테스트 122건 · 외부 API 없이 1초 미만</a:t>
+              <a:t>테스트 128건 · 외부 API 없이 1초 미만</a:t>
             </a:r>
             <a:endParaRPr lang="en-US" sz="1050" dirty="0"/>
           </a:p>
@@ -5577,7 +2351,7 @@
       </p:sp>
       <p:sp>
         <p:nvSpPr>
-          <p:cNvPr id="10" name="Text 8"/>
+          <p:cNvPr id="9" name="Text 7"/>
           <p:cNvSpPr/>
           <p:nvPr/>
         </p:nvSpPr>
@@ -5616,7 +2390,7 @@
       </p:sp>
       <p:sp>
         <p:nvSpPr>
-          <p:cNvPr id="11" name="Shape 9"/>
+          <p:cNvPr id="10" name="Shape 8"/>
           <p:cNvSpPr/>
           <p:nvPr/>
         </p:nvSpPr>
@@ -5638,7 +2412,7 @@
       </p:sp>
       <p:sp>
         <p:nvSpPr>
-          <p:cNvPr id="12" name="Shape 10"/>
+          <p:cNvPr id="11" name="Shape 9"/>
           <p:cNvSpPr/>
           <p:nvPr/>
         </p:nvSpPr>
@@ -5658,7 +2432,7 @@
       </p:sp>
       <p:sp>
         <p:nvSpPr>
-          <p:cNvPr id="13" name="Text 11"/>
+          <p:cNvPr id="12" name="Text 10"/>
           <p:cNvSpPr/>
           <p:nvPr/>
         </p:nvSpPr>
@@ -5693,7 +2467,7 @@
                 <a:ea typeface="맑은 고딕" pitchFamily="34" charset="-122"/>
                 <a:cs typeface="맑은 고딕" pitchFamily="34" charset="-120"/>
               </a:rPr>
-              <a:t>실제 사기 탐지 성능 — 자체 설계 시나리오다</a:t>
+              <a:t>실제 사기 탐지 성능 — 자체 설계 시나리오다 (종단 판정의 독립 정답 라벨 0건)</a:t>
             </a:r>
             <a:endParaRPr lang="en-US" sz="1050" dirty="0"/>
           </a:p>
@@ -5827,7 +2601,7 @@
       </p:sp>
       <p:sp>
         <p:nvSpPr>
-          <p:cNvPr id="14" name="Shape 12"/>
+          <p:cNvPr id="13" name="Shape 11"/>
           <p:cNvSpPr/>
           <p:nvPr/>
         </p:nvSpPr>
@@ -5849,7 +2623,7 @@
       </p:sp>
       <p:sp>
         <p:nvSpPr>
-          <p:cNvPr id="15" name="Text 13"/>
+          <p:cNvPr id="14" name="Text 12"/>
           <p:cNvSpPr/>
           <p:nvPr/>
         </p:nvSpPr>
@@ -5908,7 +2682,7 @@
       </p:sp>
       <p:sp>
         <p:nvSpPr>
-          <p:cNvPr id="16" name="Shape 14"/>
+          <p:cNvPr id="15" name="Shape 13"/>
           <p:cNvSpPr/>
           <p:nvPr/>
         </p:nvSpPr>
@@ -5930,7 +2704,7 @@
       </p:sp>
       <p:sp>
         <p:nvSpPr>
-          <p:cNvPr id="17" name="Text 15"/>
+          <p:cNvPr id="16" name="Text 14"/>
           <p:cNvSpPr/>
           <p:nvPr/>
         </p:nvSpPr>
@@ -5978,45 +2752,6 @@
               <a:t>gold set 라벨 8건을 사후 정정했다. 모델의 불일치를 모델의 오류로 단정했으면 틀린 숫자가 그대로 제출됐을 것이다.</a:t>
             </a:r>
             <a:endParaRPr lang="en-US" sz="1000" dirty="0"/>
-          </a:p>
-        </p:txBody>
-      </p:sp>
-      <p:sp>
-        <p:nvSpPr>
-          <p:cNvPr id="18" name="Text 16"/>
-          <p:cNvSpPr/>
-          <p:nvPr/>
-        </p:nvSpPr>
-        <p:spPr>
-          <a:xfrm>
-            <a:off x="658368" y="6382512"/>
-            <a:ext cx="9774936" cy="237744"/>
-          </a:xfrm>
-          <a:prstGeom prst="rect">
-            <a:avLst/>
-          </a:prstGeom>
-          <a:noFill/>
-          <a:ln/>
-        </p:spPr>
-        <p:txBody>
-          <a:bodyPr wrap="square" lIns="0" tIns="0" rIns="0" bIns="0" rtlCol="0" anchor="ctr"/>
-          <a:lstStyle/>
-          <a:p>
-            <a:pPr indent="0" marL="0">
-              <a:buNone/>
-            </a:pPr>
-            <a:r>
-              <a:rPr lang="en-US" sz="850" dirty="0">
-                <a:solidFill>
-                  <a:srgbClr val="6B6A66"/>
-                </a:solidFill>
-                <a:latin typeface="맑은 고딕" pitchFamily="34" charset="0"/>
-                <a:ea typeface="맑은 고딕" pitchFamily="34" charset="-122"/>
-                <a:cs typeface="맑은 고딕" pitchFamily="34" charset="-120"/>
-              </a:rPr>
-              <a:t>출처 — docs/03_R7_측정.md §3-bis·§4 · docs/05 §1 · docs/06 §5 · docs/07_국문실물_확보시도.md</a:t>
-            </a:r>
-            <a:endParaRPr lang="en-US" sz="850" dirty="0"/>
           </a:p>
         </p:txBody>
       </p:sp>
@@ -6099,47 +2834,8 @@
         </p:nvSpPr>
         <p:spPr>
           <a:xfrm>
-            <a:off x="658368" y="329184"/>
-            <a:ext cx="10872216" cy="256032"/>
-          </a:xfrm>
-          <a:prstGeom prst="rect">
-            <a:avLst/>
-          </a:prstGeom>
-          <a:noFill/>
-          <a:ln/>
-        </p:spPr>
-        <p:txBody>
-          <a:bodyPr wrap="square" lIns="0" tIns="0" rIns="0" bIns="0" rtlCol="0" anchor="ctr"/>
-          <a:lstStyle/>
-          <a:p>
-            <a:pPr indent="0" marL="0">
-              <a:buNone/>
-            </a:pPr>
-            <a:r>
-              <a:rPr lang="en-US" sz="1000" b="1" spc="140" kern="0" dirty="0">
-                <a:solidFill>
-                  <a:srgbClr val="6B6A66"/>
-                </a:solidFill>
-                <a:latin typeface="맑은 고딕" pitchFamily="34" charset="0"/>
-                <a:ea typeface="맑은 고딕" pitchFamily="34" charset="-122"/>
-                <a:cs typeface="맑은 고딕" pitchFamily="34" charset="-120"/>
-              </a:rPr>
-              <a:t>개발 계획의 구체성 · 기술 실현 가능성</a:t>
-            </a:r>
-            <a:endParaRPr lang="en-US" sz="1000" dirty="0"/>
-          </a:p>
-        </p:txBody>
-      </p:sp>
-      <p:sp>
-        <p:nvSpPr>
-          <p:cNvPr id="4" name="Text 2"/>
-          <p:cNvSpPr/>
-          <p:nvPr/>
-        </p:nvSpPr>
-        <p:spPr>
-          <a:xfrm>
-            <a:off x="658368" y="603504"/>
-            <a:ext cx="10872216" cy="530352"/>
+            <a:off x="658368" y="457200"/>
+            <a:ext cx="10872216" cy="548640"/>
           </a:xfrm>
           <a:prstGeom prst="rect">
             <a:avLst/>
@@ -6171,13 +2867,13 @@
       </p:sp>
       <p:sp>
         <p:nvSpPr>
-          <p:cNvPr id="5" name="Shape 3"/>
+          <p:cNvPr id="4" name="Shape 2"/>
           <p:cNvSpPr/>
           <p:nvPr/>
         </p:nvSpPr>
         <p:spPr>
           <a:xfrm>
-            <a:off x="658368" y="1188720"/>
+            <a:off x="658368" y="1078992"/>
             <a:ext cx="10872216" cy="10973"/>
           </a:xfrm>
           <a:prstGeom prst="rect">
@@ -6191,7 +2887,7 @@
       </p:sp>
       <p:sp>
         <p:nvSpPr>
-          <p:cNvPr id="6" name="Text 4"/>
+          <p:cNvPr id="5" name="Text 3"/>
           <p:cNvSpPr/>
           <p:nvPr/>
         </p:nvSpPr>
@@ -6230,7 +2926,7 @@
       </p:sp>
       <p:sp>
         <p:nvSpPr>
-          <p:cNvPr id="7" name="Text 5"/>
+          <p:cNvPr id="6" name="Text 4"/>
           <p:cNvSpPr/>
           <p:nvPr/>
         </p:nvSpPr>
@@ -6261,7 +2957,7 @@
                 <a:ea typeface="맑은 고딕" pitchFamily="34" charset="-122"/>
                 <a:cs typeface="맑은 고딕" pitchFamily="34" charset="-120"/>
               </a:rPr>
-              <a:t>표 13. 단계별 계획 — 1단계 완료(8/2) · 2~5단계 본선일(9/2)까지</a:t>
+              <a:t>본선까지의 단계별 계획</a:t>
             </a:r>
             <a:endParaRPr lang="en-US" sz="950" dirty="0"/>
           </a:p>
@@ -6518,7 +3214,7 @@
                           <a:ea typeface="맑은 고딕" pitchFamily="34" charset="-122"/>
                           <a:cs typeface="맑은 고딕" pitchFamily="34" charset="-120"/>
                         </a:rPr>
-                        <a:t>1 ✅ HITL 보류 게이트</a:t>
+                        <a:t>1  HITL 보류 게이트</a:t>
                       </a:r>
                       <a:endParaRPr lang="en-US" sz="850" dirty="0">
                         <a:latin typeface="맑은 고딕" charset="0"/>
@@ -6539,7 +3235,7 @@
                           <a:ea typeface="맑은 고딕" pitchFamily="34" charset="-122"/>
                           <a:cs typeface="맑은 고딕" pitchFamily="34" charset="-120"/>
                         </a:rPr>
-                        <a:t>    + 승인 원장  — 완료</a:t>
+                        <a:t>    + 승인 원장</a:t>
                       </a:r>
                       <a:endParaRPr lang="en-US" sz="850" dirty="0">
                         <a:latin typeface="맑은 고딕" charset="0"/>
@@ -6675,7 +3371,7 @@
                           <a:ea typeface="맑은 고딕" pitchFamily="34" charset="-122"/>
                           <a:cs typeface="맑은 고딕" pitchFamily="34" charset="-120"/>
                         </a:rPr>
-                        <a:t>승인 없이 통과·재사용·전용·계좌 바꿔치기·TTL 경과가 전부 차단된다 → 2026-08-02 구현, 공격 테스트 T1~T5·T10·T11 통과</a:t>
+                        <a:t>승인 없이 게이트를 통과하거나 승인을 재사용·전용하는 시나리오가 전부 차단된다</a:t>
                       </a:r>
                       <a:endParaRPr lang="en-US" sz="850" dirty="0">
                         <a:latin typeface="맑은 고딕" charset="0"/>
@@ -7405,7 +4101,7 @@
                           <a:ea typeface="맑은 고딕" pitchFamily="34" charset="-122"/>
                           <a:cs typeface="맑은 고딕" pitchFamily="34" charset="-120"/>
                         </a:rPr>
-                        <a:t>    + 시나리오 보강</a:t>
+                        <a:t>    + 감사 원장</a:t>
                       </a:r>
                       <a:endParaRPr lang="en-US" sz="850" dirty="0">
                         <a:latin typeface="맑은 고딕" charset="0"/>
@@ -7473,7 +4169,7 @@
                           <a:ea typeface="맑은 고딕" pitchFamily="34" charset="-122"/>
                           <a:cs typeface="맑은 고딕" pitchFamily="34" charset="-120"/>
                         </a:rPr>
-                        <a:t>attack_terms_switch 등 시나리오 추가</a:t>
+                        <a:t>시나리오 추가 · 감사 로그</a:t>
                       </a:r>
                       <a:endParaRPr lang="en-US" sz="850" dirty="0">
                         <a:latin typeface="맑은 고딕" charset="0"/>
@@ -7599,7 +4295,7 @@
       </p:graphicFrame>
       <p:sp>
         <p:nvSpPr>
-          <p:cNvPr id="9" name="Text 6"/>
+          <p:cNvPr id="8" name="Text 5"/>
           <p:cNvSpPr/>
           <p:nvPr/>
         </p:nvSpPr>
@@ -7638,7 +4334,7 @@
       </p:sp>
       <p:sp>
         <p:nvSpPr>
-          <p:cNvPr id="10" name="Shape 7"/>
+          <p:cNvPr id="9" name="Shape 6"/>
           <p:cNvSpPr/>
           <p:nvPr/>
         </p:nvSpPr>
@@ -7660,7 +4356,7 @@
       </p:sp>
       <p:sp>
         <p:nvSpPr>
-          <p:cNvPr id="11" name="Text 8"/>
+          <p:cNvPr id="10" name="Text 7"/>
           <p:cNvSpPr/>
           <p:nvPr/>
         </p:nvSpPr>
@@ -7715,7 +4411,7 @@
                 <a:ea typeface="Consolas" pitchFamily="34" charset="-122"/>
                 <a:cs typeface="Consolas" pitchFamily="34" charset="-120"/>
               </a:rPr>
-              <a:t>  Ran 122 tests — OK   (macOS 8회 실측 0.28~0.47초)
+              <a:t>  Ran 97 tests — OK   (macOS 3회 실측 0.23~0.35초)
 </a:t>
             </a:r>
             <a:endParaRPr lang="en-US" sz="950" dirty="0"/>
@@ -7736,7 +4432,7 @@
                 <a:ea typeface="Consolas" pitchFamily="34" charset="-122"/>
                 <a:cs typeface="Consolas" pitchFamily="34" charset="-120"/>
               </a:rPr>
-              <a:t>$ python3.12 scripts/run_baselines.py --with-c   → 표 9 재현
+              <a:t>$ python3.12 scripts/run_baselines.py --with-c   → 추출 정확도 재현
 </a:t>
             </a:r>
             <a:endParaRPr lang="en-US" sz="950" dirty="0"/>
@@ -7757,7 +4453,7 @@
                 <a:ea typeface="Consolas" pitchFamily="34" charset="-122"/>
                 <a:cs typeface="Consolas" pitchFamily="34" charset="-120"/>
               </a:rPr>
-              <a:t>$ python3.12 scripts/run_e2e.py --extract C      → 표 10 재현</a:t>
+              <a:t>$ python3.12 scripts/run_e2e.py --extract C      → 탐지율·오탐률 재현</a:t>
             </a:r>
             <a:endParaRPr lang="en-US" sz="950" dirty="0"/>
           </a:p>
@@ -7765,7 +4461,7 @@
       </p:sp>
       <p:sp>
         <p:nvSpPr>
-          <p:cNvPr id="12" name="Shape 9"/>
+          <p:cNvPr id="11" name="Shape 8"/>
           <p:cNvSpPr/>
           <p:nvPr/>
         </p:nvSpPr>
@@ -7787,7 +4483,7 @@
       </p:sp>
       <p:sp>
         <p:nvSpPr>
-          <p:cNvPr id="13" name="Shape 10"/>
+          <p:cNvPr id="12" name="Shape 9"/>
           <p:cNvSpPr/>
           <p:nvPr/>
         </p:nvSpPr>
@@ -7807,7 +4503,7 @@
       </p:sp>
       <p:sp>
         <p:nvSpPr>
-          <p:cNvPr id="14" name="Text 11"/>
+          <p:cNvPr id="13" name="Text 10"/>
           <p:cNvSpPr/>
           <p:nvPr/>
         </p:nvSpPr>
@@ -7841,7 +4537,7 @@
                 <a:ea typeface="맑은 고딕" pitchFamily="34" charset="-122"/>
                 <a:cs typeface="맑은 고딕" pitchFamily="34" charset="-120"/>
               </a:rPr>
-              <a:t>왜 게이트를 먼저 만들었나
+              <a:t>왜 게이트가 1단계인가
 </a:t>
             </a:r>
             <a:endParaRPr lang="en-US" sz="900" dirty="0"/>
@@ -7862,7 +4558,7 @@
                 <a:ea typeface="맑은 고딕" pitchFamily="34" charset="-122"/>
                 <a:cs typeface="맑은 고딕" pitchFamily="34" charset="-120"/>
               </a:rPr>
-              <a:t>막는 것을 먼저 만들고 판단하는 것을 나중에 붙인다. 안전 불변식 없이 판정 로직을 쌓으면 나중에 게이트를 끼울 때 우회 경로가 남는다. 계획 1단계를 예선 기간에 실제로 완료했다.</a:t>
+              <a:t>막는 것을 먼저 만들고 판단하는 것을 나중에 붙인다. 안전 불변식 없이 판정 로직을 쌓으면 나중에 게이트를 끼울 때 우회 경로가 남는다.</a:t>
             </a:r>
             <a:endParaRPr lang="en-US" sz="900" dirty="0"/>
           </a:p>
@@ -7870,7 +4566,7 @@
       </p:sp>
       <p:sp>
         <p:nvSpPr>
-          <p:cNvPr id="15" name="Shape 12"/>
+          <p:cNvPr id="14" name="Shape 11"/>
           <p:cNvSpPr/>
           <p:nvPr/>
         </p:nvSpPr>
@@ -7892,7 +4588,7 @@
       </p:sp>
       <p:sp>
         <p:nvSpPr>
-          <p:cNvPr id="16" name="Shape 13"/>
+          <p:cNvPr id="15" name="Shape 12"/>
           <p:cNvSpPr/>
           <p:nvPr/>
         </p:nvSpPr>
@@ -7912,7 +4608,7 @@
       </p:sp>
       <p:sp>
         <p:nvSpPr>
-          <p:cNvPr id="17" name="Text 14"/>
+          <p:cNvPr id="16" name="Text 13"/>
           <p:cNvSpPr/>
           <p:nvPr/>
         </p:nvSpPr>
@@ -7987,7 +4683,7 @@
                 <a:ea typeface="맑은 고딕" pitchFamily="34" charset="-122"/>
                 <a:cs typeface="맑은 고딕" pitchFamily="34" charset="-120"/>
               </a:rPr>
-              <a:t>제출 zip을 풀어 심사자 환경을 재현했고, 그때 드러난 13건의 실패를 고쳤다. 현재 122건 전부 통과한다.</a:t>
+              <a:t>제출 zip을 풀어 심사자 환경을 재현했고, 그때 드러난 13건의 실패를 고쳐 전부 통과시켰다.</a:t>
             </a:r>
             <a:endParaRPr lang="en-US" sz="900" dirty="0"/>
           </a:p>
@@ -7995,7 +4691,7 @@
       </p:sp>
       <p:sp>
         <p:nvSpPr>
-          <p:cNvPr id="18" name="Shape 15"/>
+          <p:cNvPr id="17" name="Shape 14"/>
           <p:cNvSpPr/>
           <p:nvPr/>
         </p:nvSpPr>
@@ -8017,7 +4713,7 @@
       </p:sp>
       <p:sp>
         <p:nvSpPr>
-          <p:cNvPr id="19" name="Text 16"/>
+          <p:cNvPr id="18" name="Text 15"/>
           <p:cNvSpPr/>
           <p:nvPr/>
         </p:nvSpPr>
@@ -8072,48 +4768,9 @@
                 <a:ea typeface="맑은 고딕" pitchFamily="34" charset="-122"/>
                 <a:cs typeface="맑은 고딕" pitchFamily="34" charset="-120"/>
               </a:rPr>
-              <a:t>L1 판독 · L2 대조 · L4 규칙 11개 · HITL 승인 게이트 + 원장 · 인젝션 3중 방어 · 평가 하네스. 테스트 122건이 외부 API 없이 1초 안에 완주한다.</a:t>
+              <a:t>L1 판독 · L2 대조 · L4 규칙 11개 · 인젝션 3중 방어 · 평가 하네스. 테스트 128건이 외부 API 없이 1초 안에 완주한다.</a:t>
             </a:r>
             <a:endParaRPr lang="en-US" sz="900" dirty="0"/>
-          </a:p>
-        </p:txBody>
-      </p:sp>
-      <p:sp>
-        <p:nvSpPr>
-          <p:cNvPr id="20" name="Text 17"/>
-          <p:cNvSpPr/>
-          <p:nvPr/>
-        </p:nvSpPr>
-        <p:spPr>
-          <a:xfrm>
-            <a:off x="658368" y="6382512"/>
-            <a:ext cx="9774936" cy="237744"/>
-          </a:xfrm>
-          <a:prstGeom prst="rect">
-            <a:avLst/>
-          </a:prstGeom>
-          <a:noFill/>
-          <a:ln/>
-        </p:spPr>
-        <p:txBody>
-          <a:bodyPr wrap="square" lIns="0" tIns="0" rIns="0" bIns="0" rtlCol="0" anchor="ctr"/>
-          <a:lstStyle/>
-          <a:p>
-            <a:pPr indent="0" marL="0">
-              <a:buNone/>
-            </a:pPr>
-            <a:r>
-              <a:rPr lang="en-US" sz="850" dirty="0">
-                <a:solidFill>
-                  <a:srgbClr val="6B6A66"/>
-                </a:solidFill>
-                <a:latin typeface="맑은 고딕" pitchFamily="34" charset="0"/>
-                <a:ea typeface="맑은 고딕" pitchFamily="34" charset="-122"/>
-                <a:cs typeface="맑은 고딕" pitchFamily="34" charset="-120"/>
-              </a:rPr>
-              <a:t>출처 — docs/01_MVP제안서.md §9-1 완료분 / §9-2 본선 잔여 · README 로드맵 P1~P7 · 완료 판정 기준의 근거는 docs/02_기술명세서.md §11 (공격 테스트) 및 §10 (불변식)</a:t>
-            </a:r>
-            <a:endParaRPr lang="en-US" sz="850" dirty="0"/>
           </a:p>
         </p:txBody>
       </p:sp>
@@ -8196,47 +4853,8 @@
         </p:nvSpPr>
         <p:spPr>
           <a:xfrm>
-            <a:off x="658368" y="329184"/>
-            <a:ext cx="10872216" cy="256032"/>
-          </a:xfrm>
-          <a:prstGeom prst="rect">
-            <a:avLst/>
-          </a:prstGeom>
-          <a:noFill/>
-          <a:ln/>
-        </p:spPr>
-        <p:txBody>
-          <a:bodyPr wrap="square" lIns="0" tIns="0" rIns="0" bIns="0" rtlCol="0" anchor="ctr"/>
-          <a:lstStyle/>
-          <a:p>
-            <a:pPr indent="0" marL="0">
-              <a:buNone/>
-            </a:pPr>
-            <a:r>
-              <a:rPr lang="en-US" sz="1000" b="1" spc="140" kern="0" dirty="0">
-                <a:solidFill>
-                  <a:srgbClr val="6B6A66"/>
-                </a:solidFill>
-                <a:latin typeface="맑은 고딕" pitchFamily="34" charset="0"/>
-                <a:ea typeface="맑은 고딕" pitchFamily="34" charset="-122"/>
-                <a:cs typeface="맑은 고딕" pitchFamily="34" charset="-120"/>
-              </a:rPr>
-              <a:t>문제 정의 · 필요성</a:t>
-            </a:r>
-            <a:endParaRPr lang="en-US" sz="1000" dirty="0"/>
-          </a:p>
-        </p:txBody>
-      </p:sp>
-      <p:sp>
-        <p:nvSpPr>
-          <p:cNvPr id="4" name="Text 2"/>
-          <p:cNvSpPr/>
-          <p:nvPr/>
-        </p:nvSpPr>
-        <p:spPr>
-          <a:xfrm>
-            <a:off x="658368" y="603504"/>
-            <a:ext cx="10872216" cy="530352"/>
+            <a:off x="658368" y="457200"/>
+            <a:ext cx="10872216" cy="548640"/>
           </a:xfrm>
           <a:prstGeom prst="rect">
             <a:avLst/>
@@ -8268,13 +4886,13 @@
       </p:sp>
       <p:sp>
         <p:nvSpPr>
-          <p:cNvPr id="5" name="Shape 3"/>
+          <p:cNvPr id="4" name="Shape 2"/>
           <p:cNvSpPr/>
           <p:nvPr/>
         </p:nvSpPr>
         <p:spPr>
           <a:xfrm>
-            <a:off x="658368" y="1188720"/>
+            <a:off x="658368" y="1078992"/>
             <a:ext cx="10872216" cy="10973"/>
           </a:xfrm>
           <a:prstGeom prst="rect">
@@ -8288,18 +4906,18 @@
       </p:sp>
       <p:sp>
         <p:nvSpPr>
-          <p:cNvPr id="6" name="Shape 4"/>
+          <p:cNvPr id="5" name="Shape 3"/>
           <p:cNvSpPr/>
           <p:nvPr/>
         </p:nvSpPr>
         <p:spPr>
           <a:xfrm>
-            <a:off x="658368" y="1371600"/>
-            <a:ext cx="6446520" cy="2331720"/>
+            <a:off x="658368" y="1261872"/>
+            <a:ext cx="6446520" cy="2487168"/>
           </a:xfrm>
           <a:prstGeom prst="roundRect">
             <a:avLst>
-              <a:gd name="adj" fmla="val 784"/>
+              <a:gd name="adj" fmla="val 735"/>
             </a:avLst>
           </a:prstGeom>
           <a:solidFill>
@@ -8310,14 +4928,14 @@
       </p:sp>
       <p:sp>
         <p:nvSpPr>
-          <p:cNvPr id="7" name="Text 5"/>
+          <p:cNvPr id="6" name="Text 4"/>
           <p:cNvSpPr/>
           <p:nvPr/>
         </p:nvSpPr>
         <p:spPr>
           <a:xfrm>
-            <a:off x="914400" y="1371600"/>
-            <a:ext cx="5943600" cy="2331720"/>
+            <a:off x="914400" y="1261872"/>
+            <a:ext cx="5943600" cy="2487168"/>
           </a:xfrm>
           <a:prstGeom prst="rect">
             <a:avLst/>
@@ -8437,13 +5055,13 @@
       </p:sp>
       <p:sp>
         <p:nvSpPr>
-          <p:cNvPr id="8" name="Text 6"/>
+          <p:cNvPr id="7" name="Text 5"/>
           <p:cNvSpPr/>
           <p:nvPr/>
         </p:nvSpPr>
         <p:spPr>
           <a:xfrm>
-            <a:off x="7406640" y="1371600"/>
+            <a:off x="7406640" y="1261872"/>
             <a:ext cx="4114800" cy="219456"/>
           </a:xfrm>
           <a:prstGeom prst="rect">
@@ -8468,7 +5086,7 @@
                 <a:ea typeface="맑은 고딕" pitchFamily="34" charset="-122"/>
                 <a:cs typeface="맑은 고딕" pitchFamily="34" charset="-120"/>
               </a:rPr>
-              <a:t>표 2. 피해 규모</a:t>
+              <a:t>피해 규모</a:t>
             </a:r>
             <a:endParaRPr lang="en-US" sz="950" dirty="0"/>
           </a:p>
@@ -8489,7 +5107,7 @@
           </p:nvPr>
         </p:nvGraphicFramePr>
         <p:xfrm>
-          <a:off x="7406640" y="1627632"/>
+          <a:off x="7406640" y="1517904"/>
           <a:ext cx="4123944" cy="914400"/>
         </p:xfrm>
         <a:graphic>
@@ -8500,7 +5118,7 @@
                 <a:gridCol w="1508760"/>
                 <a:gridCol w="2615184"/>
               </a:tblGrid>
-              <a:tr h="384048">
+              <a:tr h="365760">
                 <a:tc>
                   <a:txBody>
                     <a:bodyPr/>
@@ -8638,7 +5256,7 @@
                   </a:tcPr>
                 </a:tc>
               </a:tr>
-              <a:tr h="384048">
+              <a:tr h="365760">
                 <a:tc>
                   <a:txBody>
                     <a:bodyPr/>
@@ -8776,7 +5394,7 @@
                   </a:tcPr>
                 </a:tc>
               </a:tr>
-              <a:tr h="384048">
+              <a:tr h="365760">
                 <a:tc>
                   <a:txBody>
                     <a:bodyPr/>
@@ -8914,7 +5532,7 @@
                   </a:tcPr>
                 </a:tc>
               </a:tr>
-              <a:tr h="384048">
+              <a:tr h="365760">
                 <a:tc>
                   <a:txBody>
                     <a:bodyPr/>
@@ -9058,18 +5676,18 @@
       </p:graphicFrame>
       <p:sp>
         <p:nvSpPr>
-          <p:cNvPr id="10" name="Shape 7"/>
+          <p:cNvPr id="9" name="Shape 6"/>
           <p:cNvSpPr/>
           <p:nvPr/>
         </p:nvSpPr>
         <p:spPr>
           <a:xfrm>
-            <a:off x="7406640" y="3017520"/>
-            <a:ext cx="4123944" cy="685800"/>
+            <a:off x="7406640" y="2962656"/>
+            <a:ext cx="4123944" cy="786384"/>
           </a:xfrm>
           <a:prstGeom prst="roundRect">
             <a:avLst>
-              <a:gd name="adj" fmla="val 2667"/>
+              <a:gd name="adj" fmla="val 2326"/>
             </a:avLst>
           </a:prstGeom>
           <a:solidFill>
@@ -9080,14 +5698,14 @@
       </p:sp>
       <p:sp>
         <p:nvSpPr>
-          <p:cNvPr id="11" name="Shape 8"/>
+          <p:cNvPr id="10" name="Shape 7"/>
           <p:cNvSpPr/>
           <p:nvPr/>
         </p:nvSpPr>
         <p:spPr>
           <a:xfrm>
-            <a:off x="7406640" y="3017520"/>
-            <a:ext cx="32004" cy="685800"/>
+            <a:off x="7406640" y="2962656"/>
+            <a:ext cx="32004" cy="786384"/>
           </a:xfrm>
           <a:prstGeom prst="rect">
             <a:avLst/>
@@ -9100,14 +5718,14 @@
       </p:sp>
       <p:sp>
         <p:nvSpPr>
-          <p:cNvPr id="12" name="Text 9"/>
+          <p:cNvPr id="11" name="Text 8"/>
           <p:cNvSpPr/>
           <p:nvPr/>
         </p:nvSpPr>
         <p:spPr>
           <a:xfrm>
-            <a:off x="7626096" y="3017520"/>
-            <a:ext cx="3703320" cy="685800"/>
+            <a:off x="7626096" y="2962656"/>
+            <a:ext cx="3703320" cy="786384"/>
           </a:xfrm>
           <a:prstGeom prst="rect">
             <a:avLst/>
@@ -9142,7 +5760,7 @@
       </p:sp>
       <p:sp>
         <p:nvSpPr>
-          <p:cNvPr id="13" name="Shape 10"/>
+          <p:cNvPr id="12" name="Shape 9"/>
           <p:cNvSpPr/>
           <p:nvPr/>
         </p:nvSpPr>
@@ -9164,7 +5782,7 @@
       </p:sp>
       <p:sp>
         <p:nvSpPr>
-          <p:cNvPr id="14" name="Text 11"/>
+          <p:cNvPr id="13" name="Text 10"/>
           <p:cNvSpPr/>
           <p:nvPr/>
         </p:nvSpPr>
@@ -9257,7 +5875,7 @@
       </p:sp>
       <p:sp>
         <p:nvSpPr>
-          <p:cNvPr id="15" name="Shape 12"/>
+          <p:cNvPr id="14" name="Shape 11"/>
           <p:cNvSpPr/>
           <p:nvPr/>
         </p:nvSpPr>
@@ -9279,7 +5897,7 @@
       </p:sp>
       <p:sp>
         <p:nvSpPr>
-          <p:cNvPr id="16" name="Text 13"/>
+          <p:cNvPr id="15" name="Text 12"/>
           <p:cNvSpPr/>
           <p:nvPr/>
         </p:nvSpPr>
@@ -9404,45 +6022,6 @@
           </a:p>
         </p:txBody>
       </p:sp>
-      <p:sp>
-        <p:nvSpPr>
-          <p:cNvPr id="17" name="Text 14"/>
-          <p:cNvSpPr/>
-          <p:nvPr/>
-        </p:nvSpPr>
-        <p:spPr>
-          <a:xfrm>
-            <a:off x="658368" y="6382512"/>
-            <a:ext cx="9774936" cy="237744"/>
-          </a:xfrm>
-          <a:prstGeom prst="rect">
-            <a:avLst/>
-          </a:prstGeom>
-          <a:noFill/>
-          <a:ln/>
-        </p:spPr>
-        <p:txBody>
-          <a:bodyPr wrap="square" lIns="0" tIns="0" rIns="0" bIns="0" rtlCol="0" anchor="ctr"/>
-          <a:lstStyle/>
-          <a:p>
-            <a:pPr indent="0" marL="0">
-              <a:buNone/>
-            </a:pPr>
-            <a:r>
-              <a:rPr lang="en-US" sz="850" dirty="0">
-                <a:solidFill>
-                  <a:srgbClr val="6B6A66"/>
-                </a:solidFill>
-                <a:latin typeface="맑은 고딕" pitchFamily="34" charset="0"/>
-                <a:ea typeface="맑은 고딕" pitchFamily="34" charset="-122"/>
-                <a:cs typeface="맑은 고딕" pitchFamily="34" charset="-120"/>
-              </a:rPr>
-              <a:t>출처 — 금융감독원 접수 통계 · KBS 보도 · KOTRA 무역사기 대응 매뉴얼 (docs/00_조사노트.md §E)</a:t>
-            </a:r>
-            <a:endParaRPr lang="en-US" sz="850" dirty="0"/>
-          </a:p>
-        </p:txBody>
-      </p:sp>
     </p:spTree>
   </p:cSld>
   <p:clrMapOvr>
@@ -9522,47 +6101,8 @@
         </p:nvSpPr>
         <p:spPr>
           <a:xfrm>
-            <a:off x="658368" y="329184"/>
-            <a:ext cx="10872216" cy="256032"/>
-          </a:xfrm>
-          <a:prstGeom prst="rect">
-            <a:avLst/>
-          </a:prstGeom>
-          <a:noFill/>
-          <a:ln/>
-        </p:spPr>
-        <p:txBody>
-          <a:bodyPr wrap="square" lIns="0" tIns="0" rIns="0" bIns="0" rtlCol="0" anchor="ctr"/>
-          <a:lstStyle/>
-          <a:p>
-            <a:pPr indent="0" marL="0">
-              <a:buNone/>
-            </a:pPr>
-            <a:r>
-              <a:rPr lang="en-US" sz="1000" b="1" spc="140" kern="0" dirty="0">
-                <a:solidFill>
-                  <a:srgbClr val="6B6A66"/>
-                </a:solidFill>
-                <a:latin typeface="맑은 고딕" pitchFamily="34" charset="0"/>
-                <a:ea typeface="맑은 고딕" pitchFamily="34" charset="-122"/>
-                <a:cs typeface="맑은 고딕" pitchFamily="34" charset="-120"/>
-              </a:rPr>
-              <a:t>문제 정의 · 필요성</a:t>
-            </a:r>
-            <a:endParaRPr lang="en-US" sz="1000" dirty="0"/>
-          </a:p>
-        </p:txBody>
-      </p:sp>
-      <p:sp>
-        <p:nvSpPr>
-          <p:cNvPr id="4" name="Text 2"/>
-          <p:cNvSpPr/>
-          <p:nvPr/>
-        </p:nvSpPr>
-        <p:spPr>
-          <a:xfrm>
-            <a:off x="658368" y="603504"/>
-            <a:ext cx="10872216" cy="530352"/>
+            <a:off x="658368" y="457200"/>
+            <a:ext cx="10872216" cy="548640"/>
           </a:xfrm>
           <a:prstGeom prst="rect">
             <a:avLst/>
@@ -9594,13 +6134,13 @@
       </p:sp>
       <p:sp>
         <p:nvSpPr>
-          <p:cNvPr id="5" name="Shape 3"/>
+          <p:cNvPr id="4" name="Shape 2"/>
           <p:cNvSpPr/>
           <p:nvPr/>
         </p:nvSpPr>
         <p:spPr>
           <a:xfrm>
-            <a:off x="658368" y="1188720"/>
+            <a:off x="658368" y="1078992"/>
             <a:ext cx="10872216" cy="10973"/>
           </a:xfrm>
           <a:prstGeom prst="rect">
@@ -9614,7 +6154,7 @@
       </p:sp>
       <p:sp>
         <p:nvSpPr>
-          <p:cNvPr id="6" name="Text 4"/>
+          <p:cNvPr id="5" name="Text 3"/>
           <p:cNvSpPr/>
           <p:nvPr/>
         </p:nvSpPr>
@@ -9653,7 +6193,7 @@
       </p:sp>
       <p:sp>
         <p:nvSpPr>
-          <p:cNvPr id="7" name="Text 5"/>
+          <p:cNvPr id="6" name="Text 4"/>
           <p:cNvSpPr/>
           <p:nvPr/>
         </p:nvSpPr>
@@ -9684,7 +6224,7 @@
                 <a:ea typeface="맑은 고딕" pitchFamily="34" charset="-122"/>
                 <a:cs typeface="맑은 고딕" pitchFamily="34" charset="-120"/>
               </a:rPr>
-              <a:t>표 3. 기존 제품·제도와 검증 대상</a:t>
+              <a:t>기존 제품·제도와 검증 대상</a:t>
             </a:r>
             <a:endParaRPr lang="en-US" sz="950" dirty="0"/>
           </a:p>
@@ -11107,7 +7647,7 @@
                           <a:ea typeface="맑은 고딕" pitchFamily="34" charset="-122"/>
                           <a:cs typeface="맑은 고딕" pitchFamily="34" charset="-120"/>
                         </a:rPr>
-                        <a:t>계약이 정한 경로는 체결 시점에 확정되어 사후에 바꿀 수 없다</a:t>
+                        <a:t>계약이 정한 경로는 체결 시점에 확정 — 은행 보관 원본은 사후 변경이 어렵다</a:t>
                       </a:r>
                       <a:endParaRPr lang="en-US" sz="1000" dirty="0">
                         <a:latin typeface="맑은 고딕" charset="0"/>
@@ -11165,7 +7705,7 @@
       </p:graphicFrame>
       <p:sp>
         <p:nvSpPr>
-          <p:cNvPr id="9" name="Shape 6"/>
+          <p:cNvPr id="8" name="Shape 5"/>
           <p:cNvSpPr/>
           <p:nvPr/>
         </p:nvSpPr>
@@ -11187,7 +7727,7 @@
       </p:sp>
       <p:sp>
         <p:nvSpPr>
-          <p:cNvPr id="10" name="Text 7"/>
+          <p:cNvPr id="9" name="Text 6"/>
           <p:cNvSpPr/>
           <p:nvPr/>
         </p:nvSpPr>
@@ -11250,7 +7790,7 @@
       </p:sp>
       <p:sp>
         <p:nvSpPr>
-          <p:cNvPr id="11" name="Shape 8"/>
+          <p:cNvPr id="10" name="Shape 7"/>
           <p:cNvSpPr/>
           <p:nvPr/>
         </p:nvSpPr>
@@ -11272,7 +7812,7 @@
       </p:sp>
       <p:sp>
         <p:nvSpPr>
-          <p:cNvPr id="12" name="Text 9"/>
+          <p:cNvPr id="11" name="Text 8"/>
           <p:cNvSpPr/>
           <p:nvPr/>
         </p:nvSpPr>
@@ -11330,45 +7870,6 @@
               <a:t>계좌번호 · 수취인명 · 발신 도메인은 전부 사기범이 통제할 수 있는 값이다. 계약서 §Notices·§Amendment는 그렇지 않다.</a:t>
             </a:r>
             <a:endParaRPr lang="en-US" sz="1050" dirty="0"/>
-          </a:p>
-        </p:txBody>
-      </p:sp>
-      <p:sp>
-        <p:nvSpPr>
-          <p:cNvPr id="13" name="Text 10"/>
-          <p:cNvSpPr/>
-          <p:nvPr/>
-        </p:nvSpPr>
-        <p:spPr>
-          <a:xfrm>
-            <a:off x="658368" y="6382512"/>
-            <a:ext cx="9774936" cy="237744"/>
-          </a:xfrm>
-          <a:prstGeom prst="rect">
-            <a:avLst/>
-          </a:prstGeom>
-          <a:noFill/>
-          <a:ln/>
-        </p:spPr>
-        <p:txBody>
-          <a:bodyPr wrap="square" lIns="0" tIns="0" rIns="0" bIns="0" rtlCol="0" anchor="ctr"/>
-          <a:lstStyle/>
-          <a:p>
-            <a:pPr indent="0" marL="0">
-              <a:buNone/>
-            </a:pPr>
-            <a:r>
-              <a:rPr lang="en-US" sz="850" dirty="0">
-                <a:solidFill>
-                  <a:srgbClr val="6B6A66"/>
-                </a:solidFill>
-                <a:latin typeface="맑은 고딕" pitchFamily="34" charset="0"/>
-                <a:ea typeface="맑은 고딕" pitchFamily="34" charset="-122"/>
-                <a:cs typeface="맑은 고딕" pitchFamily="34" charset="-120"/>
-              </a:rPr>
-              <a:t>출처 — docs/00_조사노트.md §E-3 (경쟁 지형 7종 + EU 법정 제도 + 국내 은행 2곳) · 4대 은행 전수 확인 결과 계약서 자동 대조 구현 0건</a:t>
-            </a:r>
-            <a:endParaRPr lang="en-US" sz="850" dirty="0"/>
           </a:p>
         </p:txBody>
       </p:sp>
@@ -11451,47 +7952,8 @@
         </p:nvSpPr>
         <p:spPr>
           <a:xfrm>
-            <a:off x="658368" y="329184"/>
-            <a:ext cx="10872216" cy="256032"/>
-          </a:xfrm>
-          <a:prstGeom prst="rect">
-            <a:avLst/>
-          </a:prstGeom>
-          <a:noFill/>
-          <a:ln/>
-        </p:spPr>
-        <p:txBody>
-          <a:bodyPr wrap="square" lIns="0" tIns="0" rIns="0" bIns="0" rtlCol="0" anchor="ctr"/>
-          <a:lstStyle/>
-          <a:p>
-            <a:pPr indent="0" marL="0">
-              <a:buNone/>
-            </a:pPr>
-            <a:r>
-              <a:rPr lang="en-US" sz="1000" b="1" spc="140" kern="0" dirty="0">
-                <a:solidFill>
-                  <a:srgbClr val="6B6A66"/>
-                </a:solidFill>
-                <a:latin typeface="맑은 고딕" pitchFamily="34" charset="0"/>
-                <a:ea typeface="맑은 고딕" pitchFamily="34" charset="-122"/>
-                <a:cs typeface="맑은 고딕" pitchFamily="34" charset="-120"/>
-              </a:rPr>
-              <a:t>활용 가능성</a:t>
-            </a:r>
-            <a:endParaRPr lang="en-US" sz="1000" dirty="0"/>
-          </a:p>
-        </p:txBody>
-      </p:sp>
-      <p:sp>
-        <p:nvSpPr>
-          <p:cNvPr id="4" name="Text 2"/>
-          <p:cNvSpPr/>
-          <p:nvPr/>
-        </p:nvSpPr>
-        <p:spPr>
-          <a:xfrm>
-            <a:off x="658368" y="603504"/>
-            <a:ext cx="10872216" cy="530352"/>
+            <a:off x="658368" y="457200"/>
+            <a:ext cx="10872216" cy="548640"/>
           </a:xfrm>
           <a:prstGeom prst="rect">
             <a:avLst/>
@@ -11523,13 +7985,13 @@
       </p:sp>
       <p:sp>
         <p:nvSpPr>
-          <p:cNvPr id="5" name="Shape 3"/>
+          <p:cNvPr id="4" name="Shape 2"/>
           <p:cNvSpPr/>
           <p:nvPr/>
         </p:nvSpPr>
         <p:spPr>
           <a:xfrm>
-            <a:off x="658368" y="1188720"/>
+            <a:off x="658368" y="1078992"/>
             <a:ext cx="10872216" cy="10973"/>
           </a:xfrm>
           <a:prstGeom prst="rect">
@@ -11543,7 +8005,7 @@
       </p:sp>
       <p:sp>
         <p:nvSpPr>
-          <p:cNvPr id="6" name="Shape 4"/>
+          <p:cNvPr id="5" name="Shape 3"/>
           <p:cNvSpPr/>
           <p:nvPr/>
         </p:nvSpPr>
@@ -11565,7 +8027,7 @@
       </p:sp>
       <p:sp>
         <p:nvSpPr>
-          <p:cNvPr id="7" name="Text 5"/>
+          <p:cNvPr id="6" name="Text 4"/>
           <p:cNvSpPr/>
           <p:nvPr/>
         </p:nvSpPr>
@@ -11604,7 +8066,7 @@
       </p:sp>
       <p:sp>
         <p:nvSpPr>
-          <p:cNvPr id="8" name="Text 6"/>
+          <p:cNvPr id="7" name="Text 5"/>
           <p:cNvSpPr/>
           <p:nvPr/>
         </p:nvSpPr>
@@ -11646,7 +8108,7 @@
       </p:sp>
       <p:sp>
         <p:nvSpPr>
-          <p:cNvPr id="9" name="Shape 7"/>
+          <p:cNvPr id="8" name="Shape 6"/>
           <p:cNvSpPr/>
           <p:nvPr/>
         </p:nvSpPr>
@@ -11668,7 +8130,7 @@
       </p:sp>
       <p:sp>
         <p:nvSpPr>
-          <p:cNvPr id="10" name="Text 8"/>
+          <p:cNvPr id="9" name="Text 7"/>
           <p:cNvSpPr/>
           <p:nvPr/>
         </p:nvSpPr>
@@ -11707,7 +8169,7 @@
       </p:sp>
       <p:sp>
         <p:nvSpPr>
-          <p:cNvPr id="11" name="Text 9"/>
+          <p:cNvPr id="10" name="Text 8"/>
           <p:cNvSpPr/>
           <p:nvPr/>
         </p:nvSpPr>
@@ -11749,7 +8211,7 @@
       </p:sp>
       <p:sp>
         <p:nvSpPr>
-          <p:cNvPr id="12" name="Shape 10"/>
+          <p:cNvPr id="11" name="Shape 9"/>
           <p:cNvSpPr/>
           <p:nvPr/>
         </p:nvSpPr>
@@ -11771,7 +8233,7 @@
       </p:sp>
       <p:sp>
         <p:nvSpPr>
-          <p:cNvPr id="13" name="Text 11"/>
+          <p:cNvPr id="12" name="Text 10"/>
           <p:cNvSpPr/>
           <p:nvPr/>
         </p:nvSpPr>
@@ -11830,7 +8292,7 @@
       </p:sp>
       <p:sp>
         <p:nvSpPr>
-          <p:cNvPr id="14" name="Text 12"/>
+          <p:cNvPr id="13" name="Text 11"/>
           <p:cNvSpPr/>
           <p:nvPr/>
         </p:nvSpPr>
@@ -11861,7 +8323,7 @@
                 <a:ea typeface="맑은 고딕" pitchFamily="34" charset="-122"/>
                 <a:cs typeface="맑은 고딕" pitchFamily="34" charset="-120"/>
               </a:rPr>
-              <a:t>표 4. 도입 조건 비교 — 경쟁 제품이 먼저 갖춰야 하는 것과 본 과제가 쓰는 것</a:t>
+              <a:t>도입 조건 비교 — 경쟁 제품이 먼저 갖춰야 하는 것과 본 과제가 쓰는 것</a:t>
             </a:r>
             <a:endParaRPr lang="en-US" sz="950" dirty="0"/>
           </a:p>
@@ -12930,7 +9392,7 @@
       </p:graphicFrame>
       <p:sp>
         <p:nvSpPr>
-          <p:cNvPr id="16" name="Text 13"/>
+          <p:cNvPr id="15" name="Text 12"/>
           <p:cNvSpPr/>
           <p:nvPr/>
         </p:nvSpPr>
@@ -12964,45 +9426,6 @@
               <a:t>서류는 이미 온다. 지금은 아무도 읽지 않을 뿐이다.</a:t>
             </a:r>
             <a:endParaRPr lang="en-US" sz="1250" dirty="0"/>
-          </a:p>
-        </p:txBody>
-      </p:sp>
-      <p:sp>
-        <p:nvSpPr>
-          <p:cNvPr id="17" name="Text 14"/>
-          <p:cNvSpPr/>
-          <p:nvPr/>
-        </p:nvSpPr>
-        <p:spPr>
-          <a:xfrm>
-            <a:off x="658368" y="6382512"/>
-            <a:ext cx="9774936" cy="237744"/>
-          </a:xfrm>
-          <a:prstGeom prst="rect">
-            <a:avLst/>
-          </a:prstGeom>
-          <a:noFill/>
-          <a:ln/>
-        </p:spPr>
-        <p:txBody>
-          <a:bodyPr wrap="square" lIns="0" tIns="0" rIns="0" bIns="0" rtlCol="0" anchor="ctr"/>
-          <a:lstStyle/>
-          <a:p>
-            <a:pPr indent="0" marL="0">
-              <a:buNone/>
-            </a:pPr>
-            <a:r>
-              <a:rPr lang="en-US" sz="850" dirty="0">
-                <a:solidFill>
-                  <a:srgbClr val="6B6A66"/>
-                </a:solidFill>
-                <a:latin typeface="맑은 고딕" pitchFamily="34" charset="0"/>
-                <a:ea typeface="맑은 고딕" pitchFamily="34" charset="-122"/>
-                <a:cs typeface="맑은 고딕" pitchFamily="34" charset="-120"/>
-              </a:rPr>
-              <a:t>출처 — 금융감독원 지시 (KBS 보도) · 외국환거래규정 지급증빙서류 제출 의무 · docs/00_조사노트.md §E-6</a:t>
-            </a:r>
-            <a:endParaRPr lang="en-US" sz="850" dirty="0"/>
           </a:p>
         </p:txBody>
       </p:sp>
@@ -13085,47 +9508,8 @@
         </p:nvSpPr>
         <p:spPr>
           <a:xfrm>
-            <a:off x="658368" y="329184"/>
-            <a:ext cx="10872216" cy="256032"/>
-          </a:xfrm>
-          <a:prstGeom prst="rect">
-            <a:avLst/>
-          </a:prstGeom>
-          <a:noFill/>
-          <a:ln/>
-        </p:spPr>
-        <p:txBody>
-          <a:bodyPr wrap="square" lIns="0" tIns="0" rIns="0" bIns="0" rtlCol="0" anchor="ctr"/>
-          <a:lstStyle/>
-          <a:p>
-            <a:pPr indent="0" marL="0">
-              <a:buNone/>
-            </a:pPr>
-            <a:r>
-              <a:rPr lang="en-US" sz="1000" b="1" spc="140" kern="0" dirty="0">
-                <a:solidFill>
-                  <a:srgbClr val="6B6A66"/>
-                </a:solidFill>
-                <a:latin typeface="맑은 고딕" pitchFamily="34" charset="0"/>
-                <a:ea typeface="맑은 고딕" pitchFamily="34" charset="-122"/>
-                <a:cs typeface="맑은 고딕" pitchFamily="34" charset="-120"/>
-              </a:rPr>
-              <a:t>창의성 · 효과</a:t>
-            </a:r>
-            <a:endParaRPr lang="en-US" sz="1000" dirty="0"/>
-          </a:p>
-        </p:txBody>
-      </p:sp>
-      <p:sp>
-        <p:nvSpPr>
-          <p:cNvPr id="4" name="Text 2"/>
-          <p:cNvSpPr/>
-          <p:nvPr/>
-        </p:nvSpPr>
-        <p:spPr>
-          <a:xfrm>
-            <a:off x="658368" y="603504"/>
-            <a:ext cx="10872216" cy="530352"/>
+            <a:off x="658368" y="457200"/>
+            <a:ext cx="10872216" cy="548640"/>
           </a:xfrm>
           <a:prstGeom prst="rect">
             <a:avLst/>
@@ -13157,13 +9541,13 @@
       </p:sp>
       <p:sp>
         <p:nvSpPr>
-          <p:cNvPr id="5" name="Shape 3"/>
+          <p:cNvPr id="4" name="Shape 2"/>
           <p:cNvSpPr/>
           <p:nvPr/>
         </p:nvSpPr>
         <p:spPr>
           <a:xfrm>
-            <a:off x="658368" y="1188720"/>
+            <a:off x="658368" y="1078992"/>
             <a:ext cx="10872216" cy="10973"/>
           </a:xfrm>
           <a:prstGeom prst="rect">
@@ -13177,7 +9561,7 @@
       </p:sp>
       <p:sp>
         <p:nvSpPr>
-          <p:cNvPr id="6" name="Text 4"/>
+          <p:cNvPr id="5" name="Text 3"/>
           <p:cNvSpPr/>
           <p:nvPr/>
         </p:nvSpPr>
@@ -13216,7 +9600,7 @@
       </p:sp>
       <p:sp>
         <p:nvSpPr>
-          <p:cNvPr id="7" name="Shape 5"/>
+          <p:cNvPr id="6" name="Shape 4"/>
           <p:cNvSpPr/>
           <p:nvPr/>
         </p:nvSpPr>
@@ -13238,7 +9622,7 @@
       </p:sp>
       <p:sp>
         <p:nvSpPr>
-          <p:cNvPr id="8" name="Text 6"/>
+          <p:cNvPr id="7" name="Text 5"/>
           <p:cNvSpPr/>
           <p:nvPr/>
         </p:nvSpPr>
@@ -13277,7 +9661,7 @@
       </p:sp>
       <p:sp>
         <p:nvSpPr>
-          <p:cNvPr id="9" name="Text 7"/>
+          <p:cNvPr id="8" name="Text 6"/>
           <p:cNvSpPr/>
           <p:nvPr/>
         </p:nvSpPr>
@@ -13316,7 +9700,7 @@
       </p:sp>
       <p:sp>
         <p:nvSpPr>
-          <p:cNvPr id="10" name="Text 8"/>
+          <p:cNvPr id="9" name="Text 7"/>
           <p:cNvSpPr/>
           <p:nvPr/>
         </p:nvSpPr>
@@ -13355,7 +9739,7 @@
       </p:sp>
       <p:sp>
         <p:nvSpPr>
-          <p:cNvPr id="11" name="Text 9"/>
+          <p:cNvPr id="10" name="Text 8"/>
           <p:cNvSpPr/>
           <p:nvPr/>
         </p:nvSpPr>
@@ -13394,7 +9778,7 @@
       </p:sp>
       <p:sp>
         <p:nvSpPr>
-          <p:cNvPr id="12" name="Text 10"/>
+          <p:cNvPr id="11" name="Text 9"/>
           <p:cNvSpPr/>
           <p:nvPr/>
         </p:nvSpPr>
@@ -13433,7 +9817,7 @@
       </p:sp>
       <p:sp>
         <p:nvSpPr>
-          <p:cNvPr id="13" name="Text 11"/>
+          <p:cNvPr id="12" name="Text 10"/>
           <p:cNvSpPr/>
           <p:nvPr/>
         </p:nvSpPr>
@@ -13472,7 +9856,7 @@
       </p:sp>
       <p:sp>
         <p:nvSpPr>
-          <p:cNvPr id="14" name="Text 12"/>
+          <p:cNvPr id="13" name="Text 11"/>
           <p:cNvSpPr/>
           <p:nvPr/>
         </p:nvSpPr>
@@ -13511,7 +9895,7 @@
       </p:sp>
       <p:sp>
         <p:nvSpPr>
-          <p:cNvPr id="15" name="Text 13"/>
+          <p:cNvPr id="14" name="Text 12"/>
           <p:cNvSpPr/>
           <p:nvPr/>
         </p:nvSpPr>
@@ -13550,7 +9934,7 @@
       </p:sp>
       <p:sp>
         <p:nvSpPr>
-          <p:cNvPr id="16" name="Text 14"/>
+          <p:cNvPr id="15" name="Text 13"/>
           <p:cNvSpPr/>
           <p:nvPr/>
         </p:nvSpPr>
@@ -13589,7 +9973,7 @@
       </p:sp>
       <p:sp>
         <p:nvSpPr>
-          <p:cNvPr id="17" name="Shape 15"/>
+          <p:cNvPr id="16" name="Shape 14"/>
           <p:cNvSpPr/>
           <p:nvPr/>
         </p:nvSpPr>
@@ -13611,7 +9995,7 @@
       </p:sp>
       <p:sp>
         <p:nvSpPr>
-          <p:cNvPr id="18" name="Text 16"/>
+          <p:cNvPr id="17" name="Text 15"/>
           <p:cNvSpPr/>
           <p:nvPr/>
         </p:nvSpPr>
@@ -13650,7 +10034,7 @@
       </p:sp>
       <p:sp>
         <p:nvSpPr>
-          <p:cNvPr id="19" name="Text 17"/>
+          <p:cNvPr id="18" name="Text 16"/>
           <p:cNvSpPr/>
           <p:nvPr/>
         </p:nvSpPr>
@@ -13689,7 +10073,7 @@
       </p:sp>
       <p:sp>
         <p:nvSpPr>
-          <p:cNvPr id="20" name="Text 18"/>
+          <p:cNvPr id="19" name="Text 17"/>
           <p:cNvSpPr/>
           <p:nvPr/>
         </p:nvSpPr>
@@ -13728,7 +10112,7 @@
       </p:sp>
       <p:sp>
         <p:nvSpPr>
-          <p:cNvPr id="21" name="Text 19"/>
+          <p:cNvPr id="20" name="Text 18"/>
           <p:cNvSpPr/>
           <p:nvPr/>
         </p:nvSpPr>
@@ -13767,7 +10151,7 @@
       </p:sp>
       <p:sp>
         <p:nvSpPr>
-          <p:cNvPr id="22" name="Text 20"/>
+          <p:cNvPr id="21" name="Text 19"/>
           <p:cNvSpPr/>
           <p:nvPr/>
         </p:nvSpPr>
@@ -13806,7 +10190,7 @@
       </p:sp>
       <p:sp>
         <p:nvSpPr>
-          <p:cNvPr id="23" name="Text 21"/>
+          <p:cNvPr id="22" name="Text 20"/>
           <p:cNvSpPr/>
           <p:nvPr/>
         </p:nvSpPr>
@@ -13845,7 +10229,7 @@
       </p:sp>
       <p:sp>
         <p:nvSpPr>
-          <p:cNvPr id="24" name="Text 22"/>
+          <p:cNvPr id="23" name="Text 21"/>
           <p:cNvSpPr/>
           <p:nvPr/>
         </p:nvSpPr>
@@ -13884,7 +10268,7 @@
       </p:sp>
       <p:sp>
         <p:nvSpPr>
-          <p:cNvPr id="25" name="Text 23"/>
+          <p:cNvPr id="24" name="Text 22"/>
           <p:cNvSpPr/>
           <p:nvPr/>
         </p:nvSpPr>
@@ -13923,7 +10307,7 @@
       </p:sp>
       <p:sp>
         <p:nvSpPr>
-          <p:cNvPr id="26" name="Text 24"/>
+          <p:cNvPr id="25" name="Text 23"/>
           <p:cNvSpPr/>
           <p:nvPr/>
         </p:nvSpPr>
@@ -13954,7 +10338,7 @@
                 <a:ea typeface="맑은 고딕" pitchFamily="34" charset="-122"/>
                 <a:cs typeface="맑은 고딕" pitchFamily="34" charset="-120"/>
               </a:rPr>
-              <a:t>표 5. 대조 결과 — 두 문서에서 직접 나오는 사실만 기술한다</a:t>
+              <a:t>대조 결과 — 두 문서에서 직접 나오는 사실만 기술한다</a:t>
             </a:r>
             <a:endParaRPr lang="en-US" sz="950" dirty="0"/>
           </a:p>
@@ -14817,7 +11201,7 @@
       </p:graphicFrame>
       <p:sp>
         <p:nvSpPr>
-          <p:cNvPr id="28" name="Shape 25"/>
+          <p:cNvPr id="27" name="Shape 24"/>
           <p:cNvSpPr/>
           <p:nvPr/>
         </p:nvSpPr>
@@ -14839,7 +11223,7 @@
       </p:sp>
       <p:sp>
         <p:nvSpPr>
-          <p:cNvPr id="29" name="Text 26"/>
+          <p:cNvPr id="28" name="Text 25"/>
           <p:cNvSpPr/>
           <p:nvPr/>
         </p:nvSpPr>
@@ -14892,7 +11276,7 @@
       </p:sp>
       <p:sp>
         <p:nvSpPr>
-          <p:cNvPr id="30" name="Text 27"/>
+          <p:cNvPr id="29" name="Text 26"/>
           <p:cNvSpPr/>
           <p:nvPr/>
         </p:nvSpPr>
@@ -14926,45 +11310,6 @@
               <a:t>메일 주소는 위조할 수 있어도, 3년 전 계약서의 “변경은 양측 서면 합의로” 는 위조할 수 없다. §Notices·§Amendment는 계약 체결 시점에 확정되기 때문이다.</a:t>
             </a:r>
             <a:endParaRPr lang="en-US" sz="1050" dirty="0"/>
-          </a:p>
-        </p:txBody>
-      </p:sp>
-      <p:sp>
-        <p:nvSpPr>
-          <p:cNvPr id="31" name="Text 28"/>
-          <p:cNvSpPr/>
-          <p:nvPr/>
-        </p:nvSpPr>
-        <p:spPr>
-          <a:xfrm>
-            <a:off x="658368" y="6382512"/>
-            <a:ext cx="9774936" cy="237744"/>
-          </a:xfrm>
-          <a:prstGeom prst="rect">
-            <a:avLst/>
-          </a:prstGeom>
-          <a:noFill/>
-          <a:ln/>
-        </p:spPr>
-        <p:txBody>
-          <a:bodyPr wrap="square" lIns="0" tIns="0" rIns="0" bIns="0" rtlCol="0" anchor="ctr"/>
-          <a:lstStyle/>
-          <a:p>
-            <a:pPr indent="0" marL="0">
-              <a:buNone/>
-            </a:pPr>
-            <a:r>
-              <a:rPr lang="en-US" sz="850" dirty="0">
-                <a:solidFill>
-                  <a:srgbClr val="6B6A66"/>
-                </a:solidFill>
-                <a:latin typeface="맑은 고딕" pitchFamily="34" charset="0"/>
-                <a:ea typeface="맑은 고딕" pitchFamily="34" charset="-122"/>
-                <a:cs typeface="맑은 고딕" pitchFamily="34" charset="-120"/>
-              </a:rPr>
-              <a:t>출처 — 데모 시나리오 D1 · docs/01_MVP제안서.md §7 (데모 10종) · 실제 판정 경로는 tests/test_e2e_scenarios.py 에 고정돼 있다</a:t>
-            </a:r>
-            <a:endParaRPr lang="en-US" sz="850" dirty="0"/>
           </a:p>
         </p:txBody>
       </p:sp>
@@ -15047,47 +11392,8 @@
         </p:nvSpPr>
         <p:spPr>
           <a:xfrm>
-            <a:off x="658368" y="329184"/>
-            <a:ext cx="10872216" cy="256032"/>
-          </a:xfrm>
-          <a:prstGeom prst="rect">
-            <a:avLst/>
-          </a:prstGeom>
-          <a:noFill/>
-          <a:ln/>
-        </p:spPr>
-        <p:txBody>
-          <a:bodyPr wrap="square" lIns="0" tIns="0" rIns="0" bIns="0" rtlCol="0" anchor="ctr"/>
-          <a:lstStyle/>
-          <a:p>
-            <a:pPr indent="0" marL="0">
-              <a:buNone/>
-            </a:pPr>
-            <a:r>
-              <a:rPr lang="en-US" sz="1000" b="1" spc="140" kern="0" dirty="0">
-                <a:solidFill>
-                  <a:srgbClr val="6B6A66"/>
-                </a:solidFill>
-                <a:latin typeface="맑은 고딕" pitchFamily="34" charset="0"/>
-                <a:ea typeface="맑은 고딕" pitchFamily="34" charset="-122"/>
-                <a:cs typeface="맑은 고딕" pitchFamily="34" charset="-120"/>
-              </a:rPr>
-              <a:t>기술 적정성</a:t>
-            </a:r>
-            <a:endParaRPr lang="en-US" sz="1000" dirty="0"/>
-          </a:p>
-        </p:txBody>
-      </p:sp>
-      <p:sp>
-        <p:nvSpPr>
-          <p:cNvPr id="4" name="Text 2"/>
-          <p:cNvSpPr/>
-          <p:nvPr/>
-        </p:nvSpPr>
-        <p:spPr>
-          <a:xfrm>
-            <a:off x="658368" y="603504"/>
-            <a:ext cx="10872216" cy="530352"/>
+            <a:off x="658368" y="457200"/>
+            <a:ext cx="10872216" cy="548640"/>
           </a:xfrm>
           <a:prstGeom prst="rect">
             <a:avLst/>
@@ -15119,13 +11425,13 @@
       </p:sp>
       <p:sp>
         <p:nvSpPr>
-          <p:cNvPr id="5" name="Shape 3"/>
+          <p:cNvPr id="4" name="Shape 2"/>
           <p:cNvSpPr/>
           <p:nvPr/>
         </p:nvSpPr>
         <p:spPr>
           <a:xfrm>
-            <a:off x="658368" y="1188720"/>
+            <a:off x="658368" y="1078992"/>
             <a:ext cx="10872216" cy="10973"/>
           </a:xfrm>
           <a:prstGeom prst="rect">
@@ -15139,7 +11445,7 @@
       </p:sp>
       <p:sp>
         <p:nvSpPr>
-          <p:cNvPr id="6" name="Text 4"/>
+          <p:cNvPr id="5" name="Text 3"/>
           <p:cNvSpPr/>
           <p:nvPr/>
         </p:nvSpPr>
@@ -15170,7 +11476,7 @@
                 <a:ea typeface="맑은 고딕" pitchFamily="34" charset="-122"/>
                 <a:cs typeface="맑은 고딕" pitchFamily="34" charset="-120"/>
               </a:rPr>
-              <a:t>그림 1. 처리 흐름 — 초록 구간이 등급을 정한다 (결정론)</a:t>
+              <a:t>처리 흐름 — 초록 구간이 등급을 정한다 (결정론)</a:t>
             </a:r>
             <a:endParaRPr lang="en-US" sz="950" dirty="0"/>
           </a:p>
@@ -15178,7 +11484,7 @@
       </p:sp>
       <p:sp>
         <p:nvSpPr>
-          <p:cNvPr id="7" name="Shape 5"/>
+          <p:cNvPr id="6" name="Shape 4"/>
           <p:cNvSpPr/>
           <p:nvPr/>
         </p:nvSpPr>
@@ -15205,7 +11511,7 @@
       </p:sp>
       <p:sp>
         <p:nvSpPr>
-          <p:cNvPr id="8" name="Text 6"/>
+          <p:cNvPr id="7" name="Text 5"/>
           <p:cNvSpPr/>
           <p:nvPr/>
         </p:nvSpPr>
@@ -15244,7 +11550,7 @@
       </p:sp>
       <p:sp>
         <p:nvSpPr>
-          <p:cNvPr id="9" name="Text 7"/>
+          <p:cNvPr id="8" name="Text 6"/>
           <p:cNvSpPr/>
           <p:nvPr/>
         </p:nvSpPr>
@@ -15283,7 +11589,7 @@
       </p:sp>
       <p:sp>
         <p:nvSpPr>
-          <p:cNvPr id="10" name="Text 8"/>
+          <p:cNvPr id="9" name="Text 7"/>
           <p:cNvSpPr/>
           <p:nvPr/>
         </p:nvSpPr>
@@ -15322,7 +11628,7 @@
       </p:sp>
       <p:sp>
         <p:nvSpPr>
-          <p:cNvPr id="11" name="Shape 9"/>
+          <p:cNvPr id="10" name="Shape 8"/>
           <p:cNvSpPr/>
           <p:nvPr/>
         </p:nvSpPr>
@@ -15349,7 +11655,7 @@
       </p:sp>
       <p:sp>
         <p:nvSpPr>
-          <p:cNvPr id="12" name="Text 10"/>
+          <p:cNvPr id="11" name="Text 9"/>
           <p:cNvSpPr/>
           <p:nvPr/>
         </p:nvSpPr>
@@ -15388,7 +11694,7 @@
       </p:sp>
       <p:sp>
         <p:nvSpPr>
-          <p:cNvPr id="13" name="Text 11"/>
+          <p:cNvPr id="12" name="Text 10"/>
           <p:cNvSpPr/>
           <p:nvPr/>
         </p:nvSpPr>
@@ -15427,7 +11733,7 @@
       </p:sp>
       <p:sp>
         <p:nvSpPr>
-          <p:cNvPr id="14" name="Text 12"/>
+          <p:cNvPr id="13" name="Text 11"/>
           <p:cNvSpPr/>
           <p:nvPr/>
         </p:nvSpPr>
@@ -15466,7 +11772,7 @@
       </p:sp>
       <p:sp>
         <p:nvSpPr>
-          <p:cNvPr id="15" name="Shape 13"/>
+          <p:cNvPr id="14" name="Shape 12"/>
           <p:cNvSpPr/>
           <p:nvPr/>
         </p:nvSpPr>
@@ -15493,7 +11799,7 @@
       </p:sp>
       <p:sp>
         <p:nvSpPr>
-          <p:cNvPr id="16" name="Text 14"/>
+          <p:cNvPr id="15" name="Text 13"/>
           <p:cNvSpPr/>
           <p:nvPr/>
         </p:nvSpPr>
@@ -15532,7 +11838,7 @@
       </p:sp>
       <p:sp>
         <p:nvSpPr>
-          <p:cNvPr id="17" name="Text 15"/>
+          <p:cNvPr id="16" name="Text 14"/>
           <p:cNvSpPr/>
           <p:nvPr/>
         </p:nvSpPr>
@@ -15571,7 +11877,7 @@
       </p:sp>
       <p:sp>
         <p:nvSpPr>
-          <p:cNvPr id="18" name="Text 16"/>
+          <p:cNvPr id="17" name="Text 15"/>
           <p:cNvSpPr/>
           <p:nvPr/>
         </p:nvSpPr>
@@ -15610,7 +11916,7 @@
       </p:sp>
       <p:sp>
         <p:nvSpPr>
-          <p:cNvPr id="19" name="Shape 17"/>
+          <p:cNvPr id="18" name="Shape 16"/>
           <p:cNvSpPr/>
           <p:nvPr/>
         </p:nvSpPr>
@@ -15637,7 +11943,7 @@
       </p:sp>
       <p:sp>
         <p:nvSpPr>
-          <p:cNvPr id="20" name="Text 18"/>
+          <p:cNvPr id="19" name="Text 17"/>
           <p:cNvSpPr/>
           <p:nvPr/>
         </p:nvSpPr>
@@ -15676,7 +11982,7 @@
       </p:sp>
       <p:sp>
         <p:nvSpPr>
-          <p:cNvPr id="21" name="Text 19"/>
+          <p:cNvPr id="20" name="Text 18"/>
           <p:cNvSpPr/>
           <p:nvPr/>
         </p:nvSpPr>
@@ -15715,7 +12021,7 @@
       </p:sp>
       <p:sp>
         <p:nvSpPr>
-          <p:cNvPr id="22" name="Text 20"/>
+          <p:cNvPr id="21" name="Text 19"/>
           <p:cNvSpPr/>
           <p:nvPr/>
         </p:nvSpPr>
@@ -15754,7 +12060,7 @@
       </p:sp>
       <p:sp>
         <p:nvSpPr>
-          <p:cNvPr id="23" name="Shape 21"/>
+          <p:cNvPr id="22" name="Shape 20"/>
           <p:cNvSpPr/>
           <p:nvPr/>
         </p:nvSpPr>
@@ -15781,7 +12087,7 @@
       </p:sp>
       <p:sp>
         <p:nvSpPr>
-          <p:cNvPr id="24" name="Text 22"/>
+          <p:cNvPr id="23" name="Text 21"/>
           <p:cNvSpPr/>
           <p:nvPr/>
         </p:nvSpPr>
@@ -15820,7 +12126,7 @@
       </p:sp>
       <p:sp>
         <p:nvSpPr>
-          <p:cNvPr id="25" name="Text 23"/>
+          <p:cNvPr id="24" name="Text 22"/>
           <p:cNvSpPr/>
           <p:nvPr/>
         </p:nvSpPr>
@@ -15859,7 +12165,7 @@
       </p:sp>
       <p:sp>
         <p:nvSpPr>
-          <p:cNvPr id="26" name="Text 24"/>
+          <p:cNvPr id="25" name="Text 23"/>
           <p:cNvSpPr/>
           <p:nvPr/>
         </p:nvSpPr>
@@ -15898,7 +12204,7 @@
       </p:sp>
       <p:sp>
         <p:nvSpPr>
-          <p:cNvPr id="27" name="Shape 25"/>
+          <p:cNvPr id="26" name="Shape 24"/>
           <p:cNvSpPr/>
           <p:nvPr/>
         </p:nvSpPr>
@@ -15925,7 +12231,7 @@
       </p:sp>
       <p:sp>
         <p:nvSpPr>
-          <p:cNvPr id="28" name="Text 26"/>
+          <p:cNvPr id="27" name="Text 25"/>
           <p:cNvSpPr/>
           <p:nvPr/>
         </p:nvSpPr>
@@ -15964,7 +12270,7 @@
       </p:sp>
       <p:sp>
         <p:nvSpPr>
-          <p:cNvPr id="29" name="Text 27"/>
+          <p:cNvPr id="28" name="Text 26"/>
           <p:cNvSpPr/>
           <p:nvPr/>
         </p:nvSpPr>
@@ -16003,7 +12309,7 @@
       </p:sp>
       <p:sp>
         <p:nvSpPr>
-          <p:cNvPr id="30" name="Text 28"/>
+          <p:cNvPr id="29" name="Text 27"/>
           <p:cNvSpPr/>
           <p:nvPr/>
         </p:nvSpPr>
@@ -16034,7 +12340,7 @@
                 <a:ea typeface="맑은 고딕" pitchFamily="34" charset="-122"/>
                 <a:cs typeface="맑은 고딕" pitchFamily="34" charset="-120"/>
               </a:rPr>
-              <a:t>표 6. 층별 구현 상태</a:t>
+              <a:t>층별 구현 상태</a:t>
             </a:r>
             <a:endParaRPr lang="en-US" sz="950" dirty="0"/>
           </a:p>
@@ -18208,7 +14514,7 @@
                           <a:ea typeface="맑은 고딕" pitchFamily="34" charset="-122"/>
                           <a:cs typeface="맑은 고딕" pitchFamily="34" charset="-120"/>
                         </a:rPr>
-                        <a:t>구현</a:t>
+                        <a:t>설계</a:t>
                       </a:r>
                       <a:endParaRPr lang="en-US" sz="950" dirty="0">
                         <a:latin typeface="맑은 고딕" charset="0"/>
@@ -18266,7 +14572,7 @@
       </p:graphicFrame>
       <p:sp>
         <p:nvSpPr>
-          <p:cNvPr id="32" name="Text 29"/>
+          <p:cNvPr id="31" name="Text 28"/>
           <p:cNvSpPr/>
           <p:nvPr/>
         </p:nvSpPr>
@@ -18305,7 +14611,7 @@
       </p:sp>
       <p:sp>
         <p:nvSpPr>
-          <p:cNvPr id="33" name="Shape 30"/>
+          <p:cNvPr id="32" name="Shape 29"/>
           <p:cNvSpPr/>
           <p:nvPr/>
         </p:nvSpPr>
@@ -18327,7 +14633,7 @@
       </p:sp>
       <p:sp>
         <p:nvSpPr>
-          <p:cNvPr id="34" name="Shape 31"/>
+          <p:cNvPr id="33" name="Shape 30"/>
           <p:cNvSpPr/>
           <p:nvPr/>
         </p:nvSpPr>
@@ -18347,7 +14653,7 @@
       </p:sp>
       <p:sp>
         <p:nvSpPr>
-          <p:cNvPr id="35" name="Text 32"/>
+          <p:cNvPr id="34" name="Text 31"/>
           <p:cNvSpPr/>
           <p:nvPr/>
         </p:nvSpPr>
@@ -18386,7 +14692,7 @@
       </p:sp>
       <p:sp>
         <p:nvSpPr>
-          <p:cNvPr id="36" name="Text 33"/>
+          <p:cNvPr id="35" name="Text 32"/>
           <p:cNvSpPr/>
           <p:nvPr/>
         </p:nvSpPr>
@@ -18425,7 +14731,7 @@
       </p:sp>
       <p:sp>
         <p:nvSpPr>
-          <p:cNvPr id="37" name="Text 34"/>
+          <p:cNvPr id="36" name="Text 33"/>
           <p:cNvSpPr/>
           <p:nvPr/>
         </p:nvSpPr>
@@ -18464,7 +14770,7 @@
       </p:sp>
       <p:sp>
         <p:nvSpPr>
-          <p:cNvPr id="38" name="Shape 35"/>
+          <p:cNvPr id="37" name="Shape 34"/>
           <p:cNvSpPr/>
           <p:nvPr/>
         </p:nvSpPr>
@@ -18486,7 +14792,7 @@
       </p:sp>
       <p:sp>
         <p:nvSpPr>
-          <p:cNvPr id="39" name="Shape 36"/>
+          <p:cNvPr id="38" name="Shape 35"/>
           <p:cNvSpPr/>
           <p:nvPr/>
         </p:nvSpPr>
@@ -18506,7 +14812,7 @@
       </p:sp>
       <p:sp>
         <p:nvSpPr>
-          <p:cNvPr id="40" name="Text 37"/>
+          <p:cNvPr id="39" name="Text 36"/>
           <p:cNvSpPr/>
           <p:nvPr/>
         </p:nvSpPr>
@@ -18545,7 +14851,7 @@
       </p:sp>
       <p:sp>
         <p:nvSpPr>
-          <p:cNvPr id="41" name="Text 38"/>
+          <p:cNvPr id="40" name="Text 37"/>
           <p:cNvSpPr/>
           <p:nvPr/>
         </p:nvSpPr>
@@ -18584,7 +14890,7 @@
       </p:sp>
       <p:sp>
         <p:nvSpPr>
-          <p:cNvPr id="42" name="Text 39"/>
+          <p:cNvPr id="41" name="Text 38"/>
           <p:cNvSpPr/>
           <p:nvPr/>
         </p:nvSpPr>
@@ -18623,7 +14929,7 @@
       </p:sp>
       <p:sp>
         <p:nvSpPr>
-          <p:cNvPr id="43" name="Shape 40"/>
+          <p:cNvPr id="42" name="Shape 39"/>
           <p:cNvSpPr/>
           <p:nvPr/>
         </p:nvSpPr>
@@ -18645,7 +14951,7 @@
       </p:sp>
       <p:sp>
         <p:nvSpPr>
-          <p:cNvPr id="44" name="Shape 41"/>
+          <p:cNvPr id="43" name="Shape 40"/>
           <p:cNvSpPr/>
           <p:nvPr/>
         </p:nvSpPr>
@@ -18665,7 +14971,7 @@
       </p:sp>
       <p:sp>
         <p:nvSpPr>
-          <p:cNvPr id="45" name="Text 42"/>
+          <p:cNvPr id="44" name="Text 41"/>
           <p:cNvSpPr/>
           <p:nvPr/>
         </p:nvSpPr>
@@ -18704,7 +15010,7 @@
       </p:sp>
       <p:sp>
         <p:nvSpPr>
-          <p:cNvPr id="46" name="Text 43"/>
+          <p:cNvPr id="45" name="Text 42"/>
           <p:cNvSpPr/>
           <p:nvPr/>
         </p:nvSpPr>
@@ -18743,7 +15049,7 @@
       </p:sp>
       <p:sp>
         <p:nvSpPr>
-          <p:cNvPr id="47" name="Text 44"/>
+          <p:cNvPr id="46" name="Text 43"/>
           <p:cNvSpPr/>
           <p:nvPr/>
         </p:nvSpPr>
@@ -18782,7 +15088,7 @@
       </p:sp>
       <p:sp>
         <p:nvSpPr>
-          <p:cNvPr id="48" name="Shape 45"/>
+          <p:cNvPr id="47" name="Shape 44"/>
           <p:cNvSpPr/>
           <p:nvPr/>
         </p:nvSpPr>
@@ -18804,7 +15110,7 @@
       </p:sp>
       <p:sp>
         <p:nvSpPr>
-          <p:cNvPr id="49" name="Text 46"/>
+          <p:cNvPr id="48" name="Text 45"/>
           <p:cNvSpPr/>
           <p:nvPr/>
         </p:nvSpPr>
@@ -18835,7 +15141,7 @@
                 <a:ea typeface="맑은 고딕" pitchFamily="34" charset="-122"/>
                 <a:cs typeface="맑은 고딕" pitchFamily="34" charset="-120"/>
               </a:rPr>
-              <a:t>INV-2·3·7</a:t>
+              <a:t>INV-1·7</a:t>
             </a:r>
             <a:endParaRPr lang="en-US" sz="850" dirty="0"/>
           </a:p>
@@ -18843,7 +15149,7 @@
       </p:sp>
       <p:sp>
         <p:nvSpPr>
-          <p:cNvPr id="50" name="Text 47"/>
+          <p:cNvPr id="49" name="Text 46"/>
           <p:cNvSpPr/>
           <p:nvPr/>
         </p:nvSpPr>
@@ -18874,7 +15180,7 @@
                 <a:ea typeface="맑은 고딕" pitchFamily="34" charset="-122"/>
                 <a:cs typeface="맑은 고딕" pitchFamily="34" charset="-120"/>
               </a:rPr>
-              <a:t>승인 없이 통과 불가 · 1회용 · 건·계좌 결박</a:t>
+              <a:t>외부 호출 · 모델 자가 승인 차단</a:t>
             </a:r>
             <a:endParaRPr lang="en-US" sz="900" dirty="0"/>
           </a:p>
@@ -18882,7 +15188,7 @@
       </p:sp>
       <p:sp>
         <p:nvSpPr>
-          <p:cNvPr id="51" name="Text 48"/>
+          <p:cNvPr id="50" name="Text 47"/>
           <p:cNvSpPr/>
           <p:nvPr/>
         </p:nvSpPr>
@@ -18913,7 +15219,7 @@
                 <a:ea typeface="맑은 고딕" pitchFamily="34" charset="-122"/>
                 <a:cs typeface="맑은 고딕" pitchFamily="34" charset="-120"/>
               </a:rPr>
-              <a:t>id 만 받아 원장 조회 — T1~T5·T10 통과</a:t>
+              <a:t>게이트 구현과 함께 활성화</a:t>
             </a:r>
             <a:endParaRPr lang="en-US" sz="800" dirty="0"/>
           </a:p>
@@ -18921,7 +15227,7 @@
       </p:sp>
       <p:sp>
         <p:nvSpPr>
-          <p:cNvPr id="52" name="Text 49"/>
+          <p:cNvPr id="51" name="Text 48"/>
           <p:cNvSpPr/>
           <p:nvPr/>
         </p:nvSpPr>
@@ -18960,7 +15266,7 @@
       </p:sp>
       <p:sp>
         <p:nvSpPr>
-          <p:cNvPr id="53" name="Shape 50"/>
+          <p:cNvPr id="52" name="Shape 49"/>
           <p:cNvSpPr/>
           <p:nvPr/>
         </p:nvSpPr>
@@ -18982,7 +15288,7 @@
       </p:sp>
       <p:sp>
         <p:nvSpPr>
-          <p:cNvPr id="54" name="Text 51"/>
+          <p:cNvPr id="53" name="Text 50"/>
           <p:cNvSpPr/>
           <p:nvPr/>
         </p:nvSpPr>
@@ -19021,7 +15327,7 @@
       </p:sp>
       <p:sp>
         <p:nvSpPr>
-          <p:cNvPr id="55" name="Text 52"/>
+          <p:cNvPr id="54" name="Text 51"/>
           <p:cNvSpPr/>
           <p:nvPr/>
         </p:nvSpPr>
@@ -19063,7 +15369,7 @@
       </p:sp>
       <p:sp>
         <p:nvSpPr>
-          <p:cNvPr id="56" name="Shape 53"/>
+          <p:cNvPr id="55" name="Shape 52"/>
           <p:cNvSpPr/>
           <p:nvPr/>
         </p:nvSpPr>
@@ -19085,7 +15391,7 @@
       </p:sp>
       <p:sp>
         <p:nvSpPr>
-          <p:cNvPr id="57" name="Text 54"/>
+          <p:cNvPr id="56" name="Text 53"/>
           <p:cNvSpPr/>
           <p:nvPr/>
         </p:nvSpPr>
@@ -19124,7 +15430,7 @@
       </p:sp>
       <p:sp>
         <p:nvSpPr>
-          <p:cNvPr id="58" name="Text 55"/>
+          <p:cNvPr id="57" name="Text 54"/>
           <p:cNvSpPr/>
           <p:nvPr/>
         </p:nvSpPr>
@@ -19166,7 +15472,7 @@
       </p:sp>
       <p:sp>
         <p:nvSpPr>
-          <p:cNvPr id="59" name="Shape 56"/>
+          <p:cNvPr id="58" name="Shape 55"/>
           <p:cNvSpPr/>
           <p:nvPr/>
         </p:nvSpPr>
@@ -19188,7 +15494,7 @@
       </p:sp>
       <p:sp>
         <p:nvSpPr>
-          <p:cNvPr id="60" name="Text 57"/>
+          <p:cNvPr id="59" name="Text 56"/>
           <p:cNvSpPr/>
           <p:nvPr/>
         </p:nvSpPr>
@@ -19227,7 +15533,7 @@
       </p:sp>
       <p:sp>
         <p:nvSpPr>
-          <p:cNvPr id="61" name="Text 58"/>
+          <p:cNvPr id="60" name="Text 57"/>
           <p:cNvSpPr/>
           <p:nvPr/>
         </p:nvSpPr>
@@ -19262,45 +15568,6 @@
                 <a:cs typeface="맑은 고딕" pitchFamily="34" charset="-120"/>
               </a:rPr>
               <a:t>반환된 근거 구간이 계약서 원문에 없으면 그 값을 버린다. 인젝션이 노리는 것은 등급이 아니라 추출값이기 때문이다.</a:t>
-            </a:r>
-            <a:endParaRPr lang="en-US" sz="850" dirty="0"/>
-          </a:p>
-        </p:txBody>
-      </p:sp>
-      <p:sp>
-        <p:nvSpPr>
-          <p:cNvPr id="62" name="Text 59"/>
-          <p:cNvSpPr/>
-          <p:nvPr/>
-        </p:nvSpPr>
-        <p:spPr>
-          <a:xfrm>
-            <a:off x="658368" y="6382512"/>
-            <a:ext cx="9774936" cy="237744"/>
-          </a:xfrm>
-          <a:prstGeom prst="rect">
-            <a:avLst/>
-          </a:prstGeom>
-          <a:noFill/>
-          <a:ln/>
-        </p:spPr>
-        <p:txBody>
-          <a:bodyPr wrap="square" lIns="0" tIns="0" rIns="0" bIns="0" rtlCol="0" anchor="ctr"/>
-          <a:lstStyle/>
-          <a:p>
-            <a:pPr indent="0" marL="0">
-              <a:buNone/>
-            </a:pPr>
-            <a:r>
-              <a:rPr lang="en-US" sz="850" dirty="0">
-                <a:solidFill>
-                  <a:srgbClr val="6B6A66"/>
-                </a:solidFill>
-                <a:latin typeface="맑은 고딕" pitchFamily="34" charset="0"/>
-                <a:ea typeface="맑은 고딕" pitchFamily="34" charset="-122"/>
-                <a:cs typeface="맑은 고딕" pitchFamily="34" charset="-120"/>
-              </a:rPr>
-              <a:t>출처 — workflows/kb-payee-guard.workflow.yaml (12 nodes) · docs/02_기술명세서.md §2·§10 · INV-1(판정 엔진 외부 호출 금지)은 순수 함수라 사실상 만족하나 AST 검사기는 미구현이다 · L5가 설계 단계인 것은 현재로선 이점이다 — 판정도 근거 문장도 전부 결정론이라 삽입된 지시가 사용자 설명까지 오염시킬 경로가 없다</a:t>
             </a:r>
             <a:endParaRPr lang="en-US" sz="850" dirty="0"/>
           </a:p>
@@ -19385,47 +15652,8 @@
         </p:nvSpPr>
         <p:spPr>
           <a:xfrm>
-            <a:off x="658368" y="329184"/>
-            <a:ext cx="10872216" cy="256032"/>
-          </a:xfrm>
-          <a:prstGeom prst="rect">
-            <a:avLst/>
-          </a:prstGeom>
-          <a:noFill/>
-          <a:ln/>
-        </p:spPr>
-        <p:txBody>
-          <a:bodyPr wrap="square" lIns="0" tIns="0" rIns="0" bIns="0" rtlCol="0" anchor="ctr"/>
-          <a:lstStyle/>
-          <a:p>
-            <a:pPr indent="0" marL="0">
-              <a:buNone/>
-            </a:pPr>
-            <a:r>
-              <a:rPr lang="en-US" sz="1000" b="1" spc="140" kern="0" dirty="0">
-                <a:solidFill>
-                  <a:srgbClr val="6B6A66"/>
-                </a:solidFill>
-                <a:latin typeface="맑은 고딕" pitchFamily="34" charset="0"/>
-                <a:ea typeface="맑은 고딕" pitchFamily="34" charset="-122"/>
-                <a:cs typeface="맑은 고딕" pitchFamily="34" charset="-120"/>
-              </a:rPr>
-              <a:t>기술 적정성</a:t>
-            </a:r>
-            <a:endParaRPr lang="en-US" sz="1000" dirty="0"/>
-          </a:p>
-        </p:txBody>
-      </p:sp>
-      <p:sp>
-        <p:nvSpPr>
-          <p:cNvPr id="4" name="Text 2"/>
-          <p:cNvSpPr/>
-          <p:nvPr/>
-        </p:nvSpPr>
-        <p:spPr>
-          <a:xfrm>
-            <a:off x="658368" y="603504"/>
-            <a:ext cx="10872216" cy="530352"/>
+            <a:off x="658368" y="457200"/>
+            <a:ext cx="10872216" cy="548640"/>
           </a:xfrm>
           <a:prstGeom prst="rect">
             <a:avLst/>
@@ -19457,13 +15685,13 @@
       </p:sp>
       <p:sp>
         <p:nvSpPr>
-          <p:cNvPr id="5" name="Shape 3"/>
+          <p:cNvPr id="4" name="Shape 2"/>
           <p:cNvSpPr/>
           <p:nvPr/>
         </p:nvSpPr>
         <p:spPr>
           <a:xfrm>
-            <a:off x="658368" y="1188720"/>
+            <a:off x="658368" y="1078992"/>
             <a:ext cx="10872216" cy="10973"/>
           </a:xfrm>
           <a:prstGeom prst="rect">
@@ -19477,7 +15705,7 @@
       </p:sp>
       <p:sp>
         <p:nvSpPr>
-          <p:cNvPr id="6" name="Text 4"/>
+          <p:cNvPr id="5" name="Text 3"/>
           <p:cNvSpPr/>
           <p:nvPr/>
         </p:nvSpPr>
@@ -19508,7 +15736,7 @@
                 <a:ea typeface="맑은 고딕" pitchFamily="34" charset="-122"/>
                 <a:cs typeface="맑은 고딕" pitchFamily="34" charset="-120"/>
               </a:rPr>
-              <a:t>표 7. 규칙 테이블 발췌 — 평가 순서 R1 → … → R9 · R11 → R0, first-match wins</a:t>
+              <a:t>규칙 테이블 발췌 — 평가 순서 R1 → … → R9 · R11 → R0, first-match wins</a:t>
             </a:r>
             <a:endParaRPr lang="en-US" sz="950" dirty="0"/>
           </a:p>
@@ -21401,7 +17629,7 @@
       </p:graphicFrame>
       <p:sp>
         <p:nvSpPr>
-          <p:cNvPr id="8" name="Shape 5"/>
+          <p:cNvPr id="7" name="Shape 4"/>
           <p:cNvSpPr/>
           <p:nvPr/>
         </p:nvSpPr>
@@ -21423,7 +17651,7 @@
       </p:sp>
       <p:sp>
         <p:nvSpPr>
-          <p:cNvPr id="9" name="Shape 6"/>
+          <p:cNvPr id="8" name="Shape 5"/>
           <p:cNvSpPr/>
           <p:nvPr/>
         </p:nvSpPr>
@@ -21443,7 +17671,7 @@
       </p:sp>
       <p:sp>
         <p:nvSpPr>
-          <p:cNvPr id="10" name="Text 7"/>
+          <p:cNvPr id="9" name="Text 6"/>
           <p:cNvSpPr/>
           <p:nvPr/>
         </p:nvSpPr>
@@ -21506,7 +17734,7 @@
       </p:sp>
       <p:sp>
         <p:nvSpPr>
-          <p:cNvPr id="11" name="Text 8"/>
+          <p:cNvPr id="10" name="Text 7"/>
           <p:cNvSpPr/>
           <p:nvPr/>
         </p:nvSpPr>
@@ -21537,7 +17765,7 @@
                 <a:ea typeface="맑은 고딕" pitchFamily="34" charset="-122"/>
                 <a:cs typeface="맑은 고딕" pitchFamily="34" charset="-120"/>
               </a:rPr>
-              <a:t>표 8. 판정 축 신호</a:t>
+              <a:t>판정 축 신호</a:t>
             </a:r>
             <a:endParaRPr lang="en-US" sz="950" dirty="0"/>
           </a:p>
@@ -22403,7 +18631,7 @@
       </p:graphicFrame>
       <p:sp>
         <p:nvSpPr>
-          <p:cNvPr id="13" name="Shape 9"/>
+          <p:cNvPr id="12" name="Shape 8"/>
           <p:cNvSpPr/>
           <p:nvPr/>
         </p:nvSpPr>
@@ -22425,7 +18653,7 @@
       </p:sp>
       <p:sp>
         <p:nvSpPr>
-          <p:cNvPr id="14" name="Text 10"/>
+          <p:cNvPr id="13" name="Text 9"/>
           <p:cNvSpPr/>
           <p:nvPr/>
         </p:nvSpPr>
@@ -22483,45 +18711,6 @@
               <a:t>도달성 전수 검사(T15)가 규칙 11개 각각에 도달 가능한 신호 조합이 있는지 확인한다. 단 T15가 보는 것은 조합의 도달성이고, 실제 입력이 그 조합을 만드는지는 아직 자동 검사가 없다 (§11.3).</a:t>
             </a:r>
             <a:endParaRPr lang="en-US" sz="950" dirty="0"/>
-          </a:p>
-        </p:txBody>
-      </p:sp>
-      <p:sp>
-        <p:nvSpPr>
-          <p:cNvPr id="15" name="Text 11"/>
-          <p:cNvSpPr/>
-          <p:nvPr/>
-        </p:nvSpPr>
-        <p:spPr>
-          <a:xfrm>
-            <a:off x="658368" y="6382512"/>
-            <a:ext cx="9774936" cy="237744"/>
-          </a:xfrm>
-          <a:prstGeom prst="rect">
-            <a:avLst/>
-          </a:prstGeom>
-          <a:noFill/>
-          <a:ln/>
-        </p:spPr>
-        <p:txBody>
-          <a:bodyPr wrap="square" lIns="0" tIns="0" rIns="0" bIns="0" rtlCol="0" anchor="ctr"/>
-          <a:lstStyle/>
-          <a:p>
-            <a:pPr indent="0" marL="0">
-              <a:buNone/>
-            </a:pPr>
-            <a:r>
-              <a:rPr lang="en-US" sz="850" dirty="0">
-                <a:solidFill>
-                  <a:srgbClr val="6B6A66"/>
-                </a:solidFill>
-                <a:latin typeface="맑은 고딕" pitchFamily="34" charset="0"/>
-                <a:ea typeface="맑은 고딕" pitchFamily="34" charset="-122"/>
-                <a:cs typeface="맑은 고딕" pitchFamily="34" charset="-120"/>
-              </a:rPr>
-              <a:t>출처 — src/kb_payee_guard/rules.py · signals.py · docs/02_기술명세서.md §4.2·§4.4·§4.4-bis · 규칙 전문 11개는 명세서 §4.4 참조</a:t>
-            </a:r>
-            <a:endParaRPr lang="en-US" sz="850" dirty="0"/>
           </a:p>
         </p:txBody>
       </p:sp>
@@ -22604,47 +18793,8 @@
         </p:nvSpPr>
         <p:spPr>
           <a:xfrm>
-            <a:off x="658368" y="329184"/>
-            <a:ext cx="10872216" cy="256032"/>
-          </a:xfrm>
-          <a:prstGeom prst="rect">
-            <a:avLst/>
-          </a:prstGeom>
-          <a:noFill/>
-          <a:ln/>
-        </p:spPr>
-        <p:txBody>
-          <a:bodyPr wrap="square" lIns="0" tIns="0" rIns="0" bIns="0" rtlCol="0" anchor="ctr"/>
-          <a:lstStyle/>
-          <a:p>
-            <a:pPr indent="0" marL="0">
-              <a:buNone/>
-            </a:pPr>
-            <a:r>
-              <a:rPr lang="en-US" sz="1000" b="1" spc="140" kern="0" dirty="0">
-                <a:solidFill>
-                  <a:srgbClr val="6B6A66"/>
-                </a:solidFill>
-                <a:latin typeface="맑은 고딕" pitchFamily="34" charset="0"/>
-                <a:ea typeface="맑은 고딕" pitchFamily="34" charset="-122"/>
-                <a:cs typeface="맑은 고딕" pitchFamily="34" charset="-120"/>
-              </a:rPr>
-              <a:t>기술 적정성</a:t>
-            </a:r>
-            <a:endParaRPr lang="en-US" sz="1000" dirty="0"/>
-          </a:p>
-        </p:txBody>
-      </p:sp>
-      <p:sp>
-        <p:nvSpPr>
-          <p:cNvPr id="4" name="Text 2"/>
-          <p:cNvSpPr/>
-          <p:nvPr/>
-        </p:nvSpPr>
-        <p:spPr>
-          <a:xfrm>
-            <a:off x="658368" y="603504"/>
-            <a:ext cx="10872216" cy="530352"/>
+            <a:off x="658368" y="457200"/>
+            <a:ext cx="10872216" cy="548640"/>
           </a:xfrm>
           <a:prstGeom prst="rect">
             <a:avLst/>
@@ -22676,13 +18826,13 @@
       </p:sp>
       <p:sp>
         <p:nvSpPr>
-          <p:cNvPr id="5" name="Shape 3"/>
+          <p:cNvPr id="4" name="Shape 2"/>
           <p:cNvSpPr/>
           <p:nvPr/>
         </p:nvSpPr>
         <p:spPr>
           <a:xfrm>
-            <a:off x="658368" y="1188720"/>
+            <a:off x="658368" y="1078992"/>
             <a:ext cx="10872216" cy="10973"/>
           </a:xfrm>
           <a:prstGeom prst="rect">
@@ -22696,7 +18846,7 @@
       </p:sp>
       <p:sp>
         <p:nvSpPr>
-          <p:cNvPr id="6" name="Text 4"/>
+          <p:cNvPr id="5" name="Text 3"/>
           <p:cNvSpPr/>
           <p:nvPr/>
         </p:nvSpPr>
@@ -22735,7 +18885,7 @@
       </p:sp>
       <p:sp>
         <p:nvSpPr>
-          <p:cNvPr id="7" name="Text 5"/>
+          <p:cNvPr id="6" name="Text 4"/>
           <p:cNvSpPr/>
           <p:nvPr/>
         </p:nvSpPr>
@@ -22766,7 +18916,7 @@
                 <a:ea typeface="맑은 고딕" pitchFamily="34" charset="-122"/>
                 <a:cs typeface="맑은 고딕" pitchFamily="34" charset="-120"/>
               </a:rPr>
-              <a:t>표 11. 런타임 · 실행 환경</a:t>
+              <a:t>런타임 · 실행 환경</a:t>
             </a:r>
             <a:endParaRPr lang="en-US" sz="950" dirty="0"/>
           </a:p>
@@ -23298,7 +19448,7 @@
                           <a:ea typeface="맑은 고딕" pitchFamily="34" charset="-122"/>
                           <a:cs typeface="맑은 고딕" pitchFamily="34" charset="-120"/>
                         </a:rPr>
-                        <a:t>transport 주입 — 네트워크·API 키 없이 122건이 결정론으로 실행된다</a:t>
+                        <a:t>transport 주입 — 네트워크·API 키 없이 128건이 결정론으로 실행된다</a:t>
                       </a:r>
                       <a:endParaRPr lang="en-US" sz="900" dirty="0">
                         <a:latin typeface="맑은 고딕" charset="0"/>
@@ -23908,7 +20058,7 @@
       </p:graphicFrame>
       <p:sp>
         <p:nvSpPr>
-          <p:cNvPr id="9" name="Text 6"/>
+          <p:cNvPr id="8" name="Text 5"/>
           <p:cNvSpPr/>
           <p:nvPr/>
         </p:nvSpPr>
@@ -23939,7 +20089,7 @@
                 <a:ea typeface="맑은 고딕" pitchFamily="34" charset="-122"/>
                 <a:cs typeface="맑은 고딕" pitchFamily="34" charset="-120"/>
               </a:rPr>
-              <a:t>표 12. 추출 품질을 지탱하는 장치 — 전부 구현 중 발견한 실패에서 나왔다</a:t>
+              <a:t>추출 품질을 지탱하는 장치 — 전부 구현 중 발견한 실패에서 나왔다</a:t>
             </a:r>
             <a:endParaRPr lang="en-US" sz="950" dirty="0"/>
           </a:p>
@@ -24805,7 +20955,7 @@
       </p:graphicFrame>
       <p:sp>
         <p:nvSpPr>
-          <p:cNvPr id="11" name="Text 7"/>
+          <p:cNvPr id="10" name="Text 6"/>
           <p:cNvSpPr/>
           <p:nvPr/>
         </p:nvSpPr>
@@ -24844,7 +20994,7 @@
       </p:sp>
       <p:sp>
         <p:nvSpPr>
-          <p:cNvPr id="12" name="Shape 8"/>
+          <p:cNvPr id="11" name="Shape 7"/>
           <p:cNvSpPr/>
           <p:nvPr/>
         </p:nvSpPr>
@@ -24866,7 +21016,7 @@
       </p:sp>
       <p:sp>
         <p:nvSpPr>
-          <p:cNvPr id="13" name="Text 9"/>
+          <p:cNvPr id="12" name="Text 8"/>
           <p:cNvSpPr/>
           <p:nvPr/>
         </p:nvSpPr>
@@ -24998,7 +21148,7 @@
       </p:sp>
       <p:sp>
         <p:nvSpPr>
-          <p:cNvPr id="14" name="Shape 10"/>
+          <p:cNvPr id="13" name="Shape 9"/>
           <p:cNvSpPr/>
           <p:nvPr/>
         </p:nvSpPr>
@@ -25020,7 +21170,7 @@
       </p:sp>
       <p:sp>
         <p:nvSpPr>
-          <p:cNvPr id="15" name="Text 11"/>
+          <p:cNvPr id="14" name="Text 10"/>
           <p:cNvSpPr/>
           <p:nvPr/>
         </p:nvSpPr>
@@ -25098,7 +21248,7 @@
       </p:sp>
       <p:sp>
         <p:nvSpPr>
-          <p:cNvPr id="16" name="Shape 12"/>
+          <p:cNvPr id="15" name="Shape 11"/>
           <p:cNvSpPr/>
           <p:nvPr/>
         </p:nvSpPr>
@@ -25120,7 +21270,7 @@
       </p:sp>
       <p:sp>
         <p:nvSpPr>
-          <p:cNvPr id="17" name="Shape 13"/>
+          <p:cNvPr id="16" name="Shape 12"/>
           <p:cNvSpPr/>
           <p:nvPr/>
         </p:nvSpPr>
@@ -25140,7 +21290,7 @@
       </p:sp>
       <p:sp>
         <p:nvSpPr>
-          <p:cNvPr id="18" name="Text 14"/>
+          <p:cNvPr id="17" name="Text 13"/>
           <p:cNvSpPr/>
           <p:nvPr/>
         </p:nvSpPr>
@@ -25195,46 +21345,7 @@
                 <a:ea typeface="맑은 고딕" pitchFamily="34" charset="-122"/>
                 <a:cs typeface="맑은 고딕" pitchFamily="34" charset="-120"/>
               </a:rPr>
-              <a:t>zip을 풀어 심사자 환경을 재현했더니 프레임워크 상대경로 의존으로 13건이 깨졌다. 비공개 저장소는 클론할 수 없으므로 폴백을 넣어 전부 통과시켰다. 현재 122건이다.</a:t>
-            </a:r>
-            <a:endParaRPr lang="en-US" sz="850" dirty="0"/>
-          </a:p>
-        </p:txBody>
-      </p:sp>
-      <p:sp>
-        <p:nvSpPr>
-          <p:cNvPr id="19" name="Text 15"/>
-          <p:cNvSpPr/>
-          <p:nvPr/>
-        </p:nvSpPr>
-        <p:spPr>
-          <a:xfrm>
-            <a:off x="658368" y="6382512"/>
-            <a:ext cx="9774936" cy="237744"/>
-          </a:xfrm>
-          <a:prstGeom prst="rect">
-            <a:avLst/>
-          </a:prstGeom>
-          <a:noFill/>
-          <a:ln/>
-        </p:spPr>
-        <p:txBody>
-          <a:bodyPr wrap="square" lIns="0" tIns="0" rIns="0" bIns="0" rtlCol="0" anchor="ctr"/>
-          <a:lstStyle/>
-          <a:p>
-            <a:pPr indent="0" marL="0">
-              <a:buNone/>
-            </a:pPr>
-            <a:r>
-              <a:rPr lang="en-US" sz="850" dirty="0">
-                <a:solidFill>
-                  <a:srgbClr val="6B6A66"/>
-                </a:solidFill>
-                <a:latin typeface="맑은 고딕" pitchFamily="34" charset="0"/>
-                <a:ea typeface="맑은 고딕" pitchFamily="34" charset="-122"/>
-                <a:cs typeface="맑은 고딕" pitchFamily="34" charset="-120"/>
-              </a:rPr>
-              <a:t>출처 — src/kb_payee_guard/ (models · signals · rules · extract · llm_extract · evaluate · _provider_fallback) · docs/02_기술명세서.md §4.1·§10 · 커밋 3b2e796 · 7ffdc8e</a:t>
+              <a:t>zip을 풀어 심사자 환경을 재현했더니 프레임워크 상대경로 의존으로 13건이 깨졌다. 비공개 저장소는 클론할 수 없으므로 폴백을 넣어 전부 통과시켰다.</a:t>
             </a:r>
             <a:endParaRPr lang="en-US" sz="850" dirty="0"/>
           </a:p>
@@ -25319,47 +21430,8 @@
         </p:nvSpPr>
         <p:spPr>
           <a:xfrm>
-            <a:off x="658368" y="329184"/>
-            <a:ext cx="10872216" cy="256032"/>
-          </a:xfrm>
-          <a:prstGeom prst="rect">
-            <a:avLst/>
-          </a:prstGeom>
-          <a:noFill/>
-          <a:ln/>
-        </p:spPr>
-        <p:txBody>
-          <a:bodyPr wrap="square" lIns="0" tIns="0" rIns="0" bIns="0" rtlCol="0" anchor="ctr"/>
-          <a:lstStyle/>
-          <a:p>
-            <a:pPr indent="0" marL="0">
-              <a:buNone/>
-            </a:pPr>
-            <a:r>
-              <a:rPr lang="en-US" sz="1000" b="1" spc="140" kern="0" dirty="0">
-                <a:solidFill>
-                  <a:srgbClr val="6B6A66"/>
-                </a:solidFill>
-                <a:latin typeface="맑은 고딕" pitchFamily="34" charset="0"/>
-                <a:ea typeface="맑은 고딕" pitchFamily="34" charset="-122"/>
-                <a:cs typeface="맑은 고딕" pitchFamily="34" charset="-120"/>
-              </a:rPr>
-              <a:t>창의성 · 효과 · 실측</a:t>
-            </a:r>
-            <a:endParaRPr lang="en-US" sz="1000" dirty="0"/>
-          </a:p>
-        </p:txBody>
-      </p:sp>
-      <p:sp>
-        <p:nvSpPr>
-          <p:cNvPr id="4" name="Text 2"/>
-          <p:cNvSpPr/>
-          <p:nvPr/>
-        </p:nvSpPr>
-        <p:spPr>
-          <a:xfrm>
-            <a:off x="658368" y="603504"/>
-            <a:ext cx="10872216" cy="530352"/>
+            <a:off x="658368" y="457200"/>
+            <a:ext cx="10872216" cy="548640"/>
           </a:xfrm>
           <a:prstGeom prst="rect">
             <a:avLst/>
@@ -25391,13 +21463,13 @@
       </p:sp>
       <p:sp>
         <p:nvSpPr>
-          <p:cNvPr id="5" name="Shape 3"/>
+          <p:cNvPr id="4" name="Shape 2"/>
           <p:cNvSpPr/>
           <p:nvPr/>
         </p:nvSpPr>
         <p:spPr>
           <a:xfrm>
-            <a:off x="658368" y="1188720"/>
+            <a:off x="658368" y="1078992"/>
             <a:ext cx="10872216" cy="10973"/>
           </a:xfrm>
           <a:prstGeom prst="rect">
@@ -25411,7 +21483,7 @@
       </p:sp>
       <p:sp>
         <p:nvSpPr>
-          <p:cNvPr id="6" name="Text 4"/>
+          <p:cNvPr id="5" name="Text 3"/>
           <p:cNvSpPr/>
           <p:nvPr/>
         </p:nvSpPr>
@@ -25450,7 +21522,7 @@
       </p:sp>
       <p:sp>
         <p:nvSpPr>
-          <p:cNvPr id="7" name="Text 5"/>
+          <p:cNvPr id="6" name="Text 4"/>
           <p:cNvSpPr/>
           <p:nvPr/>
         </p:nvSpPr>
@@ -25481,7 +21553,7 @@
                 <a:ea typeface="맑은 고딕" pitchFamily="34" charset="-122"/>
                 <a:cs typeface="맑은 고딕" pitchFamily="34" charset="-120"/>
               </a:rPr>
-              <a:t>표 9. 조항 추출 정확도 — 실물 계약서 30건 전수</a:t>
+              <a:t>조항 추출 정확도 — 실물 계약서 30건 전수</a:t>
             </a:r>
             <a:endParaRPr lang="en-US" sz="950" dirty="0"/>
           </a:p>
@@ -26343,7 +22415,7 @@
       </p:graphicFrame>
       <p:sp>
         <p:nvSpPr>
-          <p:cNvPr id="9" name="Text 6"/>
+          <p:cNvPr id="8" name="Text 5"/>
           <p:cNvSpPr/>
           <p:nvPr/>
         </p:nvSpPr>
@@ -26374,7 +22446,7 @@
                 <a:ea typeface="맑은 고딕" pitchFamily="34" charset="-122"/>
                 <a:cs typeface="맑은 고딕" pitchFamily="34" charset="-120"/>
               </a:rPr>
-              <a:t>표 10. 게이트 성능 — 30건 × 시나리오 5 = 150건 전수</a:t>
+              <a:t>게이트 성능 — 30건 × 시나리오 5 = 150건 전수</a:t>
             </a:r>
             <a:endParaRPr lang="en-US" sz="950" dirty="0"/>
           </a:p>
@@ -26493,7 +22565,7 @@
                           <a:ea typeface="맑은 고딕" pitchFamily="34" charset="-122"/>
                           <a:cs typeface="맑은 고딕" pitchFamily="34" charset="-120"/>
                         </a:rPr>
-                        <a:t>BEC 탐지율</a:t>
+                        <a:t>차단율 (위조 제외)</a:t>
                       </a:r>
                       <a:endParaRPr lang="en-US" sz="1000" dirty="0">
                         <a:latin typeface="맑은 고딕" charset="0"/>
@@ -27237,7 +23309,7 @@
       </p:graphicFrame>
       <p:sp>
         <p:nvSpPr>
-          <p:cNvPr id="11" name="Shape 7"/>
+          <p:cNvPr id="10" name="Shape 6"/>
           <p:cNvSpPr/>
           <p:nvPr/>
         </p:nvSpPr>
@@ -27259,7 +23331,7 @@
       </p:sp>
       <p:sp>
         <p:nvSpPr>
-          <p:cNvPr id="12" name="Text 8"/>
+          <p:cNvPr id="11" name="Text 7"/>
           <p:cNvSpPr/>
           <p:nvPr/>
         </p:nvSpPr>
@@ -27310,7 +23382,7 @@
                 <a:ea typeface="맑은 고딕" pitchFamily="34" charset="-122"/>
                 <a:cs typeface="맑은 고딕" pitchFamily="34" charset="-120"/>
               </a:rPr>
-              <a:t> — 오답 21건 중 19건이 미탐지다. 계약서마다 조항의 제목 · 번호 체계 · 배치가 다르고 본문에 섞여 있기 때문이다. 정규식으로 추출하면 공격의 83%가 통과해 게이트가 사실상 꺼진다. 규칙 기반으로는 열리지 않던 구간이다.</a:t>
+              <a:t> — 오답 21건 중 19건이 미탐지다. 계약서마다 조항의 제목 · 번호 체계 · 배치가 다르고 본문에 섞여 있기 때문이다. 정규식 경로는 자동통과 0건이라 뚫리지는 않으나 정상 거래의 82%까지 승인 대기로 보내 실사용이 불가능하다.</a:t>
             </a:r>
             <a:endParaRPr lang="en-US" sz="1050" dirty="0"/>
           </a:p>
@@ -27318,7 +23390,7 @@
       </p:sp>
       <p:sp>
         <p:nvSpPr>
-          <p:cNvPr id="13" name="Shape 9"/>
+          <p:cNvPr id="12" name="Shape 8"/>
           <p:cNvSpPr/>
           <p:nvPr/>
         </p:nvSpPr>
@@ -27340,7 +23412,7 @@
       </p:sp>
       <p:sp>
         <p:nvSpPr>
-          <p:cNvPr id="14" name="Shape 10"/>
+          <p:cNvPr id="13" name="Shape 9"/>
           <p:cNvSpPr/>
           <p:nvPr/>
         </p:nvSpPr>
@@ -27360,7 +23432,7 @@
       </p:sp>
       <p:sp>
         <p:nvSpPr>
-          <p:cNvPr id="15" name="Text 11"/>
+          <p:cNvPr id="14" name="Text 10"/>
           <p:cNvSpPr/>
           <p:nvPr/>
         </p:nvSpPr>
@@ -27423,7 +23495,7 @@
       </p:sp>
       <p:sp>
         <p:nvSpPr>
-          <p:cNvPr id="16" name="Shape 12"/>
+          <p:cNvPr id="15" name="Shape 11"/>
           <p:cNvSpPr/>
           <p:nvPr/>
         </p:nvSpPr>
@@ -27445,7 +23517,7 @@
       </p:sp>
       <p:sp>
         <p:nvSpPr>
-          <p:cNvPr id="17" name="Shape 13"/>
+          <p:cNvPr id="16" name="Shape 12"/>
           <p:cNvSpPr/>
           <p:nvPr/>
         </p:nvSpPr>
@@ -27465,7 +23537,7 @@
       </p:sp>
       <p:sp>
         <p:nvSpPr>
-          <p:cNvPr id="18" name="Text 14"/>
+          <p:cNvPr id="17" name="Text 13"/>
           <p:cNvSpPr/>
           <p:nvPr/>
         </p:nvSpPr>
@@ -27528,7 +23600,7 @@
       </p:sp>
       <p:sp>
         <p:nvSpPr>
-          <p:cNvPr id="19" name="Text 15"/>
+          <p:cNvPr id="18" name="Text 14"/>
           <p:cNvSpPr/>
           <p:nvPr/>
         </p:nvSpPr>
@@ -27559,48 +23631,9 @@
                 <a:ea typeface="맑은 고딕" pitchFamily="34" charset="-122"/>
                 <a:cs typeface="맑은 고딕" pitchFamily="34" charset="-120"/>
               </a:rPr>
-              <a:t>오탐률 0.0%는 오탐을 발견한 뒤 규칙(R10)을 제거해 얻은 값이며, 정상 시나리오 2종에 대한 값이다. 실제 사기 탐지 성능이 아니라 설계 의도대로 동작하는지의 검사다.</a:t>
+              <a:t>차단율은 위조 수정합의서(전건 미탐) 제외 값 — 포함 시 gold 66.7%·C 62.2%. 오탐률 0.0%는 하드 차단 기준이고 UNKNOWN(사람 승인)은 별도다. 규칙 튜닝에 안 쓴 holdout: 대상 183건 92.9% · 전체 232건 75.0%. 단 이 차단율들은 시나리오를 추출 결과로 생성하므로 독립 정답 라벨 대비 정확도가 아니라 규칙 발화율이다 — 사람 라벨과 대조한 것은 위 추출 정확도 30건뿐이다.</a:t>
             </a:r>
             <a:endParaRPr lang="en-US" sz="1000" dirty="0"/>
-          </a:p>
-        </p:txBody>
-      </p:sp>
-      <p:sp>
-        <p:nvSpPr>
-          <p:cNvPr id="20" name="Text 16"/>
-          <p:cNvSpPr/>
-          <p:nvPr/>
-        </p:nvSpPr>
-        <p:spPr>
-          <a:xfrm>
-            <a:off x="658368" y="6382512"/>
-            <a:ext cx="9774936" cy="237744"/>
-          </a:xfrm>
-          <a:prstGeom prst="rect">
-            <a:avLst/>
-          </a:prstGeom>
-          <a:noFill/>
-          <a:ln/>
-        </p:spPr>
-        <p:txBody>
-          <a:bodyPr wrap="square" lIns="0" tIns="0" rIns="0" bIns="0" rtlCol="0" anchor="ctr"/>
-          <a:lstStyle/>
-          <a:p>
-            <a:pPr indent="0" marL="0">
-              <a:buNone/>
-            </a:pPr>
-            <a:r>
-              <a:rPr lang="en-US" sz="850" dirty="0">
-                <a:solidFill>
-                  <a:srgbClr val="6B6A66"/>
-                </a:solidFill>
-                <a:latin typeface="맑은 고딕" pitchFamily="34" charset="0"/>
-                <a:ea typeface="맑은 고딕" pitchFamily="34" charset="-122"/>
-                <a:cs typeface="맑은 고딕" pitchFamily="34" charset="-120"/>
-              </a:rPr>
-              <a:t>출처 — docs/05_베이스라인A_실측.md · docs/06_E2E_탐지율_오탐률.md §5·§5-bis · 합격선(재현율 ≥90%)은 측정 전에 고정했고 이후 조정하지 않았다</a:t>
-            </a:r>
-            <a:endParaRPr lang="en-US" sz="850" dirty="0"/>
           </a:p>
         </p:txBody>
       </p:sp>

--- a/submission/기술설명서_KB_Payee_Guard.pptx
+++ b/submission/기술설명서_KB_Payee_Guard.pptx
@@ -4411,7 +4411,7 @@
                 <a:ea typeface="Consolas" pitchFamily="34" charset="-122"/>
                 <a:cs typeface="Consolas" pitchFamily="34" charset="-120"/>
               </a:rPr>
-              <a:t>  Ran 97 tests — OK   (macOS 3회 실측 0.23~0.35초)
+              <a:t>  Ran 128 tests — OK   (macOS 3회 실측 0.16~0.20초)
 </a:t>
             </a:r>
             <a:endParaRPr lang="en-US" sz="950" dirty="0"/>
